--- a/Lecture slides/AMOS C01 - Demo Day Preparation.pptx
+++ b/Lecture slides/AMOS C01 - Demo Day Preparation.pptx
@@ -2,39 +2,40 @@
 <file path=ppt/presentation.xml><?xml version="1.0" encoding="utf-8"?>
 <p:presentation xmlns:a="http://schemas.openxmlformats.org/drawingml/2006/main" xmlns:r="http://schemas.openxmlformats.org/officeDocument/2006/relationships" xmlns:mc="http://schemas.openxmlformats.org/markup-compatibility/2006" xmlns:mv="urn:schemas-microsoft-com:mac:vml" xmlns:p="http://schemas.openxmlformats.org/presentationml/2006/main" xmlns:c="http://schemas.openxmlformats.org/drawingml/2006/chart" xmlns:dgm="http://schemas.openxmlformats.org/drawingml/2006/diagram" xmlns:o="urn:schemas-microsoft-com:office:office" xmlns:v="urn:schemas-microsoft-com:vml" xmlns:pvml="urn:schemas-microsoft-com:office:powerpoint" xmlns:com="http://schemas.openxmlformats.org/drawingml/2006/compatibility" xmlns:p14="http://schemas.microsoft.com/office/powerpoint/2010/main" xmlns:p15="http://schemas.microsoft.com/office/powerpoint/2012/main" xmlns:ahyp="http://schemas.microsoft.com/office/drawing/2018/hyperlinkcolor" autoCompressPictures="0" strictFirstAndLastChars="0" saveSubsetFonts="1" showSpecialPlsOnTitleSld="0">
   <p:sldMasterIdLst>
-    <p:sldMasterId id="2147483654" r:id="rId5"/>
+    <p:sldMasterId id="2147483660" r:id="rId5"/>
+    <p:sldMasterId id="2147483661" r:id="rId6"/>
   </p:sldMasterIdLst>
   <p:notesMasterIdLst>
-    <p:notesMasterId r:id="rId6"/>
+    <p:notesMasterId r:id="rId7"/>
   </p:notesMasterIdLst>
   <p:sldIdLst>
-    <p:sldId id="256" r:id="rId7"/>
-    <p:sldId id="257" r:id="rId8"/>
-    <p:sldId id="258" r:id="rId9"/>
-    <p:sldId id="259" r:id="rId10"/>
-    <p:sldId id="260" r:id="rId11"/>
-    <p:sldId id="261" r:id="rId12"/>
-    <p:sldId id="262" r:id="rId13"/>
-    <p:sldId id="263" r:id="rId14"/>
-    <p:sldId id="264" r:id="rId15"/>
-    <p:sldId id="265" r:id="rId16"/>
-    <p:sldId id="266" r:id="rId17"/>
-    <p:sldId id="267" r:id="rId18"/>
-    <p:sldId id="268" r:id="rId19"/>
-    <p:sldId id="269" r:id="rId20"/>
-    <p:sldId id="270" r:id="rId21"/>
-    <p:sldId id="271" r:id="rId22"/>
-    <p:sldId id="272" r:id="rId23"/>
-    <p:sldId id="273" r:id="rId24"/>
-    <p:sldId id="274" r:id="rId25"/>
-    <p:sldId id="275" r:id="rId26"/>
-    <p:sldId id="276" r:id="rId27"/>
-    <p:sldId id="277" r:id="rId28"/>
-    <p:sldId id="278" r:id="rId29"/>
-    <p:sldId id="279" r:id="rId30"/>
-    <p:sldId id="280" r:id="rId31"/>
-    <p:sldId id="281" r:id="rId32"/>
-    <p:sldId id="282" r:id="rId33"/>
+    <p:sldId id="256" r:id="rId8"/>
+    <p:sldId id="257" r:id="rId9"/>
+    <p:sldId id="258" r:id="rId10"/>
+    <p:sldId id="259" r:id="rId11"/>
+    <p:sldId id="260" r:id="rId12"/>
+    <p:sldId id="261" r:id="rId13"/>
+    <p:sldId id="262" r:id="rId14"/>
+    <p:sldId id="263" r:id="rId15"/>
+    <p:sldId id="264" r:id="rId16"/>
+    <p:sldId id="265" r:id="rId17"/>
+    <p:sldId id="266" r:id="rId18"/>
+    <p:sldId id="267" r:id="rId19"/>
+    <p:sldId id="268" r:id="rId20"/>
+    <p:sldId id="269" r:id="rId21"/>
+    <p:sldId id="270" r:id="rId22"/>
+    <p:sldId id="271" r:id="rId23"/>
+    <p:sldId id="272" r:id="rId24"/>
+    <p:sldId id="273" r:id="rId25"/>
+    <p:sldId id="274" r:id="rId26"/>
+    <p:sldId id="275" r:id="rId27"/>
+    <p:sldId id="276" r:id="rId28"/>
+    <p:sldId id="277" r:id="rId29"/>
+    <p:sldId id="278" r:id="rId30"/>
+    <p:sldId id="279" r:id="rId31"/>
+    <p:sldId id="280" r:id="rId32"/>
+    <p:sldId id="281" r:id="rId33"/>
+    <p:sldId id="282" r:id="rId34"/>
   </p:sldIdLst>
   <p:sldSz cy="5143500" cx="9144000"/>
   <p:notesSz cx="6858000" cy="9144000"/>
@@ -717,7 +718,7 @@
   <p:cSld>
     <p:spTree>
       <p:nvGrpSpPr>
-        <p:cNvPr id="47" name="Shape 47"/>
+        <p:cNvPr id="89" name="Shape 89"/>
         <p:cNvGrpSpPr/>
         <p:nvPr/>
       </p:nvGrpSpPr>
@@ -731,7 +732,7 @@
       </p:grpSpPr>
       <p:sp>
         <p:nvSpPr>
-          <p:cNvPr id="48" name="Google Shape;48;g2cd8d5558b2_0_59:notes"/>
+          <p:cNvPr id="90" name="Google Shape;90;g2cd8d5558b2_0_59:notes"/>
           <p:cNvSpPr/>
           <p:nvPr>
             <p:ph idx="2" type="sldImg"/>
@@ -766,7 +767,7 @@
       </p:sp>
       <p:sp>
         <p:nvSpPr>
-          <p:cNvPr id="49" name="Google Shape;49;g2cd8d5558b2_0_59:notes"/>
+          <p:cNvPr id="91" name="Google Shape;91;g2cd8d5558b2_0_59:notes"/>
           <p:cNvSpPr txBox="1"/>
           <p:nvPr>
             <p:ph idx="1" type="body"/>
@@ -816,7 +817,7 @@
   <p:cSld>
     <p:spTree>
       <p:nvGrpSpPr>
-        <p:cNvPr id="107" name="Shape 107"/>
+        <p:cNvPr id="149" name="Shape 149"/>
         <p:cNvGrpSpPr/>
         <p:nvPr/>
       </p:nvGrpSpPr>
@@ -830,7 +831,7 @@
       </p:grpSpPr>
       <p:sp>
         <p:nvSpPr>
-          <p:cNvPr id="108" name="Google Shape;108;g15365535e7d_0_47:notes"/>
+          <p:cNvPr id="150" name="Google Shape;150;g15365535e7d_0_47:notes"/>
           <p:cNvSpPr/>
           <p:nvPr>
             <p:ph idx="2" type="sldImg"/>
@@ -865,7 +866,7 @@
       </p:sp>
       <p:sp>
         <p:nvSpPr>
-          <p:cNvPr id="109" name="Google Shape;109;g15365535e7d_0_47:notes"/>
+          <p:cNvPr id="151" name="Google Shape;151;g15365535e7d_0_47:notes"/>
           <p:cNvSpPr txBox="1"/>
           <p:nvPr>
             <p:ph idx="1" type="body"/>
@@ -915,7 +916,7 @@
   <p:cSld>
     <p:spTree>
       <p:nvGrpSpPr>
-        <p:cNvPr id="114" name="Shape 114"/>
+        <p:cNvPr id="156" name="Shape 156"/>
         <p:cNvGrpSpPr/>
         <p:nvPr/>
       </p:nvGrpSpPr>
@@ -929,7 +930,7 @@
       </p:grpSpPr>
       <p:sp>
         <p:nvSpPr>
-          <p:cNvPr id="115" name="Google Shape;115;g206af0edc8b_0_0:notes"/>
+          <p:cNvPr id="157" name="Google Shape;157;g206af0edc8b_0_0:notes"/>
           <p:cNvSpPr/>
           <p:nvPr>
             <p:ph idx="2" type="sldImg"/>
@@ -964,7 +965,7 @@
       </p:sp>
       <p:sp>
         <p:nvSpPr>
-          <p:cNvPr id="116" name="Google Shape;116;g206af0edc8b_0_0:notes"/>
+          <p:cNvPr id="158" name="Google Shape;158;g206af0edc8b_0_0:notes"/>
           <p:cNvSpPr txBox="1"/>
           <p:nvPr>
             <p:ph idx="1" type="body"/>
@@ -1014,7 +1015,7 @@
   <p:cSld>
     <p:spTree>
       <p:nvGrpSpPr>
-        <p:cNvPr id="121" name="Shape 121"/>
+        <p:cNvPr id="163" name="Shape 163"/>
         <p:cNvGrpSpPr/>
         <p:nvPr/>
       </p:nvGrpSpPr>
@@ -1028,7 +1029,7 @@
       </p:grpSpPr>
       <p:sp>
         <p:nvSpPr>
-          <p:cNvPr id="122" name="Google Shape;122;g15365535e7d_0_54:notes"/>
+          <p:cNvPr id="164" name="Google Shape;164;g15365535e7d_0_54:notes"/>
           <p:cNvSpPr/>
           <p:nvPr>
             <p:ph idx="2" type="sldImg"/>
@@ -1063,7 +1064,7 @@
       </p:sp>
       <p:sp>
         <p:nvSpPr>
-          <p:cNvPr id="123" name="Google Shape;123;g15365535e7d_0_54:notes"/>
+          <p:cNvPr id="165" name="Google Shape;165;g15365535e7d_0_54:notes"/>
           <p:cNvSpPr txBox="1"/>
           <p:nvPr>
             <p:ph idx="1" type="body"/>
@@ -1113,7 +1114,7 @@
   <p:cSld>
     <p:spTree>
       <p:nvGrpSpPr>
-        <p:cNvPr id="129" name="Shape 129"/>
+        <p:cNvPr id="171" name="Shape 171"/>
         <p:cNvGrpSpPr/>
         <p:nvPr/>
       </p:nvGrpSpPr>
@@ -1127,7 +1128,7 @@
       </p:grpSpPr>
       <p:sp>
         <p:nvSpPr>
-          <p:cNvPr id="130" name="Google Shape;130;g1e4fd58693c_0_20:notes"/>
+          <p:cNvPr id="172" name="Google Shape;172;g1e4fd58693c_0_20:notes"/>
           <p:cNvSpPr/>
           <p:nvPr>
             <p:ph idx="2" type="sldImg"/>
@@ -1162,7 +1163,7 @@
       </p:sp>
       <p:sp>
         <p:nvSpPr>
-          <p:cNvPr id="131" name="Google Shape;131;g1e4fd58693c_0_20:notes"/>
+          <p:cNvPr id="173" name="Google Shape;173;g1e4fd58693c_0_20:notes"/>
           <p:cNvSpPr txBox="1"/>
           <p:nvPr>
             <p:ph idx="1" type="body"/>
@@ -1212,7 +1213,7 @@
   <p:cSld>
     <p:spTree>
       <p:nvGrpSpPr>
-        <p:cNvPr id="136" name="Shape 136"/>
+        <p:cNvPr id="178" name="Shape 178"/>
         <p:cNvGrpSpPr/>
         <p:nvPr/>
       </p:nvGrpSpPr>
@@ -1226,7 +1227,7 @@
       </p:grpSpPr>
       <p:sp>
         <p:nvSpPr>
-          <p:cNvPr id="137" name="Google Shape;137;g2397aca6fd1_0_114:notes"/>
+          <p:cNvPr id="179" name="Google Shape;179;g2397aca6fd1_0_114:notes"/>
           <p:cNvSpPr/>
           <p:nvPr>
             <p:ph idx="2" type="sldImg"/>
@@ -1261,7 +1262,7 @@
       </p:sp>
       <p:sp>
         <p:nvSpPr>
-          <p:cNvPr id="138" name="Google Shape;138;g2397aca6fd1_0_114:notes"/>
+          <p:cNvPr id="180" name="Google Shape;180;g2397aca6fd1_0_114:notes"/>
           <p:cNvSpPr txBox="1"/>
           <p:nvPr>
             <p:ph idx="1" type="body"/>
@@ -1311,7 +1312,7 @@
   <p:cSld>
     <p:spTree>
       <p:nvGrpSpPr>
-        <p:cNvPr id="143" name="Shape 143"/>
+        <p:cNvPr id="185" name="Shape 185"/>
         <p:cNvGrpSpPr/>
         <p:nvPr/>
       </p:nvGrpSpPr>
@@ -1325,7 +1326,7 @@
       </p:grpSpPr>
       <p:sp>
         <p:nvSpPr>
-          <p:cNvPr id="144" name="Google Shape;144;g15365535e7d_0_61:notes"/>
+          <p:cNvPr id="186" name="Google Shape;186;g15365535e7d_0_61:notes"/>
           <p:cNvSpPr/>
           <p:nvPr>
             <p:ph idx="2" type="sldImg"/>
@@ -1360,7 +1361,7 @@
       </p:sp>
       <p:sp>
         <p:nvSpPr>
-          <p:cNvPr id="145" name="Google Shape;145;g15365535e7d_0_61:notes"/>
+          <p:cNvPr id="187" name="Google Shape;187;g15365535e7d_0_61:notes"/>
           <p:cNvSpPr txBox="1"/>
           <p:nvPr>
             <p:ph idx="1" type="body"/>
@@ -1410,7 +1411,7 @@
   <p:cSld>
     <p:spTree>
       <p:nvGrpSpPr>
-        <p:cNvPr id="150" name="Shape 150"/>
+        <p:cNvPr id="192" name="Shape 192"/>
         <p:cNvGrpSpPr/>
         <p:nvPr/>
       </p:nvGrpSpPr>
@@ -1424,7 +1425,7 @@
       </p:grpSpPr>
       <p:sp>
         <p:nvSpPr>
-          <p:cNvPr id="151" name="Google Shape;151;g2397aca6fd1_0_94:notes"/>
+          <p:cNvPr id="193" name="Google Shape;193;g2397aca6fd1_0_94:notes"/>
           <p:cNvSpPr/>
           <p:nvPr>
             <p:ph idx="2" type="sldImg"/>
@@ -1459,7 +1460,7 @@
       </p:sp>
       <p:sp>
         <p:nvSpPr>
-          <p:cNvPr id="152" name="Google Shape;152;g2397aca6fd1_0_94:notes"/>
+          <p:cNvPr id="194" name="Google Shape;194;g2397aca6fd1_0_94:notes"/>
           <p:cNvSpPr txBox="1"/>
           <p:nvPr>
             <p:ph idx="1" type="body"/>
@@ -1509,7 +1510,7 @@
   <p:cSld>
     <p:spTree>
       <p:nvGrpSpPr>
-        <p:cNvPr id="155" name="Shape 155"/>
+        <p:cNvPr id="197" name="Shape 197"/>
         <p:cNvGrpSpPr/>
         <p:nvPr/>
       </p:nvGrpSpPr>
@@ -1523,7 +1524,7 @@
       </p:grpSpPr>
       <p:sp>
         <p:nvSpPr>
-          <p:cNvPr id="156" name="Google Shape;156;g2397aca6fd1_0_76:notes"/>
+          <p:cNvPr id="198" name="Google Shape;198;g2397aca6fd1_0_76:notes"/>
           <p:cNvSpPr/>
           <p:nvPr>
             <p:ph idx="2" type="sldImg"/>
@@ -1558,7 +1559,7 @@
       </p:sp>
       <p:sp>
         <p:nvSpPr>
-          <p:cNvPr id="157" name="Google Shape;157;g2397aca6fd1_0_76:notes"/>
+          <p:cNvPr id="199" name="Google Shape;199;g2397aca6fd1_0_76:notes"/>
           <p:cNvSpPr txBox="1"/>
           <p:nvPr>
             <p:ph idx="1" type="body"/>
@@ -1608,7 +1609,7 @@
   <p:cSld>
     <p:spTree>
       <p:nvGrpSpPr>
-        <p:cNvPr id="162" name="Shape 162"/>
+        <p:cNvPr id="204" name="Shape 204"/>
         <p:cNvGrpSpPr/>
         <p:nvPr/>
       </p:nvGrpSpPr>
@@ -1622,7 +1623,7 @@
       </p:grpSpPr>
       <p:sp>
         <p:nvSpPr>
-          <p:cNvPr id="163" name="Google Shape;163;g2397aca6fd1_0_121:notes"/>
+          <p:cNvPr id="205" name="Google Shape;205;g2397aca6fd1_0_121:notes"/>
           <p:cNvSpPr/>
           <p:nvPr>
             <p:ph idx="2" type="sldImg"/>
@@ -1657,7 +1658,7 @@
       </p:sp>
       <p:sp>
         <p:nvSpPr>
-          <p:cNvPr id="164" name="Google Shape;164;g2397aca6fd1_0_121:notes"/>
+          <p:cNvPr id="206" name="Google Shape;206;g2397aca6fd1_0_121:notes"/>
           <p:cNvSpPr txBox="1"/>
           <p:nvPr>
             <p:ph idx="1" type="body"/>
@@ -1707,7 +1708,7 @@
   <p:cSld>
     <p:spTree>
       <p:nvGrpSpPr>
-        <p:cNvPr id="169" name="Shape 169"/>
+        <p:cNvPr id="211" name="Shape 211"/>
         <p:cNvGrpSpPr/>
         <p:nvPr/>
       </p:nvGrpSpPr>
@@ -1721,7 +1722,7 @@
       </p:grpSpPr>
       <p:sp>
         <p:nvSpPr>
-          <p:cNvPr id="170" name="Google Shape;170;g2397aca6fd1_0_127:notes"/>
+          <p:cNvPr id="212" name="Google Shape;212;g2397aca6fd1_0_127:notes"/>
           <p:cNvSpPr/>
           <p:nvPr>
             <p:ph idx="2" type="sldImg"/>
@@ -1756,7 +1757,7 @@
       </p:sp>
       <p:sp>
         <p:nvSpPr>
-          <p:cNvPr id="171" name="Google Shape;171;g2397aca6fd1_0_127:notes"/>
+          <p:cNvPr id="213" name="Google Shape;213;g2397aca6fd1_0_127:notes"/>
           <p:cNvSpPr txBox="1"/>
           <p:nvPr>
             <p:ph idx="1" type="body"/>
@@ -1806,7 +1807,7 @@
   <p:cSld>
     <p:spTree>
       <p:nvGrpSpPr>
-        <p:cNvPr id="53" name="Shape 53"/>
+        <p:cNvPr id="95" name="Shape 95"/>
         <p:cNvGrpSpPr/>
         <p:nvPr/>
       </p:nvGrpSpPr>
@@ -1820,7 +1821,7 @@
       </p:grpSpPr>
       <p:sp>
         <p:nvSpPr>
-          <p:cNvPr id="54" name="Google Shape;54;g22d6ca75d5b_1_0:notes"/>
+          <p:cNvPr id="96" name="Google Shape;96;g22d6ca75d5b_1_0:notes"/>
           <p:cNvSpPr/>
           <p:nvPr>
             <p:ph idx="2" type="sldImg"/>
@@ -1855,7 +1856,7 @@
       </p:sp>
       <p:sp>
         <p:nvSpPr>
-          <p:cNvPr id="55" name="Google Shape;55;g22d6ca75d5b_1_0:notes"/>
+          <p:cNvPr id="97" name="Google Shape;97;g22d6ca75d5b_1_0:notes"/>
           <p:cNvSpPr txBox="1"/>
           <p:nvPr>
             <p:ph idx="1" type="body"/>
@@ -1905,7 +1906,7 @@
   <p:cSld>
     <p:spTree>
       <p:nvGrpSpPr>
-        <p:cNvPr id="176" name="Shape 176"/>
+        <p:cNvPr id="218" name="Shape 218"/>
         <p:cNvGrpSpPr/>
         <p:nvPr/>
       </p:nvGrpSpPr>
@@ -1919,7 +1920,7 @@
       </p:grpSpPr>
       <p:sp>
         <p:nvSpPr>
-          <p:cNvPr id="177" name="Google Shape;177;g2397aca6fd1_0_98:notes"/>
+          <p:cNvPr id="219" name="Google Shape;219;g2397aca6fd1_0_98:notes"/>
           <p:cNvSpPr/>
           <p:nvPr>
             <p:ph idx="2" type="sldImg"/>
@@ -1954,7 +1955,7 @@
       </p:sp>
       <p:sp>
         <p:nvSpPr>
-          <p:cNvPr id="178" name="Google Shape;178;g2397aca6fd1_0_98:notes"/>
+          <p:cNvPr id="220" name="Google Shape;220;g2397aca6fd1_0_98:notes"/>
           <p:cNvSpPr txBox="1"/>
           <p:nvPr>
             <p:ph idx="1" type="body"/>
@@ -2004,7 +2005,7 @@
   <p:cSld>
     <p:spTree>
       <p:nvGrpSpPr>
-        <p:cNvPr id="181" name="Shape 181"/>
+        <p:cNvPr id="223" name="Shape 223"/>
         <p:cNvGrpSpPr/>
         <p:nvPr/>
       </p:nvGrpSpPr>
@@ -2018,7 +2019,7 @@
       </p:grpSpPr>
       <p:sp>
         <p:nvSpPr>
-          <p:cNvPr id="182" name="Google Shape;182;g2397aca6fd1_0_133:notes"/>
+          <p:cNvPr id="224" name="Google Shape;224;g2397aca6fd1_0_133:notes"/>
           <p:cNvSpPr/>
           <p:nvPr>
             <p:ph idx="2" type="sldImg"/>
@@ -2053,7 +2054,7 @@
       </p:sp>
       <p:sp>
         <p:nvSpPr>
-          <p:cNvPr id="183" name="Google Shape;183;g2397aca6fd1_0_133:notes"/>
+          <p:cNvPr id="225" name="Google Shape;225;g2397aca6fd1_0_133:notes"/>
           <p:cNvSpPr txBox="1"/>
           <p:nvPr>
             <p:ph idx="1" type="body"/>
@@ -2103,7 +2104,7 @@
   <p:cSld>
     <p:spTree>
       <p:nvGrpSpPr>
-        <p:cNvPr id="188" name="Shape 188"/>
+        <p:cNvPr id="230" name="Shape 230"/>
         <p:cNvGrpSpPr/>
         <p:nvPr/>
       </p:nvGrpSpPr>
@@ -2117,7 +2118,7 @@
       </p:grpSpPr>
       <p:sp>
         <p:nvSpPr>
-          <p:cNvPr id="189" name="Google Shape;189;g2397aca6fd1_0_139:notes"/>
+          <p:cNvPr id="231" name="Google Shape;231;g2397aca6fd1_0_139:notes"/>
           <p:cNvSpPr/>
           <p:nvPr>
             <p:ph idx="2" type="sldImg"/>
@@ -2152,7 +2153,7 @@
       </p:sp>
       <p:sp>
         <p:nvSpPr>
-          <p:cNvPr id="190" name="Google Shape;190;g2397aca6fd1_0_139:notes"/>
+          <p:cNvPr id="232" name="Google Shape;232;g2397aca6fd1_0_139:notes"/>
           <p:cNvSpPr txBox="1"/>
           <p:nvPr>
             <p:ph idx="1" type="body"/>
@@ -2202,7 +2203,7 @@
   <p:cSld>
     <p:spTree>
       <p:nvGrpSpPr>
-        <p:cNvPr id="195" name="Shape 195"/>
+        <p:cNvPr id="237" name="Shape 237"/>
         <p:cNvGrpSpPr/>
         <p:nvPr/>
       </p:nvGrpSpPr>
@@ -2216,7 +2217,7 @@
       </p:grpSpPr>
       <p:sp>
         <p:nvSpPr>
-          <p:cNvPr id="196" name="Google Shape;196;g2397aca6fd1_0_82:notes"/>
+          <p:cNvPr id="238" name="Google Shape;238;g2397aca6fd1_0_82:notes"/>
           <p:cNvSpPr/>
           <p:nvPr>
             <p:ph idx="2" type="sldImg"/>
@@ -2251,7 +2252,7 @@
       </p:sp>
       <p:sp>
         <p:nvSpPr>
-          <p:cNvPr id="197" name="Google Shape;197;g2397aca6fd1_0_82:notes"/>
+          <p:cNvPr id="239" name="Google Shape;239;g2397aca6fd1_0_82:notes"/>
           <p:cNvSpPr txBox="1"/>
           <p:nvPr>
             <p:ph idx="1" type="body"/>
@@ -2301,7 +2302,7 @@
   <p:cSld>
     <p:spTree>
       <p:nvGrpSpPr>
-        <p:cNvPr id="202" name="Shape 202"/>
+        <p:cNvPr id="244" name="Shape 244"/>
         <p:cNvGrpSpPr/>
         <p:nvPr/>
       </p:nvGrpSpPr>
@@ -2315,7 +2316,7 @@
       </p:grpSpPr>
       <p:sp>
         <p:nvSpPr>
-          <p:cNvPr id="203" name="Google Shape;203;g2397aca6fd1_0_38:notes"/>
+          <p:cNvPr id="245" name="Google Shape;245;g2397aca6fd1_0_38:notes"/>
           <p:cNvSpPr/>
           <p:nvPr>
             <p:ph idx="2" type="sldImg"/>
@@ -2350,7 +2351,7 @@
       </p:sp>
       <p:sp>
         <p:nvSpPr>
-          <p:cNvPr id="204" name="Google Shape;204;g2397aca6fd1_0_38:notes"/>
+          <p:cNvPr id="246" name="Google Shape;246;g2397aca6fd1_0_38:notes"/>
           <p:cNvSpPr txBox="1"/>
           <p:nvPr>
             <p:ph idx="1" type="body"/>
@@ -2400,7 +2401,7 @@
   <p:cSld>
     <p:spTree>
       <p:nvGrpSpPr>
-        <p:cNvPr id="208" name="Shape 208"/>
+        <p:cNvPr id="250" name="Shape 250"/>
         <p:cNvGrpSpPr/>
         <p:nvPr/>
       </p:nvGrpSpPr>
@@ -2414,7 +2415,7 @@
       </p:grpSpPr>
       <p:sp>
         <p:nvSpPr>
-          <p:cNvPr id="209" name="Google Shape;209;g2397aca6fd1_0_43:notes"/>
+          <p:cNvPr id="251" name="Google Shape;251;g2397aca6fd1_0_43:notes"/>
           <p:cNvSpPr/>
           <p:nvPr>
             <p:ph idx="2" type="sldImg"/>
@@ -2449,7 +2450,7 @@
       </p:sp>
       <p:sp>
         <p:nvSpPr>
-          <p:cNvPr id="210" name="Google Shape;210;g2397aca6fd1_0_43:notes"/>
+          <p:cNvPr id="252" name="Google Shape;252;g2397aca6fd1_0_43:notes"/>
           <p:cNvSpPr txBox="1"/>
           <p:nvPr>
             <p:ph idx="1" type="body"/>
@@ -2499,7 +2500,7 @@
   <p:cSld>
     <p:spTree>
       <p:nvGrpSpPr>
-        <p:cNvPr id="215" name="Shape 215"/>
+        <p:cNvPr id="257" name="Shape 257"/>
         <p:cNvGrpSpPr/>
         <p:nvPr/>
       </p:nvGrpSpPr>
@@ -2513,7 +2514,7 @@
       </p:grpSpPr>
       <p:sp>
         <p:nvSpPr>
-          <p:cNvPr id="216" name="Google Shape;216;g1e4fd58693c_0_0:notes"/>
+          <p:cNvPr id="258" name="Google Shape;258;g1e4fd58693c_0_0:notes"/>
           <p:cNvSpPr/>
           <p:nvPr>
             <p:ph idx="2" type="sldImg"/>
@@ -2548,7 +2549,7 @@
       </p:sp>
       <p:sp>
         <p:nvSpPr>
-          <p:cNvPr id="217" name="Google Shape;217;g1e4fd58693c_0_0:notes"/>
+          <p:cNvPr id="259" name="Google Shape;259;g1e4fd58693c_0_0:notes"/>
           <p:cNvSpPr txBox="1"/>
           <p:nvPr>
             <p:ph idx="1" type="body"/>
@@ -2598,7 +2599,7 @@
   <p:cSld>
     <p:spTree>
       <p:nvGrpSpPr>
-        <p:cNvPr id="223" name="Shape 223"/>
+        <p:cNvPr id="265" name="Shape 265"/>
         <p:cNvGrpSpPr/>
         <p:nvPr/>
       </p:nvGrpSpPr>
@@ -2612,7 +2613,7 @@
       </p:grpSpPr>
       <p:sp>
         <p:nvSpPr>
-          <p:cNvPr id="224" name="Google Shape;224;g1e4fd58693c_0_7:notes"/>
+          <p:cNvPr id="266" name="Google Shape;266;g1e4fd58693c_0_7:notes"/>
           <p:cNvSpPr/>
           <p:nvPr>
             <p:ph idx="2" type="sldImg"/>
@@ -2647,7 +2648,7 @@
       </p:sp>
       <p:sp>
         <p:nvSpPr>
-          <p:cNvPr id="225" name="Google Shape;225;g1e4fd58693c_0_7:notes"/>
+          <p:cNvPr id="267" name="Google Shape;267;g1e4fd58693c_0_7:notes"/>
           <p:cNvSpPr txBox="1"/>
           <p:nvPr>
             <p:ph idx="1" type="body"/>
@@ -2697,7 +2698,7 @@
   <p:cSld>
     <p:spTree>
       <p:nvGrpSpPr>
-        <p:cNvPr id="60" name="Shape 60"/>
+        <p:cNvPr id="102" name="Shape 102"/>
         <p:cNvGrpSpPr/>
         <p:nvPr/>
       </p:nvGrpSpPr>
@@ -2711,7 +2712,7 @@
       </p:grpSpPr>
       <p:sp>
         <p:nvSpPr>
-          <p:cNvPr id="61" name="Google Shape;61;g2e4cbec3948_0_0:notes"/>
+          <p:cNvPr id="103" name="Google Shape;103;g2e4cbec3948_0_0:notes"/>
           <p:cNvSpPr/>
           <p:nvPr>
             <p:ph idx="2" type="sldImg"/>
@@ -2746,7 +2747,7 @@
       </p:sp>
       <p:sp>
         <p:nvSpPr>
-          <p:cNvPr id="62" name="Google Shape;62;g2e4cbec3948_0_0:notes"/>
+          <p:cNvPr id="104" name="Google Shape;104;g2e4cbec3948_0_0:notes"/>
           <p:cNvSpPr txBox="1"/>
           <p:nvPr>
             <p:ph idx="1" type="body"/>
@@ -2796,7 +2797,7 @@
   <p:cSld>
     <p:spTree>
       <p:nvGrpSpPr>
-        <p:cNvPr id="67" name="Shape 67"/>
+        <p:cNvPr id="109" name="Shape 109"/>
         <p:cNvGrpSpPr/>
         <p:nvPr/>
       </p:nvGrpSpPr>
@@ -2810,7 +2811,7 @@
       </p:grpSpPr>
       <p:sp>
         <p:nvSpPr>
-          <p:cNvPr id="68" name="Google Shape;68;g2397aca6fd1_0_88:notes"/>
+          <p:cNvPr id="110" name="Google Shape;110;g2397aca6fd1_0_88:notes"/>
           <p:cNvSpPr/>
           <p:nvPr>
             <p:ph idx="2" type="sldImg"/>
@@ -2845,7 +2846,7 @@
       </p:sp>
       <p:sp>
         <p:nvSpPr>
-          <p:cNvPr id="69" name="Google Shape;69;g2397aca6fd1_0_88:notes"/>
+          <p:cNvPr id="111" name="Google Shape;111;g2397aca6fd1_0_88:notes"/>
           <p:cNvSpPr txBox="1"/>
           <p:nvPr>
             <p:ph idx="1" type="body"/>
@@ -2895,7 +2896,7 @@
   <p:cSld>
     <p:spTree>
       <p:nvGrpSpPr>
-        <p:cNvPr id="72" name="Shape 72"/>
+        <p:cNvPr id="114" name="Shape 114"/>
         <p:cNvGrpSpPr/>
         <p:nvPr/>
       </p:nvGrpSpPr>
@@ -2909,7 +2910,7 @@
       </p:grpSpPr>
       <p:sp>
         <p:nvSpPr>
-          <p:cNvPr id="73" name="Google Shape;73;g15365535e7d_0_0:notes"/>
+          <p:cNvPr id="115" name="Google Shape;115;g15365535e7d_0_0:notes"/>
           <p:cNvSpPr/>
           <p:nvPr>
             <p:ph idx="2" type="sldImg"/>
@@ -2944,7 +2945,7 @@
       </p:sp>
       <p:sp>
         <p:nvSpPr>
-          <p:cNvPr id="74" name="Google Shape;74;g15365535e7d_0_0:notes"/>
+          <p:cNvPr id="116" name="Google Shape;116;g15365535e7d_0_0:notes"/>
           <p:cNvSpPr txBox="1"/>
           <p:nvPr>
             <p:ph idx="1" type="body"/>
@@ -2994,7 +2995,7 @@
   <p:cSld>
     <p:spTree>
       <p:nvGrpSpPr>
-        <p:cNvPr id="79" name="Shape 79"/>
+        <p:cNvPr id="121" name="Shape 121"/>
         <p:cNvGrpSpPr/>
         <p:nvPr/>
       </p:nvGrpSpPr>
@@ -3008,7 +3009,7 @@
       </p:grpSpPr>
       <p:sp>
         <p:nvSpPr>
-          <p:cNvPr id="80" name="Google Shape;80;g15365535e7d_0_7:notes"/>
+          <p:cNvPr id="122" name="Google Shape;122;g15365535e7d_0_7:notes"/>
           <p:cNvSpPr/>
           <p:nvPr>
             <p:ph idx="2" type="sldImg"/>
@@ -3043,7 +3044,7 @@
       </p:sp>
       <p:sp>
         <p:nvSpPr>
-          <p:cNvPr id="81" name="Google Shape;81;g15365535e7d_0_7:notes"/>
+          <p:cNvPr id="123" name="Google Shape;123;g15365535e7d_0_7:notes"/>
           <p:cNvSpPr txBox="1"/>
           <p:nvPr>
             <p:ph idx="1" type="body"/>
@@ -3093,7 +3094,7 @@
   <p:cSld>
     <p:spTree>
       <p:nvGrpSpPr>
-        <p:cNvPr id="86" name="Shape 86"/>
+        <p:cNvPr id="128" name="Shape 128"/>
         <p:cNvGrpSpPr/>
         <p:nvPr/>
       </p:nvGrpSpPr>
@@ -3107,7 +3108,7 @@
       </p:grpSpPr>
       <p:sp>
         <p:nvSpPr>
-          <p:cNvPr id="87" name="Google Shape;87;g13ec7d76bec_0_95:notes"/>
+          <p:cNvPr id="129" name="Google Shape;129;g13ec7d76bec_0_95:notes"/>
           <p:cNvSpPr/>
           <p:nvPr>
             <p:ph idx="2" type="sldImg"/>
@@ -3142,7 +3143,7 @@
       </p:sp>
       <p:sp>
         <p:nvSpPr>
-          <p:cNvPr id="88" name="Google Shape;88;g13ec7d76bec_0_95:notes"/>
+          <p:cNvPr id="130" name="Google Shape;130;g13ec7d76bec_0_95:notes"/>
           <p:cNvSpPr txBox="1"/>
           <p:nvPr>
             <p:ph idx="1" type="body"/>
@@ -3192,7 +3193,7 @@
   <p:cSld>
     <p:spTree>
       <p:nvGrpSpPr>
-        <p:cNvPr id="93" name="Shape 93"/>
+        <p:cNvPr id="135" name="Shape 135"/>
         <p:cNvGrpSpPr/>
         <p:nvPr/>
       </p:nvGrpSpPr>
@@ -3206,7 +3207,7 @@
       </p:grpSpPr>
       <p:sp>
         <p:nvSpPr>
-          <p:cNvPr id="94" name="Google Shape;94;g2397aca6fd1_0_102:notes"/>
+          <p:cNvPr id="136" name="Google Shape;136;g2397aca6fd1_0_102:notes"/>
           <p:cNvSpPr/>
           <p:nvPr>
             <p:ph idx="2" type="sldImg"/>
@@ -3241,7 +3242,7 @@
       </p:sp>
       <p:sp>
         <p:nvSpPr>
-          <p:cNvPr id="95" name="Google Shape;95;g2397aca6fd1_0_102:notes"/>
+          <p:cNvPr id="137" name="Google Shape;137;g2397aca6fd1_0_102:notes"/>
           <p:cNvSpPr txBox="1"/>
           <p:nvPr>
             <p:ph idx="1" type="body"/>
@@ -3291,7 +3292,7 @@
   <p:cSld>
     <p:spTree>
       <p:nvGrpSpPr>
-        <p:cNvPr id="100" name="Shape 100"/>
+        <p:cNvPr id="142" name="Shape 142"/>
         <p:cNvGrpSpPr/>
         <p:nvPr/>
       </p:nvGrpSpPr>
@@ -3305,7 +3306,7 @@
       </p:grpSpPr>
       <p:sp>
         <p:nvSpPr>
-          <p:cNvPr id="101" name="Google Shape;101;g15365535e7d_0_25:notes"/>
+          <p:cNvPr id="143" name="Google Shape;143;g15365535e7d_0_25:notes"/>
           <p:cNvSpPr/>
           <p:nvPr>
             <p:ph idx="2" type="sldImg"/>
@@ -3340,7 +3341,7 @@
       </p:sp>
       <p:sp>
         <p:nvSpPr>
-          <p:cNvPr id="102" name="Google Shape;102;g15365535e7d_0_25:notes"/>
+          <p:cNvPr id="144" name="Google Shape;144;g15365535e7d_0_25:notes"/>
           <p:cNvSpPr txBox="1"/>
           <p:nvPr>
             <p:ph idx="1" type="body"/>
@@ -3831,6 +3832,1169 @@
           </p:txBody>
         </p:sp>
       </p:grpSp>
+    </p:spTree>
+  </p:cSld>
+  <p:clrMapOvr>
+    <a:masterClrMapping/>
+  </p:clrMapOvr>
+</p:sldLayout>
+</file>
+
+<file path=ppt/slideLayouts/slideLayout10.xml><?xml version="1.0" encoding="utf-8"?>
+<p:sldLayout xmlns:a="http://schemas.openxmlformats.org/drawingml/2006/main" xmlns:r="http://schemas.openxmlformats.org/officeDocument/2006/relationships" xmlns:mc="http://schemas.openxmlformats.org/markup-compatibility/2006" xmlns:mv="urn:schemas-microsoft-com:mac:vml" xmlns:p="http://schemas.openxmlformats.org/presentationml/2006/main" xmlns:c="http://schemas.openxmlformats.org/drawingml/2006/chart" xmlns:dgm="http://schemas.openxmlformats.org/drawingml/2006/diagram" xmlns:o="urn:schemas-microsoft-com:office:office" xmlns:v="urn:schemas-microsoft-com:vml" xmlns:pvml="urn:schemas-microsoft-com:office:powerpoint" xmlns:com="http://schemas.openxmlformats.org/drawingml/2006/compatibility" xmlns:p14="http://schemas.microsoft.com/office/powerpoint/2010/main" xmlns:p15="http://schemas.microsoft.com/office/powerpoint/2012/main" xmlns:ahyp="http://schemas.microsoft.com/office/drawing/2018/hyperlinkcolor" matchingName="Title and two columns" type="twoColTx">
+  <p:cSld name="TITLE_AND_TWO_COLUMNS">
+    <p:spTree>
+      <p:nvGrpSpPr>
+        <p:cNvPr id="72" name="Shape 72"/>
+        <p:cNvGrpSpPr/>
+        <p:nvPr/>
+      </p:nvGrpSpPr>
+      <p:grpSpPr>
+        <a:xfrm>
+          <a:off x="0" y="0"/>
+          <a:ext cx="0" cy="0"/>
+          <a:chOff x="0" y="0"/>
+          <a:chExt cx="0" cy="0"/>
+        </a:xfrm>
+      </p:grpSpPr>
+      <p:sp>
+        <p:nvSpPr>
+          <p:cNvPr id="73" name="Google Shape;73;p12"/>
+          <p:cNvSpPr txBox="1"/>
+          <p:nvPr>
+            <p:ph type="title"/>
+          </p:nvPr>
+        </p:nvSpPr>
+        <p:spPr>
+          <a:xfrm>
+            <a:off x="0" y="0"/>
+            <a:ext cx="9144000" cy="685800"/>
+          </a:xfrm>
+          <a:prstGeom prst="rect">
+            <a:avLst/>
+          </a:prstGeom>
+          <a:ln>
+            <a:noFill/>
+          </a:ln>
+        </p:spPr>
+        <p:txBody>
+          <a:bodyPr anchorCtr="0" anchor="ctr" bIns="0" lIns="274300" spcFirstLastPara="1" rIns="0" wrap="square" tIns="0">
+            <a:noAutofit/>
+          </a:bodyPr>
+          <a:lstStyle>
+            <a:lvl1pPr lvl="0">
+              <a:spcBef>
+                <a:spcPts val="0"/>
+              </a:spcBef>
+              <a:spcAft>
+                <a:spcPts val="0"/>
+              </a:spcAft>
+              <a:buSzPts val="2400"/>
+              <a:buNone/>
+              <a:defRPr/>
+            </a:lvl1pPr>
+            <a:lvl2pPr lvl="1">
+              <a:spcBef>
+                <a:spcPts val="0"/>
+              </a:spcBef>
+              <a:spcAft>
+                <a:spcPts val="0"/>
+              </a:spcAft>
+              <a:buSzPts val="2800"/>
+              <a:buNone/>
+              <a:defRPr/>
+            </a:lvl2pPr>
+            <a:lvl3pPr lvl="2">
+              <a:spcBef>
+                <a:spcPts val="0"/>
+              </a:spcBef>
+              <a:spcAft>
+                <a:spcPts val="0"/>
+              </a:spcAft>
+              <a:buSzPts val="2800"/>
+              <a:buNone/>
+              <a:defRPr/>
+            </a:lvl3pPr>
+            <a:lvl4pPr lvl="3">
+              <a:spcBef>
+                <a:spcPts val="0"/>
+              </a:spcBef>
+              <a:spcAft>
+                <a:spcPts val="0"/>
+              </a:spcAft>
+              <a:buSzPts val="2800"/>
+              <a:buNone/>
+              <a:defRPr/>
+            </a:lvl4pPr>
+            <a:lvl5pPr lvl="4">
+              <a:spcBef>
+                <a:spcPts val="0"/>
+              </a:spcBef>
+              <a:spcAft>
+                <a:spcPts val="0"/>
+              </a:spcAft>
+              <a:buSzPts val="2800"/>
+              <a:buNone/>
+              <a:defRPr/>
+            </a:lvl5pPr>
+            <a:lvl6pPr lvl="5">
+              <a:spcBef>
+                <a:spcPts val="0"/>
+              </a:spcBef>
+              <a:spcAft>
+                <a:spcPts val="0"/>
+              </a:spcAft>
+              <a:buSzPts val="2800"/>
+              <a:buNone/>
+              <a:defRPr/>
+            </a:lvl6pPr>
+            <a:lvl7pPr lvl="6">
+              <a:spcBef>
+                <a:spcPts val="0"/>
+              </a:spcBef>
+              <a:spcAft>
+                <a:spcPts val="0"/>
+              </a:spcAft>
+              <a:buSzPts val="2800"/>
+              <a:buNone/>
+              <a:defRPr/>
+            </a:lvl7pPr>
+            <a:lvl8pPr lvl="7">
+              <a:spcBef>
+                <a:spcPts val="0"/>
+              </a:spcBef>
+              <a:spcAft>
+                <a:spcPts val="0"/>
+              </a:spcAft>
+              <a:buSzPts val="2800"/>
+              <a:buNone/>
+              <a:defRPr/>
+            </a:lvl8pPr>
+            <a:lvl9pPr lvl="8">
+              <a:spcBef>
+                <a:spcPts val="0"/>
+              </a:spcBef>
+              <a:spcAft>
+                <a:spcPts val="0"/>
+              </a:spcAft>
+              <a:buSzPts val="2800"/>
+              <a:buNone/>
+              <a:defRPr/>
+            </a:lvl9pPr>
+          </a:lstStyle>
+          <a:p/>
+        </p:txBody>
+      </p:sp>
+      <p:sp>
+        <p:nvSpPr>
+          <p:cNvPr id="74" name="Google Shape;74;p12"/>
+          <p:cNvSpPr txBox="1"/>
+          <p:nvPr>
+            <p:ph idx="1" type="body"/>
+          </p:nvPr>
+        </p:nvSpPr>
+        <p:spPr>
+          <a:xfrm>
+            <a:off x="274320" y="914400"/>
+            <a:ext cx="4114800" cy="4114800"/>
+          </a:xfrm>
+          <a:prstGeom prst="rect">
+            <a:avLst/>
+          </a:prstGeom>
+        </p:spPr>
+        <p:txBody>
+          <a:bodyPr anchorCtr="0" anchor="t" bIns="91425" lIns="0" spcFirstLastPara="1" rIns="91425" wrap="square" tIns="0">
+            <a:noAutofit/>
+          </a:bodyPr>
+          <a:lstStyle>
+            <a:lvl1pPr indent="-342900" lvl="0" marL="457200">
+              <a:spcBef>
+                <a:spcPts val="0"/>
+              </a:spcBef>
+              <a:spcAft>
+                <a:spcPts val="0"/>
+              </a:spcAft>
+              <a:buSzPts val="1800"/>
+              <a:buChar char="●"/>
+              <a:defRPr/>
+            </a:lvl1pPr>
+            <a:lvl2pPr indent="-317500" lvl="1" marL="914400">
+              <a:spcBef>
+                <a:spcPts val="0"/>
+              </a:spcBef>
+              <a:spcAft>
+                <a:spcPts val="0"/>
+              </a:spcAft>
+              <a:buSzPts val="1400"/>
+              <a:buChar char="○"/>
+              <a:defRPr/>
+            </a:lvl2pPr>
+            <a:lvl3pPr indent="-317500" lvl="2" marL="1371600">
+              <a:spcBef>
+                <a:spcPts val="0"/>
+              </a:spcBef>
+              <a:spcAft>
+                <a:spcPts val="0"/>
+              </a:spcAft>
+              <a:buSzPts val="1400"/>
+              <a:buChar char="■"/>
+              <a:defRPr/>
+            </a:lvl3pPr>
+            <a:lvl4pPr indent="-317500" lvl="3" marL="1828800">
+              <a:spcBef>
+                <a:spcPts val="0"/>
+              </a:spcBef>
+              <a:spcAft>
+                <a:spcPts val="0"/>
+              </a:spcAft>
+              <a:buSzPts val="1400"/>
+              <a:buChar char="●"/>
+              <a:defRPr/>
+            </a:lvl4pPr>
+            <a:lvl5pPr indent="-317500" lvl="4" marL="2286000">
+              <a:spcBef>
+                <a:spcPts val="0"/>
+              </a:spcBef>
+              <a:spcAft>
+                <a:spcPts val="0"/>
+              </a:spcAft>
+              <a:buSzPts val="1400"/>
+              <a:buChar char="○"/>
+              <a:defRPr/>
+            </a:lvl5pPr>
+            <a:lvl6pPr indent="-317500" lvl="5" marL="2743200">
+              <a:spcBef>
+                <a:spcPts val="0"/>
+              </a:spcBef>
+              <a:spcAft>
+                <a:spcPts val="0"/>
+              </a:spcAft>
+              <a:buSzPts val="1400"/>
+              <a:buChar char="■"/>
+              <a:defRPr/>
+            </a:lvl6pPr>
+            <a:lvl7pPr indent="-317500" lvl="6" marL="3200400">
+              <a:spcBef>
+                <a:spcPts val="0"/>
+              </a:spcBef>
+              <a:spcAft>
+                <a:spcPts val="0"/>
+              </a:spcAft>
+              <a:buSzPts val="1400"/>
+              <a:buChar char="●"/>
+              <a:defRPr/>
+            </a:lvl7pPr>
+            <a:lvl8pPr indent="-317500" lvl="7" marL="3657600">
+              <a:spcBef>
+                <a:spcPts val="0"/>
+              </a:spcBef>
+              <a:spcAft>
+                <a:spcPts val="0"/>
+              </a:spcAft>
+              <a:buSzPts val="1400"/>
+              <a:buChar char="○"/>
+              <a:defRPr/>
+            </a:lvl8pPr>
+            <a:lvl9pPr indent="-317500" lvl="8" marL="4114800">
+              <a:spcBef>
+                <a:spcPts val="0"/>
+              </a:spcBef>
+              <a:spcAft>
+                <a:spcPts val="0"/>
+              </a:spcAft>
+              <a:buSzPts val="1400"/>
+              <a:buChar char="■"/>
+              <a:defRPr/>
+            </a:lvl9pPr>
+          </a:lstStyle>
+          <a:p/>
+        </p:txBody>
+      </p:sp>
+      <p:sp>
+        <p:nvSpPr>
+          <p:cNvPr id="75" name="Google Shape;75;p12"/>
+          <p:cNvSpPr txBox="1"/>
+          <p:nvPr>
+            <p:ph idx="2" type="body"/>
+          </p:nvPr>
+        </p:nvSpPr>
+        <p:spPr>
+          <a:xfrm>
+            <a:off x="4846320" y="914400"/>
+            <a:ext cx="4114800" cy="4114800"/>
+          </a:xfrm>
+          <a:prstGeom prst="rect">
+            <a:avLst/>
+          </a:prstGeom>
+        </p:spPr>
+        <p:txBody>
+          <a:bodyPr anchorCtr="0" anchor="t" bIns="0" lIns="0" spcFirstLastPara="1" rIns="0" wrap="square" tIns="0">
+            <a:noAutofit/>
+          </a:bodyPr>
+          <a:lstStyle>
+            <a:lvl1pPr indent="-342900" lvl="0" marL="457200">
+              <a:spcBef>
+                <a:spcPts val="0"/>
+              </a:spcBef>
+              <a:spcAft>
+                <a:spcPts val="0"/>
+              </a:spcAft>
+              <a:buSzPts val="1800"/>
+              <a:buChar char="●"/>
+              <a:defRPr/>
+            </a:lvl1pPr>
+            <a:lvl2pPr indent="-317500" lvl="1" marL="914400">
+              <a:spcBef>
+                <a:spcPts val="0"/>
+              </a:spcBef>
+              <a:spcAft>
+                <a:spcPts val="0"/>
+              </a:spcAft>
+              <a:buSzPts val="1400"/>
+              <a:buChar char="○"/>
+              <a:defRPr/>
+            </a:lvl2pPr>
+            <a:lvl3pPr indent="-317500" lvl="2" marL="1371600">
+              <a:spcBef>
+                <a:spcPts val="0"/>
+              </a:spcBef>
+              <a:spcAft>
+                <a:spcPts val="0"/>
+              </a:spcAft>
+              <a:buSzPts val="1400"/>
+              <a:buChar char="■"/>
+              <a:defRPr/>
+            </a:lvl3pPr>
+            <a:lvl4pPr indent="-317500" lvl="3" marL="1828800">
+              <a:spcBef>
+                <a:spcPts val="0"/>
+              </a:spcBef>
+              <a:spcAft>
+                <a:spcPts val="0"/>
+              </a:spcAft>
+              <a:buSzPts val="1400"/>
+              <a:buChar char="●"/>
+              <a:defRPr/>
+            </a:lvl4pPr>
+            <a:lvl5pPr indent="-317500" lvl="4" marL="2286000">
+              <a:spcBef>
+                <a:spcPts val="0"/>
+              </a:spcBef>
+              <a:spcAft>
+                <a:spcPts val="0"/>
+              </a:spcAft>
+              <a:buSzPts val="1400"/>
+              <a:buChar char="○"/>
+              <a:defRPr/>
+            </a:lvl5pPr>
+            <a:lvl6pPr indent="-317500" lvl="5" marL="2743200">
+              <a:spcBef>
+                <a:spcPts val="0"/>
+              </a:spcBef>
+              <a:spcAft>
+                <a:spcPts val="0"/>
+              </a:spcAft>
+              <a:buSzPts val="1400"/>
+              <a:buChar char="■"/>
+              <a:defRPr/>
+            </a:lvl6pPr>
+            <a:lvl7pPr indent="-317500" lvl="6" marL="3200400">
+              <a:spcBef>
+                <a:spcPts val="0"/>
+              </a:spcBef>
+              <a:spcAft>
+                <a:spcPts val="0"/>
+              </a:spcAft>
+              <a:buSzPts val="1400"/>
+              <a:buChar char="●"/>
+              <a:defRPr/>
+            </a:lvl7pPr>
+            <a:lvl8pPr indent="-317500" lvl="7" marL="3657600">
+              <a:spcBef>
+                <a:spcPts val="0"/>
+              </a:spcBef>
+              <a:spcAft>
+                <a:spcPts val="0"/>
+              </a:spcAft>
+              <a:buSzPts val="1400"/>
+              <a:buChar char="○"/>
+              <a:defRPr/>
+            </a:lvl8pPr>
+            <a:lvl9pPr indent="-317500" lvl="8" marL="4114800">
+              <a:spcBef>
+                <a:spcPts val="0"/>
+              </a:spcBef>
+              <a:spcAft>
+                <a:spcPts val="0"/>
+              </a:spcAft>
+              <a:buSzPts val="1400"/>
+              <a:buChar char="■"/>
+              <a:defRPr/>
+            </a:lvl9pPr>
+          </a:lstStyle>
+          <a:p/>
+        </p:txBody>
+      </p:sp>
+      <p:sp>
+        <p:nvSpPr>
+          <p:cNvPr id="76" name="Google Shape;76;p12"/>
+          <p:cNvSpPr txBox="1"/>
+          <p:nvPr>
+            <p:ph idx="12" type="sldNum"/>
+          </p:nvPr>
+        </p:nvSpPr>
+        <p:spPr>
+          <a:xfrm>
+            <a:off x="7315202" y="4416550"/>
+            <a:ext cx="1828800" cy="731400"/>
+          </a:xfrm>
+          <a:prstGeom prst="rect">
+            <a:avLst/>
+          </a:prstGeom>
+        </p:spPr>
+        <p:txBody>
+          <a:bodyPr anchorCtr="0" anchor="b" bIns="91425" lIns="91425" spcFirstLastPara="1" rIns="91425" wrap="square" tIns="91425">
+            <a:noAutofit/>
+          </a:bodyPr>
+          <a:lstStyle>
+            <a:lvl1pPr lvl="0">
+              <a:buNone/>
+              <a:defRPr>
+                <a:solidFill>
+                  <a:schemeClr val="dk1"/>
+                </a:solidFill>
+              </a:defRPr>
+            </a:lvl1pPr>
+            <a:lvl2pPr lvl="1">
+              <a:buNone/>
+              <a:defRPr>
+                <a:solidFill>
+                  <a:schemeClr val="dk1"/>
+                </a:solidFill>
+              </a:defRPr>
+            </a:lvl2pPr>
+            <a:lvl3pPr lvl="2">
+              <a:buNone/>
+              <a:defRPr>
+                <a:solidFill>
+                  <a:schemeClr val="dk1"/>
+                </a:solidFill>
+              </a:defRPr>
+            </a:lvl3pPr>
+            <a:lvl4pPr lvl="3">
+              <a:buNone/>
+              <a:defRPr>
+                <a:solidFill>
+                  <a:schemeClr val="dk1"/>
+                </a:solidFill>
+              </a:defRPr>
+            </a:lvl4pPr>
+            <a:lvl5pPr lvl="4">
+              <a:buNone/>
+              <a:defRPr>
+                <a:solidFill>
+                  <a:schemeClr val="dk1"/>
+                </a:solidFill>
+              </a:defRPr>
+            </a:lvl5pPr>
+            <a:lvl6pPr lvl="5">
+              <a:buNone/>
+              <a:defRPr>
+                <a:solidFill>
+                  <a:schemeClr val="dk1"/>
+                </a:solidFill>
+              </a:defRPr>
+            </a:lvl6pPr>
+            <a:lvl7pPr lvl="6">
+              <a:buNone/>
+              <a:defRPr>
+                <a:solidFill>
+                  <a:schemeClr val="dk1"/>
+                </a:solidFill>
+              </a:defRPr>
+            </a:lvl7pPr>
+            <a:lvl8pPr lvl="7">
+              <a:buNone/>
+              <a:defRPr>
+                <a:solidFill>
+                  <a:schemeClr val="dk1"/>
+                </a:solidFill>
+              </a:defRPr>
+            </a:lvl8pPr>
+            <a:lvl9pPr lvl="8">
+              <a:buNone/>
+              <a:defRPr>
+                <a:solidFill>
+                  <a:schemeClr val="dk1"/>
+                </a:solidFill>
+              </a:defRPr>
+            </a:lvl9pPr>
+          </a:lstStyle>
+          <a:p>
+            <a:pPr indent="0" lvl="0" marL="0" rtl="0" algn="r">
+              <a:spcBef>
+                <a:spcPts val="0"/>
+              </a:spcBef>
+              <a:spcAft>
+                <a:spcPts val="0"/>
+              </a:spcAft>
+              <a:buNone/>
+            </a:pPr>
+            <a:fld id="{00000000-1234-1234-1234-123412341234}" type="slidenum">
+              <a:rPr lang="en"/>
+              <a:t>‹#›</a:t>
+            </a:fld>
+            <a:endParaRPr/>
+          </a:p>
+          <a:p>
+            <a:pPr indent="0" lvl="0" marL="0" rtl="0" algn="r">
+              <a:spcBef>
+                <a:spcPts val="0"/>
+              </a:spcBef>
+              <a:spcAft>
+                <a:spcPts val="0"/>
+              </a:spcAft>
+              <a:buClr>
+                <a:schemeClr val="dk1"/>
+              </a:buClr>
+              <a:buSzPts val="1100"/>
+              <a:buFont typeface="Arial"/>
+              <a:buNone/>
+            </a:pPr>
+            <a:r>
+              <a:rPr b="0" lang="en" sz="900" u="sng">
+                <a:solidFill>
+                  <a:schemeClr val="hlink"/>
+                </a:solidFill>
+                <a:hlinkClick r:id="rId2"/>
+              </a:rPr>
+              <a:t>https://uni1.de/amos</a:t>
+            </a:r>
+            <a:r>
+              <a:rPr b="0" lang="en" sz="900">
+                <a:solidFill>
+                  <a:schemeClr val="dk2"/>
+                </a:solidFill>
+              </a:rPr>
+              <a:t> </a:t>
+            </a:r>
+            <a:endParaRPr b="0" sz="900">
+              <a:solidFill>
+                <a:schemeClr val="dk2"/>
+              </a:solidFill>
+            </a:endParaRPr>
+          </a:p>
+        </p:txBody>
+      </p:sp>
+      <p:grpSp>
+        <p:nvGrpSpPr>
+          <p:cNvPr id="77" name="Google Shape;77;p12"/>
+          <p:cNvGrpSpPr/>
+          <p:nvPr/>
+        </p:nvGrpSpPr>
+        <p:grpSpPr>
+          <a:xfrm>
+            <a:off x="0" y="685800"/>
+            <a:ext cx="9144000" cy="91500"/>
+            <a:chOff x="0" y="2386584"/>
+            <a:chExt cx="9144000" cy="91500"/>
+          </a:xfrm>
+        </p:grpSpPr>
+        <p:sp>
+          <p:nvSpPr>
+            <p:cNvPr id="78" name="Google Shape;78;p12"/>
+            <p:cNvSpPr/>
+            <p:nvPr/>
+          </p:nvSpPr>
+          <p:spPr>
+            <a:xfrm>
+              <a:off x="0" y="2386584"/>
+              <a:ext cx="914400" cy="91500"/>
+            </a:xfrm>
+            <a:prstGeom prst="rect">
+              <a:avLst/>
+            </a:prstGeom>
+            <a:solidFill>
+              <a:schemeClr val="accent2"/>
+            </a:solidFill>
+            <a:ln>
+              <a:noFill/>
+            </a:ln>
+          </p:spPr>
+          <p:txBody>
+            <a:bodyPr anchorCtr="0" anchor="ctr" bIns="91425" lIns="91425" spcFirstLastPara="1" rIns="91425" wrap="square" tIns="91425">
+              <a:noAutofit/>
+            </a:bodyPr>
+            <a:lstStyle/>
+            <a:p>
+              <a:pPr indent="0" lvl="0" marL="0" rtl="0" algn="l">
+                <a:spcBef>
+                  <a:spcPts val="0"/>
+                </a:spcBef>
+                <a:spcAft>
+                  <a:spcPts val="0"/>
+                </a:spcAft>
+                <a:buNone/>
+              </a:pPr>
+              <a:r>
+                <a:t/>
+              </a:r>
+              <a:endParaRPr/>
+            </a:p>
+          </p:txBody>
+        </p:sp>
+        <p:sp>
+          <p:nvSpPr>
+            <p:cNvPr id="79" name="Google Shape;79;p12"/>
+            <p:cNvSpPr/>
+            <p:nvPr/>
+          </p:nvSpPr>
+          <p:spPr>
+            <a:xfrm>
+              <a:off x="914400" y="2386584"/>
+              <a:ext cx="1828800" cy="91500"/>
+            </a:xfrm>
+            <a:prstGeom prst="rect">
+              <a:avLst/>
+            </a:prstGeom>
+            <a:solidFill>
+              <a:schemeClr val="accent3"/>
+            </a:solidFill>
+            <a:ln>
+              <a:noFill/>
+            </a:ln>
+          </p:spPr>
+          <p:txBody>
+            <a:bodyPr anchorCtr="0" anchor="ctr" bIns="91425" lIns="91425" spcFirstLastPara="1" rIns="91425" wrap="square" tIns="91425">
+              <a:noAutofit/>
+            </a:bodyPr>
+            <a:lstStyle/>
+            <a:p>
+              <a:pPr indent="0" lvl="0" marL="0" rtl="0" algn="l">
+                <a:spcBef>
+                  <a:spcPts val="0"/>
+                </a:spcBef>
+                <a:spcAft>
+                  <a:spcPts val="0"/>
+                </a:spcAft>
+                <a:buNone/>
+              </a:pPr>
+              <a:r>
+                <a:t/>
+              </a:r>
+              <a:endParaRPr/>
+            </a:p>
+          </p:txBody>
+        </p:sp>
+        <p:sp>
+          <p:nvSpPr>
+            <p:cNvPr id="80" name="Google Shape;80;p12"/>
+            <p:cNvSpPr/>
+            <p:nvPr/>
+          </p:nvSpPr>
+          <p:spPr>
+            <a:xfrm>
+              <a:off x="2743200" y="2386584"/>
+              <a:ext cx="6400800" cy="91500"/>
+            </a:xfrm>
+            <a:prstGeom prst="rect">
+              <a:avLst/>
+            </a:prstGeom>
+            <a:solidFill>
+              <a:schemeClr val="accent4"/>
+            </a:solidFill>
+            <a:ln>
+              <a:noFill/>
+            </a:ln>
+          </p:spPr>
+          <p:txBody>
+            <a:bodyPr anchorCtr="0" anchor="ctr" bIns="91425" lIns="91425" spcFirstLastPara="1" rIns="91425" wrap="square" tIns="91425">
+              <a:noAutofit/>
+            </a:bodyPr>
+            <a:lstStyle/>
+            <a:p>
+              <a:pPr indent="0" lvl="0" marL="0" rtl="0" algn="l">
+                <a:spcBef>
+                  <a:spcPts val="0"/>
+                </a:spcBef>
+                <a:spcAft>
+                  <a:spcPts val="0"/>
+                </a:spcAft>
+                <a:buNone/>
+              </a:pPr>
+              <a:r>
+                <a:t/>
+              </a:r>
+              <a:endParaRPr/>
+            </a:p>
+          </p:txBody>
+        </p:sp>
+      </p:grpSp>
+    </p:spTree>
+  </p:cSld>
+  <p:clrMapOvr>
+    <a:masterClrMapping/>
+  </p:clrMapOvr>
+</p:sldLayout>
+</file>
+
+<file path=ppt/slideLayouts/slideLayout11.xml><?xml version="1.0" encoding="utf-8"?>
+<p:sldLayout xmlns:a="http://schemas.openxmlformats.org/drawingml/2006/main" xmlns:r="http://schemas.openxmlformats.org/officeDocument/2006/relationships" xmlns:mc="http://schemas.openxmlformats.org/markup-compatibility/2006" xmlns:mv="urn:schemas-microsoft-com:mac:vml" xmlns:p="http://schemas.openxmlformats.org/presentationml/2006/main" xmlns:c="http://schemas.openxmlformats.org/drawingml/2006/chart" xmlns:dgm="http://schemas.openxmlformats.org/drawingml/2006/diagram" xmlns:o="urn:schemas-microsoft-com:office:office" xmlns:v="urn:schemas-microsoft-com:vml" xmlns:pvml="urn:schemas-microsoft-com:office:powerpoint" xmlns:com="http://schemas.openxmlformats.org/drawingml/2006/compatibility" xmlns:p14="http://schemas.microsoft.com/office/powerpoint/2010/main" xmlns:p15="http://schemas.microsoft.com/office/powerpoint/2012/main" xmlns:ahyp="http://schemas.microsoft.com/office/drawing/2018/hyperlinkcolor" matchingName="Title only" type="titleOnly">
+  <p:cSld name="TITLE_ONLY">
+    <p:spTree>
+      <p:nvGrpSpPr>
+        <p:cNvPr id="81" name="Shape 81"/>
+        <p:cNvGrpSpPr/>
+        <p:nvPr/>
+      </p:nvGrpSpPr>
+      <p:grpSpPr>
+        <a:xfrm>
+          <a:off x="0" y="0"/>
+          <a:ext cx="0" cy="0"/>
+          <a:chOff x="0" y="0"/>
+          <a:chExt cx="0" cy="0"/>
+        </a:xfrm>
+      </p:grpSpPr>
+      <p:sp>
+        <p:nvSpPr>
+          <p:cNvPr id="82" name="Google Shape;82;p13"/>
+          <p:cNvSpPr txBox="1"/>
+          <p:nvPr>
+            <p:ph type="title"/>
+          </p:nvPr>
+        </p:nvSpPr>
+        <p:spPr>
+          <a:xfrm>
+            <a:off x="0" y="0"/>
+            <a:ext cx="9144000" cy="685800"/>
+          </a:xfrm>
+          <a:prstGeom prst="rect">
+            <a:avLst/>
+          </a:prstGeom>
+        </p:spPr>
+        <p:txBody>
+          <a:bodyPr anchorCtr="0" anchor="ctr" bIns="0" lIns="274300" spcFirstLastPara="1" rIns="0" wrap="square" tIns="0">
+            <a:noAutofit/>
+          </a:bodyPr>
+          <a:lstStyle>
+            <a:lvl1pPr lvl="0">
+              <a:spcBef>
+                <a:spcPts val="0"/>
+              </a:spcBef>
+              <a:spcAft>
+                <a:spcPts val="0"/>
+              </a:spcAft>
+              <a:buSzPts val="2400"/>
+              <a:buNone/>
+              <a:defRPr/>
+            </a:lvl1pPr>
+            <a:lvl2pPr lvl="1">
+              <a:spcBef>
+                <a:spcPts val="0"/>
+              </a:spcBef>
+              <a:spcAft>
+                <a:spcPts val="0"/>
+              </a:spcAft>
+              <a:buSzPts val="2800"/>
+              <a:buNone/>
+              <a:defRPr/>
+            </a:lvl2pPr>
+            <a:lvl3pPr lvl="2">
+              <a:spcBef>
+                <a:spcPts val="0"/>
+              </a:spcBef>
+              <a:spcAft>
+                <a:spcPts val="0"/>
+              </a:spcAft>
+              <a:buSzPts val="2800"/>
+              <a:buNone/>
+              <a:defRPr/>
+            </a:lvl3pPr>
+            <a:lvl4pPr lvl="3">
+              <a:spcBef>
+                <a:spcPts val="0"/>
+              </a:spcBef>
+              <a:spcAft>
+                <a:spcPts val="0"/>
+              </a:spcAft>
+              <a:buSzPts val="2800"/>
+              <a:buNone/>
+              <a:defRPr/>
+            </a:lvl4pPr>
+            <a:lvl5pPr lvl="4">
+              <a:spcBef>
+                <a:spcPts val="0"/>
+              </a:spcBef>
+              <a:spcAft>
+                <a:spcPts val="0"/>
+              </a:spcAft>
+              <a:buSzPts val="2800"/>
+              <a:buNone/>
+              <a:defRPr/>
+            </a:lvl5pPr>
+            <a:lvl6pPr lvl="5">
+              <a:spcBef>
+                <a:spcPts val="0"/>
+              </a:spcBef>
+              <a:spcAft>
+                <a:spcPts val="0"/>
+              </a:spcAft>
+              <a:buSzPts val="2800"/>
+              <a:buNone/>
+              <a:defRPr/>
+            </a:lvl6pPr>
+            <a:lvl7pPr lvl="6">
+              <a:spcBef>
+                <a:spcPts val="0"/>
+              </a:spcBef>
+              <a:spcAft>
+                <a:spcPts val="0"/>
+              </a:spcAft>
+              <a:buSzPts val="2800"/>
+              <a:buNone/>
+              <a:defRPr/>
+            </a:lvl7pPr>
+            <a:lvl8pPr lvl="7">
+              <a:spcBef>
+                <a:spcPts val="0"/>
+              </a:spcBef>
+              <a:spcAft>
+                <a:spcPts val="0"/>
+              </a:spcAft>
+              <a:buSzPts val="2800"/>
+              <a:buNone/>
+              <a:defRPr/>
+            </a:lvl8pPr>
+            <a:lvl9pPr lvl="8">
+              <a:spcBef>
+                <a:spcPts val="0"/>
+              </a:spcBef>
+              <a:spcAft>
+                <a:spcPts val="0"/>
+              </a:spcAft>
+              <a:buSzPts val="2800"/>
+              <a:buNone/>
+              <a:defRPr/>
+            </a:lvl9pPr>
+          </a:lstStyle>
+          <a:p/>
+        </p:txBody>
+      </p:sp>
+      <p:sp>
+        <p:nvSpPr>
+          <p:cNvPr id="83" name="Google Shape;83;p13"/>
+          <p:cNvSpPr txBox="1"/>
+          <p:nvPr>
+            <p:ph idx="12" type="sldNum"/>
+          </p:nvPr>
+        </p:nvSpPr>
+        <p:spPr>
+          <a:xfrm>
+            <a:off x="7315202" y="4416550"/>
+            <a:ext cx="1828800" cy="731400"/>
+          </a:xfrm>
+          <a:prstGeom prst="rect">
+            <a:avLst/>
+          </a:prstGeom>
+        </p:spPr>
+        <p:txBody>
+          <a:bodyPr anchorCtr="0" anchor="b" bIns="91425" lIns="91425" spcFirstLastPara="1" rIns="91425" wrap="square" tIns="91425">
+            <a:noAutofit/>
+          </a:bodyPr>
+          <a:lstStyle>
+            <a:lvl1pPr lvl="0" rtl="0">
+              <a:buNone/>
+              <a:defRPr>
+                <a:solidFill>
+                  <a:schemeClr val="dk1"/>
+                </a:solidFill>
+              </a:defRPr>
+            </a:lvl1pPr>
+            <a:lvl2pPr lvl="1" rtl="0">
+              <a:buNone/>
+              <a:defRPr>
+                <a:solidFill>
+                  <a:schemeClr val="dk1"/>
+                </a:solidFill>
+              </a:defRPr>
+            </a:lvl2pPr>
+            <a:lvl3pPr lvl="2" rtl="0">
+              <a:buNone/>
+              <a:defRPr>
+                <a:solidFill>
+                  <a:schemeClr val="dk1"/>
+                </a:solidFill>
+              </a:defRPr>
+            </a:lvl3pPr>
+            <a:lvl4pPr lvl="3" rtl="0">
+              <a:buNone/>
+              <a:defRPr>
+                <a:solidFill>
+                  <a:schemeClr val="dk1"/>
+                </a:solidFill>
+              </a:defRPr>
+            </a:lvl4pPr>
+            <a:lvl5pPr lvl="4" rtl="0">
+              <a:buNone/>
+              <a:defRPr>
+                <a:solidFill>
+                  <a:schemeClr val="dk1"/>
+                </a:solidFill>
+              </a:defRPr>
+            </a:lvl5pPr>
+            <a:lvl6pPr lvl="5" rtl="0">
+              <a:buNone/>
+              <a:defRPr>
+                <a:solidFill>
+                  <a:schemeClr val="dk1"/>
+                </a:solidFill>
+              </a:defRPr>
+            </a:lvl6pPr>
+            <a:lvl7pPr lvl="6" rtl="0">
+              <a:buNone/>
+              <a:defRPr>
+                <a:solidFill>
+                  <a:schemeClr val="dk1"/>
+                </a:solidFill>
+              </a:defRPr>
+            </a:lvl7pPr>
+            <a:lvl8pPr lvl="7" rtl="0">
+              <a:buNone/>
+              <a:defRPr>
+                <a:solidFill>
+                  <a:schemeClr val="dk1"/>
+                </a:solidFill>
+              </a:defRPr>
+            </a:lvl8pPr>
+            <a:lvl9pPr lvl="8" rtl="0">
+              <a:buNone/>
+              <a:defRPr>
+                <a:solidFill>
+                  <a:schemeClr val="dk1"/>
+                </a:solidFill>
+              </a:defRPr>
+            </a:lvl9pPr>
+          </a:lstStyle>
+          <a:p>
+            <a:pPr indent="0" lvl="0" marL="0" rtl="0" algn="r">
+              <a:spcBef>
+                <a:spcPts val="0"/>
+              </a:spcBef>
+              <a:spcAft>
+                <a:spcPts val="0"/>
+              </a:spcAft>
+              <a:buNone/>
+            </a:pPr>
+            <a:fld id="{00000000-1234-1234-1234-123412341234}" type="slidenum">
+              <a:rPr lang="en"/>
+              <a:t>‹#›</a:t>
+            </a:fld>
+            <a:endParaRPr/>
+          </a:p>
+          <a:p>
+            <a:pPr indent="0" lvl="0" marL="0" rtl="0" algn="r">
+              <a:spcBef>
+                <a:spcPts val="0"/>
+              </a:spcBef>
+              <a:spcAft>
+                <a:spcPts val="0"/>
+              </a:spcAft>
+              <a:buNone/>
+            </a:pPr>
+            <a:r>
+              <a:rPr b="0" lang="en" sz="900" u="sng">
+                <a:solidFill>
+                  <a:schemeClr val="hlink"/>
+                </a:solidFill>
+                <a:hlinkClick r:id="rId2"/>
+              </a:rPr>
+              <a:t>https://uni1.de/amos</a:t>
+            </a:r>
+            <a:r>
+              <a:rPr b="0" lang="en" sz="900">
+                <a:solidFill>
+                  <a:schemeClr val="dk2"/>
+                </a:solidFill>
+              </a:rPr>
+              <a:t> </a:t>
+            </a:r>
+            <a:endParaRPr>
+              <a:solidFill>
+                <a:schemeClr val="dk2"/>
+              </a:solidFill>
+            </a:endParaRPr>
+          </a:p>
+        </p:txBody>
+      </p:sp>
+      <p:grpSp>
+        <p:nvGrpSpPr>
+          <p:cNvPr id="84" name="Google Shape;84;p13"/>
+          <p:cNvGrpSpPr/>
+          <p:nvPr/>
+        </p:nvGrpSpPr>
+        <p:grpSpPr>
+          <a:xfrm>
+            <a:off x="0" y="685800"/>
+            <a:ext cx="9144000" cy="91500"/>
+            <a:chOff x="0" y="2386584"/>
+            <a:chExt cx="9144000" cy="91500"/>
+          </a:xfrm>
+        </p:grpSpPr>
+        <p:sp>
+          <p:nvSpPr>
+            <p:cNvPr id="85" name="Google Shape;85;p13"/>
+            <p:cNvSpPr/>
+            <p:nvPr/>
+          </p:nvSpPr>
+          <p:spPr>
+            <a:xfrm>
+              <a:off x="0" y="2386584"/>
+              <a:ext cx="914400" cy="91500"/>
+            </a:xfrm>
+            <a:prstGeom prst="rect">
+              <a:avLst/>
+            </a:prstGeom>
+            <a:solidFill>
+              <a:schemeClr val="accent2"/>
+            </a:solidFill>
+            <a:ln>
+              <a:noFill/>
+            </a:ln>
+          </p:spPr>
+          <p:txBody>
+            <a:bodyPr anchorCtr="0" anchor="ctr" bIns="91425" lIns="91425" spcFirstLastPara="1" rIns="91425" wrap="square" tIns="91425">
+              <a:noAutofit/>
+            </a:bodyPr>
+            <a:lstStyle/>
+            <a:p>
+              <a:pPr indent="0" lvl="0" marL="0" rtl="0" algn="l">
+                <a:spcBef>
+                  <a:spcPts val="0"/>
+                </a:spcBef>
+                <a:spcAft>
+                  <a:spcPts val="0"/>
+                </a:spcAft>
+                <a:buNone/>
+              </a:pPr>
+              <a:r>
+                <a:t/>
+              </a:r>
+              <a:endParaRPr/>
+            </a:p>
+          </p:txBody>
+        </p:sp>
+        <p:sp>
+          <p:nvSpPr>
+            <p:cNvPr id="86" name="Google Shape;86;p13"/>
+            <p:cNvSpPr/>
+            <p:nvPr/>
+          </p:nvSpPr>
+          <p:spPr>
+            <a:xfrm>
+              <a:off x="914400" y="2386584"/>
+              <a:ext cx="1828800" cy="91500"/>
+            </a:xfrm>
+            <a:prstGeom prst="rect">
+              <a:avLst/>
+            </a:prstGeom>
+            <a:solidFill>
+              <a:schemeClr val="accent3"/>
+            </a:solidFill>
+            <a:ln>
+              <a:noFill/>
+            </a:ln>
+          </p:spPr>
+          <p:txBody>
+            <a:bodyPr anchorCtr="0" anchor="ctr" bIns="91425" lIns="91425" spcFirstLastPara="1" rIns="91425" wrap="square" tIns="91425">
+              <a:noAutofit/>
+            </a:bodyPr>
+            <a:lstStyle/>
+            <a:p>
+              <a:pPr indent="0" lvl="0" marL="0" rtl="0" algn="l">
+                <a:spcBef>
+                  <a:spcPts val="0"/>
+                </a:spcBef>
+                <a:spcAft>
+                  <a:spcPts val="0"/>
+                </a:spcAft>
+                <a:buNone/>
+              </a:pPr>
+              <a:r>
+                <a:t/>
+              </a:r>
+              <a:endParaRPr/>
+            </a:p>
+          </p:txBody>
+        </p:sp>
+        <p:sp>
+          <p:nvSpPr>
+            <p:cNvPr id="87" name="Google Shape;87;p13"/>
+            <p:cNvSpPr/>
+            <p:nvPr/>
+          </p:nvSpPr>
+          <p:spPr>
+            <a:xfrm>
+              <a:off x="2743200" y="2386584"/>
+              <a:ext cx="6400800" cy="91500"/>
+            </a:xfrm>
+            <a:prstGeom prst="rect">
+              <a:avLst/>
+            </a:prstGeom>
+            <a:solidFill>
+              <a:schemeClr val="accent4"/>
+            </a:solidFill>
+            <a:ln>
+              <a:noFill/>
+            </a:ln>
+          </p:spPr>
+          <p:txBody>
+            <a:bodyPr anchorCtr="0" anchor="ctr" bIns="91425" lIns="91425" spcFirstLastPara="1" rIns="91425" wrap="square" tIns="91425">
+              <a:noAutofit/>
+            </a:bodyPr>
+            <a:lstStyle/>
+            <a:p>
+              <a:pPr indent="0" lvl="0" marL="0" rtl="0" algn="l">
+                <a:spcBef>
+                  <a:spcPts val="0"/>
+                </a:spcBef>
+                <a:spcAft>
+                  <a:spcPts val="0"/>
+                </a:spcAft>
+                <a:buNone/>
+              </a:pPr>
+              <a:r>
+                <a:t/>
+              </a:r>
+              <a:endParaRPr/>
+            </a:p>
+          </p:txBody>
+        </p:sp>
+      </p:grpSp>
+    </p:spTree>
+  </p:cSld>
+  <p:clrMapOvr>
+    <a:masterClrMapping/>
+  </p:clrMapOvr>
+</p:sldLayout>
+</file>
+
+<file path=ppt/slideLayouts/slideLayout12.xml><?xml version="1.0" encoding="utf-8"?>
+<p:sldLayout xmlns:a="http://schemas.openxmlformats.org/drawingml/2006/main" xmlns:r="http://schemas.openxmlformats.org/officeDocument/2006/relationships" xmlns:mc="http://schemas.openxmlformats.org/markup-compatibility/2006" xmlns:mv="urn:schemas-microsoft-com:mac:vml" xmlns:p="http://schemas.openxmlformats.org/presentationml/2006/main" xmlns:c="http://schemas.openxmlformats.org/drawingml/2006/chart" xmlns:dgm="http://schemas.openxmlformats.org/drawingml/2006/diagram" xmlns:o="urn:schemas-microsoft-com:office:office" xmlns:v="urn:schemas-microsoft-com:vml" xmlns:pvml="urn:schemas-microsoft-com:office:powerpoint" xmlns:com="http://schemas.openxmlformats.org/drawingml/2006/compatibility" xmlns:p14="http://schemas.microsoft.com/office/powerpoint/2010/main" xmlns:p15="http://schemas.microsoft.com/office/powerpoint/2012/main" xmlns:ahyp="http://schemas.microsoft.com/office/drawing/2018/hyperlinkcolor" matchingName="Blank" type="blank">
+  <p:cSld name="BLANK">
+    <p:spTree>
+      <p:nvGrpSpPr>
+        <p:cNvPr id="88" name="Shape 88"/>
+        <p:cNvGrpSpPr/>
+        <p:nvPr/>
+      </p:nvGrpSpPr>
+      <p:grpSpPr>
+        <a:xfrm>
+          <a:off x="0" y="0"/>
+          <a:ext cx="0" cy="0"/>
+          <a:chOff x="0" y="0"/>
+          <a:chExt cx="0" cy="0"/>
+        </a:xfrm>
+      </p:grpSpPr>
     </p:spTree>
   </p:cSld>
   <p:clrMapOvr>
@@ -5845,6 +7009,1319 @@
           <a:chExt cx="0" cy="0"/>
         </a:xfrm>
       </p:grpSpPr>
+    </p:spTree>
+  </p:cSld>
+  <p:clrMapOvr>
+    <a:masterClrMapping/>
+  </p:clrMapOvr>
+</p:sldLayout>
+</file>
+
+<file path=ppt/slideLayouts/slideLayout7.xml><?xml version="1.0" encoding="utf-8"?>
+<p:sldLayout xmlns:a="http://schemas.openxmlformats.org/drawingml/2006/main" xmlns:r="http://schemas.openxmlformats.org/officeDocument/2006/relationships" xmlns:mc="http://schemas.openxmlformats.org/markup-compatibility/2006" xmlns:mv="urn:schemas-microsoft-com:mac:vml" xmlns:p="http://schemas.openxmlformats.org/presentationml/2006/main" xmlns:c="http://schemas.openxmlformats.org/drawingml/2006/chart" xmlns:dgm="http://schemas.openxmlformats.org/drawingml/2006/diagram" xmlns:o="urn:schemas-microsoft-com:office:office" xmlns:v="urn:schemas-microsoft-com:vml" xmlns:pvml="urn:schemas-microsoft-com:office:powerpoint" xmlns:com="http://schemas.openxmlformats.org/drawingml/2006/compatibility" xmlns:p14="http://schemas.microsoft.com/office/powerpoint/2010/main" xmlns:p15="http://schemas.microsoft.com/office/powerpoint/2012/main" xmlns:ahyp="http://schemas.microsoft.com/office/drawing/2018/hyperlinkcolor" matchingName="Title slide" type="title">
+  <p:cSld name="TITLE">
+    <p:spTree>
+      <p:nvGrpSpPr>
+        <p:cNvPr id="51" name="Shape 51"/>
+        <p:cNvGrpSpPr/>
+        <p:nvPr/>
+      </p:nvGrpSpPr>
+      <p:grpSpPr>
+        <a:xfrm>
+          <a:off x="0" y="0"/>
+          <a:ext cx="0" cy="0"/>
+          <a:chOff x="0" y="0"/>
+          <a:chExt cx="0" cy="0"/>
+        </a:xfrm>
+      </p:grpSpPr>
+      <p:sp>
+        <p:nvSpPr>
+          <p:cNvPr id="52" name="Google Shape;52;p9"/>
+          <p:cNvSpPr txBox="1"/>
+          <p:nvPr>
+            <p:ph type="ctrTitle"/>
+          </p:nvPr>
+        </p:nvSpPr>
+        <p:spPr>
+          <a:xfrm>
+            <a:off x="0" y="0"/>
+            <a:ext cx="9144000" cy="2388900"/>
+          </a:xfrm>
+          <a:prstGeom prst="rect">
+            <a:avLst/>
+          </a:prstGeom>
+          <a:noFill/>
+        </p:spPr>
+        <p:txBody>
+          <a:bodyPr anchorCtr="0" anchor="b" bIns="274300" lIns="91425" spcFirstLastPara="1" rIns="91425" wrap="square" tIns="91425">
+            <a:noAutofit/>
+          </a:bodyPr>
+          <a:lstStyle>
+            <a:lvl1pPr lvl="0" algn="ctr">
+              <a:spcBef>
+                <a:spcPts val="0"/>
+              </a:spcBef>
+              <a:spcAft>
+                <a:spcPts val="0"/>
+              </a:spcAft>
+              <a:buClr>
+                <a:schemeClr val="dk1"/>
+              </a:buClr>
+              <a:buSzPts val="4200"/>
+              <a:buNone/>
+              <a:defRPr sz="4200">
+                <a:solidFill>
+                  <a:schemeClr val="dk1"/>
+                </a:solidFill>
+              </a:defRPr>
+            </a:lvl1pPr>
+            <a:lvl2pPr lvl="1" algn="ctr">
+              <a:spcBef>
+                <a:spcPts val="0"/>
+              </a:spcBef>
+              <a:spcAft>
+                <a:spcPts val="0"/>
+              </a:spcAft>
+              <a:buSzPts val="5200"/>
+              <a:buNone/>
+              <a:defRPr sz="5200"/>
+            </a:lvl2pPr>
+            <a:lvl3pPr lvl="2" algn="ctr">
+              <a:spcBef>
+                <a:spcPts val="0"/>
+              </a:spcBef>
+              <a:spcAft>
+                <a:spcPts val="0"/>
+              </a:spcAft>
+              <a:buSzPts val="5200"/>
+              <a:buNone/>
+              <a:defRPr sz="5200"/>
+            </a:lvl3pPr>
+            <a:lvl4pPr lvl="3" algn="ctr">
+              <a:spcBef>
+                <a:spcPts val="0"/>
+              </a:spcBef>
+              <a:spcAft>
+                <a:spcPts val="0"/>
+              </a:spcAft>
+              <a:buSzPts val="5200"/>
+              <a:buNone/>
+              <a:defRPr sz="5200"/>
+            </a:lvl4pPr>
+            <a:lvl5pPr lvl="4" algn="ctr">
+              <a:spcBef>
+                <a:spcPts val="0"/>
+              </a:spcBef>
+              <a:spcAft>
+                <a:spcPts val="0"/>
+              </a:spcAft>
+              <a:buSzPts val="5200"/>
+              <a:buNone/>
+              <a:defRPr sz="5200"/>
+            </a:lvl5pPr>
+            <a:lvl6pPr lvl="5" algn="ctr">
+              <a:spcBef>
+                <a:spcPts val="0"/>
+              </a:spcBef>
+              <a:spcAft>
+                <a:spcPts val="0"/>
+              </a:spcAft>
+              <a:buSzPts val="5200"/>
+              <a:buNone/>
+              <a:defRPr sz="5200"/>
+            </a:lvl6pPr>
+            <a:lvl7pPr lvl="6" algn="ctr">
+              <a:spcBef>
+                <a:spcPts val="0"/>
+              </a:spcBef>
+              <a:spcAft>
+                <a:spcPts val="0"/>
+              </a:spcAft>
+              <a:buSzPts val="5200"/>
+              <a:buNone/>
+              <a:defRPr sz="5200"/>
+            </a:lvl7pPr>
+            <a:lvl8pPr lvl="7" algn="ctr">
+              <a:spcBef>
+                <a:spcPts val="0"/>
+              </a:spcBef>
+              <a:spcAft>
+                <a:spcPts val="0"/>
+              </a:spcAft>
+              <a:buSzPts val="5200"/>
+              <a:buNone/>
+              <a:defRPr sz="5200"/>
+            </a:lvl8pPr>
+            <a:lvl9pPr lvl="8" algn="ctr">
+              <a:spcBef>
+                <a:spcPts val="0"/>
+              </a:spcBef>
+              <a:spcAft>
+                <a:spcPts val="0"/>
+              </a:spcAft>
+              <a:buSzPts val="5200"/>
+              <a:buNone/>
+              <a:defRPr sz="5200"/>
+            </a:lvl9pPr>
+          </a:lstStyle>
+          <a:p/>
+        </p:txBody>
+      </p:sp>
+      <p:sp>
+        <p:nvSpPr>
+          <p:cNvPr id="53" name="Google Shape;53;p9"/>
+          <p:cNvSpPr txBox="1"/>
+          <p:nvPr>
+            <p:ph idx="1" type="subTitle"/>
+          </p:nvPr>
+        </p:nvSpPr>
+        <p:spPr>
+          <a:xfrm>
+            <a:off x="0" y="2569475"/>
+            <a:ext cx="9144000" cy="2574000"/>
+          </a:xfrm>
+          <a:prstGeom prst="rect">
+            <a:avLst/>
+          </a:prstGeom>
+        </p:spPr>
+        <p:txBody>
+          <a:bodyPr anchorCtr="0" anchor="t" bIns="91425" lIns="91425" spcFirstLastPara="1" rIns="91425" wrap="square" tIns="274300">
+            <a:noAutofit/>
+          </a:bodyPr>
+          <a:lstStyle>
+            <a:lvl1pPr lvl="0" algn="ctr">
+              <a:lnSpc>
+                <a:spcPct val="115000"/>
+              </a:lnSpc>
+              <a:spcBef>
+                <a:spcPts val="0"/>
+              </a:spcBef>
+              <a:spcAft>
+                <a:spcPts val="0"/>
+              </a:spcAft>
+              <a:buSzPts val="3000"/>
+              <a:buNone/>
+              <a:defRPr sz="3000"/>
+            </a:lvl1pPr>
+            <a:lvl2pPr lvl="1" algn="ctr">
+              <a:lnSpc>
+                <a:spcPct val="115000"/>
+              </a:lnSpc>
+              <a:spcBef>
+                <a:spcPts val="0"/>
+              </a:spcBef>
+              <a:spcAft>
+                <a:spcPts val="0"/>
+              </a:spcAft>
+              <a:buSzPts val="3200"/>
+              <a:buNone/>
+              <a:defRPr sz="3200"/>
+            </a:lvl2pPr>
+            <a:lvl3pPr lvl="2" algn="ctr">
+              <a:lnSpc>
+                <a:spcPct val="115000"/>
+              </a:lnSpc>
+              <a:spcBef>
+                <a:spcPts val="0"/>
+              </a:spcBef>
+              <a:spcAft>
+                <a:spcPts val="0"/>
+              </a:spcAft>
+              <a:buSzPts val="3200"/>
+              <a:buNone/>
+              <a:defRPr sz="3200"/>
+            </a:lvl3pPr>
+            <a:lvl4pPr lvl="3" algn="ctr">
+              <a:lnSpc>
+                <a:spcPct val="115000"/>
+              </a:lnSpc>
+              <a:spcBef>
+                <a:spcPts val="0"/>
+              </a:spcBef>
+              <a:spcAft>
+                <a:spcPts val="0"/>
+              </a:spcAft>
+              <a:buSzPts val="3200"/>
+              <a:buNone/>
+              <a:defRPr sz="3200"/>
+            </a:lvl4pPr>
+            <a:lvl5pPr lvl="4" algn="ctr">
+              <a:lnSpc>
+                <a:spcPct val="115000"/>
+              </a:lnSpc>
+              <a:spcBef>
+                <a:spcPts val="0"/>
+              </a:spcBef>
+              <a:spcAft>
+                <a:spcPts val="0"/>
+              </a:spcAft>
+              <a:buSzPts val="3200"/>
+              <a:buNone/>
+              <a:defRPr sz="3200"/>
+            </a:lvl5pPr>
+            <a:lvl6pPr lvl="5" algn="ctr">
+              <a:lnSpc>
+                <a:spcPct val="115000"/>
+              </a:lnSpc>
+              <a:spcBef>
+                <a:spcPts val="0"/>
+              </a:spcBef>
+              <a:spcAft>
+                <a:spcPts val="0"/>
+              </a:spcAft>
+              <a:buSzPts val="3200"/>
+              <a:buNone/>
+              <a:defRPr sz="3200"/>
+            </a:lvl6pPr>
+            <a:lvl7pPr lvl="6" algn="ctr">
+              <a:lnSpc>
+                <a:spcPct val="115000"/>
+              </a:lnSpc>
+              <a:spcBef>
+                <a:spcPts val="0"/>
+              </a:spcBef>
+              <a:spcAft>
+                <a:spcPts val="0"/>
+              </a:spcAft>
+              <a:buSzPts val="3200"/>
+              <a:buNone/>
+              <a:defRPr sz="3200"/>
+            </a:lvl7pPr>
+            <a:lvl8pPr lvl="7" algn="ctr">
+              <a:lnSpc>
+                <a:spcPct val="115000"/>
+              </a:lnSpc>
+              <a:spcBef>
+                <a:spcPts val="0"/>
+              </a:spcBef>
+              <a:spcAft>
+                <a:spcPts val="0"/>
+              </a:spcAft>
+              <a:buSzPts val="3200"/>
+              <a:buNone/>
+              <a:defRPr sz="3200"/>
+            </a:lvl8pPr>
+            <a:lvl9pPr lvl="8" algn="ctr">
+              <a:lnSpc>
+                <a:spcPct val="115000"/>
+              </a:lnSpc>
+              <a:spcBef>
+                <a:spcPts val="0"/>
+              </a:spcBef>
+              <a:spcAft>
+                <a:spcPts val="0"/>
+              </a:spcAft>
+              <a:buSzPts val="3200"/>
+              <a:buNone/>
+              <a:defRPr sz="3200"/>
+            </a:lvl9pPr>
+          </a:lstStyle>
+          <a:p/>
+        </p:txBody>
+      </p:sp>
+      <p:grpSp>
+        <p:nvGrpSpPr>
+          <p:cNvPr id="54" name="Google Shape;54;p9"/>
+          <p:cNvGrpSpPr/>
+          <p:nvPr/>
+        </p:nvGrpSpPr>
+        <p:grpSpPr>
+          <a:xfrm>
+            <a:off x="0" y="2388810"/>
+            <a:ext cx="9144000" cy="183000"/>
+            <a:chOff x="0" y="2388810"/>
+            <a:chExt cx="9144000" cy="183000"/>
+          </a:xfrm>
+        </p:grpSpPr>
+        <p:sp>
+          <p:nvSpPr>
+            <p:cNvPr id="55" name="Google Shape;55;p9"/>
+            <p:cNvSpPr/>
+            <p:nvPr/>
+          </p:nvSpPr>
+          <p:spPr>
+            <a:xfrm>
+              <a:off x="0" y="2388810"/>
+              <a:ext cx="914400" cy="183000"/>
+            </a:xfrm>
+            <a:prstGeom prst="rect">
+              <a:avLst/>
+            </a:prstGeom>
+            <a:solidFill>
+              <a:schemeClr val="accent2"/>
+            </a:solidFill>
+            <a:ln>
+              <a:noFill/>
+            </a:ln>
+          </p:spPr>
+          <p:txBody>
+            <a:bodyPr anchorCtr="0" anchor="ctr" bIns="91425" lIns="91425" spcFirstLastPara="1" rIns="91425" wrap="square" tIns="91425">
+              <a:noAutofit/>
+            </a:bodyPr>
+            <a:lstStyle/>
+            <a:p>
+              <a:pPr indent="0" lvl="0" marL="0" rtl="0" algn="l">
+                <a:spcBef>
+                  <a:spcPts val="0"/>
+                </a:spcBef>
+                <a:spcAft>
+                  <a:spcPts val="0"/>
+                </a:spcAft>
+                <a:buNone/>
+              </a:pPr>
+              <a:r>
+                <a:t/>
+              </a:r>
+              <a:endParaRPr/>
+            </a:p>
+          </p:txBody>
+        </p:sp>
+        <p:sp>
+          <p:nvSpPr>
+            <p:cNvPr id="56" name="Google Shape;56;p9"/>
+            <p:cNvSpPr/>
+            <p:nvPr/>
+          </p:nvSpPr>
+          <p:spPr>
+            <a:xfrm>
+              <a:off x="914400" y="2388810"/>
+              <a:ext cx="1828800" cy="183000"/>
+            </a:xfrm>
+            <a:prstGeom prst="rect">
+              <a:avLst/>
+            </a:prstGeom>
+            <a:solidFill>
+              <a:schemeClr val="accent3"/>
+            </a:solidFill>
+            <a:ln>
+              <a:noFill/>
+            </a:ln>
+          </p:spPr>
+          <p:txBody>
+            <a:bodyPr anchorCtr="0" anchor="ctr" bIns="91425" lIns="91425" spcFirstLastPara="1" rIns="91425" wrap="square" tIns="91425">
+              <a:noAutofit/>
+            </a:bodyPr>
+            <a:lstStyle/>
+            <a:p>
+              <a:pPr indent="0" lvl="0" marL="0" rtl="0" algn="l">
+                <a:spcBef>
+                  <a:spcPts val="0"/>
+                </a:spcBef>
+                <a:spcAft>
+                  <a:spcPts val="0"/>
+                </a:spcAft>
+                <a:buNone/>
+              </a:pPr>
+              <a:r>
+                <a:t/>
+              </a:r>
+              <a:endParaRPr/>
+            </a:p>
+          </p:txBody>
+        </p:sp>
+        <p:sp>
+          <p:nvSpPr>
+            <p:cNvPr id="57" name="Google Shape;57;p9"/>
+            <p:cNvSpPr/>
+            <p:nvPr/>
+          </p:nvSpPr>
+          <p:spPr>
+            <a:xfrm>
+              <a:off x="2743200" y="2388810"/>
+              <a:ext cx="6400800" cy="183000"/>
+            </a:xfrm>
+            <a:prstGeom prst="rect">
+              <a:avLst/>
+            </a:prstGeom>
+            <a:solidFill>
+              <a:schemeClr val="accent4"/>
+            </a:solidFill>
+            <a:ln>
+              <a:noFill/>
+            </a:ln>
+          </p:spPr>
+          <p:txBody>
+            <a:bodyPr anchorCtr="0" anchor="ctr" bIns="91425" lIns="91425" spcFirstLastPara="1" rIns="91425" wrap="square" tIns="91425">
+              <a:noAutofit/>
+            </a:bodyPr>
+            <a:lstStyle/>
+            <a:p>
+              <a:pPr indent="0" lvl="0" marL="0" rtl="0" algn="l">
+                <a:spcBef>
+                  <a:spcPts val="0"/>
+                </a:spcBef>
+                <a:spcAft>
+                  <a:spcPts val="0"/>
+                </a:spcAft>
+                <a:buNone/>
+              </a:pPr>
+              <a:r>
+                <a:t/>
+              </a:r>
+              <a:endParaRPr/>
+            </a:p>
+          </p:txBody>
+        </p:sp>
+      </p:grpSp>
+    </p:spTree>
+  </p:cSld>
+  <p:clrMapOvr>
+    <a:masterClrMapping/>
+  </p:clrMapOvr>
+</p:sldLayout>
+</file>
+
+<file path=ppt/slideLayouts/slideLayout8.xml><?xml version="1.0" encoding="utf-8"?>
+<p:sldLayout xmlns:a="http://schemas.openxmlformats.org/drawingml/2006/main" xmlns:r="http://schemas.openxmlformats.org/officeDocument/2006/relationships" xmlns:mc="http://schemas.openxmlformats.org/markup-compatibility/2006" xmlns:mv="urn:schemas-microsoft-com:mac:vml" xmlns:p="http://schemas.openxmlformats.org/presentationml/2006/main" xmlns:c="http://schemas.openxmlformats.org/drawingml/2006/chart" xmlns:dgm="http://schemas.openxmlformats.org/drawingml/2006/diagram" xmlns:o="urn:schemas-microsoft-com:office:office" xmlns:v="urn:schemas-microsoft-com:vml" xmlns:pvml="urn:schemas-microsoft-com:office:powerpoint" xmlns:com="http://schemas.openxmlformats.org/drawingml/2006/compatibility" xmlns:p14="http://schemas.microsoft.com/office/powerpoint/2010/main" xmlns:p15="http://schemas.microsoft.com/office/powerpoint/2012/main" xmlns:ahyp="http://schemas.microsoft.com/office/drawing/2018/hyperlinkcolor" matchingName="Section header" type="secHead">
+  <p:cSld name="SECTION_HEADER">
+    <p:spTree>
+      <p:nvGrpSpPr>
+        <p:cNvPr id="58" name="Shape 58"/>
+        <p:cNvGrpSpPr/>
+        <p:nvPr/>
+      </p:nvGrpSpPr>
+      <p:grpSpPr>
+        <a:xfrm>
+          <a:off x="0" y="0"/>
+          <a:ext cx="0" cy="0"/>
+          <a:chOff x="0" y="0"/>
+          <a:chExt cx="0" cy="0"/>
+        </a:xfrm>
+      </p:grpSpPr>
+      <p:sp>
+        <p:nvSpPr>
+          <p:cNvPr id="59" name="Google Shape;59;p10"/>
+          <p:cNvSpPr txBox="1"/>
+          <p:nvPr>
+            <p:ph type="title"/>
+          </p:nvPr>
+        </p:nvSpPr>
+        <p:spPr>
+          <a:xfrm>
+            <a:off x="0" y="-7"/>
+            <a:ext cx="9144000" cy="2386500"/>
+          </a:xfrm>
+          <a:prstGeom prst="rect">
+            <a:avLst/>
+          </a:prstGeom>
+        </p:spPr>
+        <p:txBody>
+          <a:bodyPr anchorCtr="0" anchor="b" bIns="274300" lIns="91425" spcFirstLastPara="1" rIns="91425" wrap="square" tIns="91425">
+            <a:noAutofit/>
+          </a:bodyPr>
+          <a:lstStyle>
+            <a:lvl1pPr lvl="0" algn="ctr">
+              <a:spcBef>
+                <a:spcPts val="0"/>
+              </a:spcBef>
+              <a:spcAft>
+                <a:spcPts val="0"/>
+              </a:spcAft>
+              <a:buSzPts val="3000"/>
+              <a:buNone/>
+              <a:defRPr sz="3000"/>
+            </a:lvl1pPr>
+            <a:lvl2pPr lvl="1" algn="ctr">
+              <a:spcBef>
+                <a:spcPts val="0"/>
+              </a:spcBef>
+              <a:spcAft>
+                <a:spcPts val="0"/>
+              </a:spcAft>
+              <a:buSzPts val="3600"/>
+              <a:buNone/>
+              <a:defRPr sz="3600"/>
+            </a:lvl2pPr>
+            <a:lvl3pPr lvl="2" algn="ctr">
+              <a:spcBef>
+                <a:spcPts val="0"/>
+              </a:spcBef>
+              <a:spcAft>
+                <a:spcPts val="0"/>
+              </a:spcAft>
+              <a:buSzPts val="3600"/>
+              <a:buNone/>
+              <a:defRPr sz="3600"/>
+            </a:lvl3pPr>
+            <a:lvl4pPr lvl="3" algn="ctr">
+              <a:spcBef>
+                <a:spcPts val="0"/>
+              </a:spcBef>
+              <a:spcAft>
+                <a:spcPts val="0"/>
+              </a:spcAft>
+              <a:buSzPts val="3600"/>
+              <a:buNone/>
+              <a:defRPr sz="3600"/>
+            </a:lvl4pPr>
+            <a:lvl5pPr lvl="4" algn="ctr">
+              <a:spcBef>
+                <a:spcPts val="0"/>
+              </a:spcBef>
+              <a:spcAft>
+                <a:spcPts val="0"/>
+              </a:spcAft>
+              <a:buSzPts val="3600"/>
+              <a:buNone/>
+              <a:defRPr sz="3600"/>
+            </a:lvl5pPr>
+            <a:lvl6pPr lvl="5" algn="ctr">
+              <a:spcBef>
+                <a:spcPts val="0"/>
+              </a:spcBef>
+              <a:spcAft>
+                <a:spcPts val="0"/>
+              </a:spcAft>
+              <a:buSzPts val="3600"/>
+              <a:buNone/>
+              <a:defRPr sz="3600"/>
+            </a:lvl6pPr>
+            <a:lvl7pPr lvl="6" algn="ctr">
+              <a:spcBef>
+                <a:spcPts val="0"/>
+              </a:spcBef>
+              <a:spcAft>
+                <a:spcPts val="0"/>
+              </a:spcAft>
+              <a:buSzPts val="3600"/>
+              <a:buNone/>
+              <a:defRPr sz="3600"/>
+            </a:lvl7pPr>
+            <a:lvl8pPr lvl="7" algn="ctr">
+              <a:spcBef>
+                <a:spcPts val="0"/>
+              </a:spcBef>
+              <a:spcAft>
+                <a:spcPts val="0"/>
+              </a:spcAft>
+              <a:buSzPts val="3600"/>
+              <a:buNone/>
+              <a:defRPr sz="3600"/>
+            </a:lvl8pPr>
+            <a:lvl9pPr lvl="8" algn="ctr">
+              <a:spcBef>
+                <a:spcPts val="0"/>
+              </a:spcBef>
+              <a:spcAft>
+                <a:spcPts val="0"/>
+              </a:spcAft>
+              <a:buSzPts val="3600"/>
+              <a:buNone/>
+              <a:defRPr sz="3600"/>
+            </a:lvl9pPr>
+          </a:lstStyle>
+          <a:p/>
+        </p:txBody>
+      </p:sp>
+      <p:grpSp>
+        <p:nvGrpSpPr>
+          <p:cNvPr id="60" name="Google Shape;60;p10"/>
+          <p:cNvGrpSpPr/>
+          <p:nvPr/>
+        </p:nvGrpSpPr>
+        <p:grpSpPr>
+          <a:xfrm>
+            <a:off x="0" y="2432304"/>
+            <a:ext cx="9144000" cy="91500"/>
+            <a:chOff x="0" y="2386584"/>
+            <a:chExt cx="9144000" cy="91500"/>
+          </a:xfrm>
+        </p:grpSpPr>
+        <p:sp>
+          <p:nvSpPr>
+            <p:cNvPr id="61" name="Google Shape;61;p10"/>
+            <p:cNvSpPr/>
+            <p:nvPr/>
+          </p:nvSpPr>
+          <p:spPr>
+            <a:xfrm>
+              <a:off x="0" y="2386584"/>
+              <a:ext cx="914400" cy="91500"/>
+            </a:xfrm>
+            <a:prstGeom prst="rect">
+              <a:avLst/>
+            </a:prstGeom>
+            <a:solidFill>
+              <a:schemeClr val="accent2"/>
+            </a:solidFill>
+            <a:ln>
+              <a:noFill/>
+            </a:ln>
+          </p:spPr>
+          <p:txBody>
+            <a:bodyPr anchorCtr="0" anchor="ctr" bIns="91425" lIns="91425" spcFirstLastPara="1" rIns="91425" wrap="square" tIns="91425">
+              <a:noAutofit/>
+            </a:bodyPr>
+            <a:lstStyle/>
+            <a:p>
+              <a:pPr indent="0" lvl="0" marL="0" rtl="0" algn="l">
+                <a:spcBef>
+                  <a:spcPts val="0"/>
+                </a:spcBef>
+                <a:spcAft>
+                  <a:spcPts val="0"/>
+                </a:spcAft>
+                <a:buNone/>
+              </a:pPr>
+              <a:r>
+                <a:t/>
+              </a:r>
+              <a:endParaRPr/>
+            </a:p>
+          </p:txBody>
+        </p:sp>
+        <p:sp>
+          <p:nvSpPr>
+            <p:cNvPr id="62" name="Google Shape;62;p10"/>
+            <p:cNvSpPr/>
+            <p:nvPr/>
+          </p:nvSpPr>
+          <p:spPr>
+            <a:xfrm>
+              <a:off x="914400" y="2386584"/>
+              <a:ext cx="1828800" cy="91500"/>
+            </a:xfrm>
+            <a:prstGeom prst="rect">
+              <a:avLst/>
+            </a:prstGeom>
+            <a:solidFill>
+              <a:schemeClr val="accent3"/>
+            </a:solidFill>
+            <a:ln>
+              <a:noFill/>
+            </a:ln>
+          </p:spPr>
+          <p:txBody>
+            <a:bodyPr anchorCtr="0" anchor="ctr" bIns="91425" lIns="91425" spcFirstLastPara="1" rIns="91425" wrap="square" tIns="91425">
+              <a:noAutofit/>
+            </a:bodyPr>
+            <a:lstStyle/>
+            <a:p>
+              <a:pPr indent="0" lvl="0" marL="0" rtl="0" algn="l">
+                <a:spcBef>
+                  <a:spcPts val="0"/>
+                </a:spcBef>
+                <a:spcAft>
+                  <a:spcPts val="0"/>
+                </a:spcAft>
+                <a:buNone/>
+              </a:pPr>
+              <a:r>
+                <a:t/>
+              </a:r>
+              <a:endParaRPr/>
+            </a:p>
+          </p:txBody>
+        </p:sp>
+        <p:sp>
+          <p:nvSpPr>
+            <p:cNvPr id="63" name="Google Shape;63;p10"/>
+            <p:cNvSpPr/>
+            <p:nvPr/>
+          </p:nvSpPr>
+          <p:spPr>
+            <a:xfrm>
+              <a:off x="2743200" y="2386584"/>
+              <a:ext cx="6400800" cy="91500"/>
+            </a:xfrm>
+            <a:prstGeom prst="rect">
+              <a:avLst/>
+            </a:prstGeom>
+            <a:solidFill>
+              <a:schemeClr val="accent4"/>
+            </a:solidFill>
+            <a:ln>
+              <a:noFill/>
+            </a:ln>
+          </p:spPr>
+          <p:txBody>
+            <a:bodyPr anchorCtr="0" anchor="ctr" bIns="91425" lIns="91425" spcFirstLastPara="1" rIns="91425" wrap="square" tIns="91425">
+              <a:noAutofit/>
+            </a:bodyPr>
+            <a:lstStyle/>
+            <a:p>
+              <a:pPr indent="0" lvl="0" marL="0" rtl="0" algn="l">
+                <a:spcBef>
+                  <a:spcPts val="0"/>
+                </a:spcBef>
+                <a:spcAft>
+                  <a:spcPts val="0"/>
+                </a:spcAft>
+                <a:buNone/>
+              </a:pPr>
+              <a:r>
+                <a:t/>
+              </a:r>
+              <a:endParaRPr/>
+            </a:p>
+          </p:txBody>
+        </p:sp>
+      </p:grpSp>
+    </p:spTree>
+  </p:cSld>
+  <p:clrMapOvr>
+    <a:masterClrMapping/>
+  </p:clrMapOvr>
+</p:sldLayout>
+</file>
+
+<file path=ppt/slideLayouts/slideLayout9.xml><?xml version="1.0" encoding="utf-8"?>
+<p:sldLayout xmlns:a="http://schemas.openxmlformats.org/drawingml/2006/main" xmlns:r="http://schemas.openxmlformats.org/officeDocument/2006/relationships" xmlns:mc="http://schemas.openxmlformats.org/markup-compatibility/2006" xmlns:mv="urn:schemas-microsoft-com:mac:vml" xmlns:p="http://schemas.openxmlformats.org/presentationml/2006/main" xmlns:c="http://schemas.openxmlformats.org/drawingml/2006/chart" xmlns:dgm="http://schemas.openxmlformats.org/drawingml/2006/diagram" xmlns:o="urn:schemas-microsoft-com:office:office" xmlns:v="urn:schemas-microsoft-com:vml" xmlns:pvml="urn:schemas-microsoft-com:office:powerpoint" xmlns:com="http://schemas.openxmlformats.org/drawingml/2006/compatibility" xmlns:p14="http://schemas.microsoft.com/office/powerpoint/2010/main" xmlns:p15="http://schemas.microsoft.com/office/powerpoint/2012/main" xmlns:ahyp="http://schemas.microsoft.com/office/drawing/2018/hyperlinkcolor" matchingName="Title and body" type="tx">
+  <p:cSld name="TITLE_AND_BODY">
+    <p:spTree>
+      <p:nvGrpSpPr>
+        <p:cNvPr id="64" name="Shape 64"/>
+        <p:cNvGrpSpPr/>
+        <p:nvPr/>
+      </p:nvGrpSpPr>
+      <p:grpSpPr>
+        <a:xfrm>
+          <a:off x="0" y="0"/>
+          <a:ext cx="0" cy="0"/>
+          <a:chOff x="0" y="0"/>
+          <a:chExt cx="0" cy="0"/>
+        </a:xfrm>
+      </p:grpSpPr>
+      <p:sp>
+        <p:nvSpPr>
+          <p:cNvPr id="65" name="Google Shape;65;p11"/>
+          <p:cNvSpPr txBox="1"/>
+          <p:nvPr>
+            <p:ph type="title"/>
+          </p:nvPr>
+        </p:nvSpPr>
+        <p:spPr>
+          <a:xfrm>
+            <a:off x="0" y="0"/>
+            <a:ext cx="9144000" cy="685800"/>
+          </a:xfrm>
+          <a:prstGeom prst="rect">
+            <a:avLst/>
+          </a:prstGeom>
+        </p:spPr>
+        <p:txBody>
+          <a:bodyPr anchorCtr="0" anchor="ctr" bIns="91425" lIns="274300" spcFirstLastPara="1" rIns="91425" wrap="square" tIns="91425">
+            <a:noAutofit/>
+          </a:bodyPr>
+          <a:lstStyle>
+            <a:lvl1pPr lvl="0">
+              <a:spcBef>
+                <a:spcPts val="0"/>
+              </a:spcBef>
+              <a:spcAft>
+                <a:spcPts val="0"/>
+              </a:spcAft>
+              <a:buSzPts val="2400"/>
+              <a:buNone/>
+              <a:defRPr/>
+            </a:lvl1pPr>
+            <a:lvl2pPr lvl="1">
+              <a:spcBef>
+                <a:spcPts val="0"/>
+              </a:spcBef>
+              <a:spcAft>
+                <a:spcPts val="0"/>
+              </a:spcAft>
+              <a:buSzPts val="2800"/>
+              <a:buNone/>
+              <a:defRPr/>
+            </a:lvl2pPr>
+            <a:lvl3pPr lvl="2">
+              <a:spcBef>
+                <a:spcPts val="0"/>
+              </a:spcBef>
+              <a:spcAft>
+                <a:spcPts val="0"/>
+              </a:spcAft>
+              <a:buSzPts val="2800"/>
+              <a:buNone/>
+              <a:defRPr/>
+            </a:lvl3pPr>
+            <a:lvl4pPr lvl="3">
+              <a:spcBef>
+                <a:spcPts val="0"/>
+              </a:spcBef>
+              <a:spcAft>
+                <a:spcPts val="0"/>
+              </a:spcAft>
+              <a:buSzPts val="2800"/>
+              <a:buNone/>
+              <a:defRPr/>
+            </a:lvl4pPr>
+            <a:lvl5pPr lvl="4">
+              <a:spcBef>
+                <a:spcPts val="0"/>
+              </a:spcBef>
+              <a:spcAft>
+                <a:spcPts val="0"/>
+              </a:spcAft>
+              <a:buSzPts val="2800"/>
+              <a:buNone/>
+              <a:defRPr/>
+            </a:lvl5pPr>
+            <a:lvl6pPr lvl="5">
+              <a:spcBef>
+                <a:spcPts val="0"/>
+              </a:spcBef>
+              <a:spcAft>
+                <a:spcPts val="0"/>
+              </a:spcAft>
+              <a:buSzPts val="2800"/>
+              <a:buNone/>
+              <a:defRPr/>
+            </a:lvl6pPr>
+            <a:lvl7pPr lvl="6">
+              <a:spcBef>
+                <a:spcPts val="0"/>
+              </a:spcBef>
+              <a:spcAft>
+                <a:spcPts val="0"/>
+              </a:spcAft>
+              <a:buSzPts val="2800"/>
+              <a:buNone/>
+              <a:defRPr/>
+            </a:lvl7pPr>
+            <a:lvl8pPr lvl="7">
+              <a:spcBef>
+                <a:spcPts val="0"/>
+              </a:spcBef>
+              <a:spcAft>
+                <a:spcPts val="0"/>
+              </a:spcAft>
+              <a:buSzPts val="2800"/>
+              <a:buNone/>
+              <a:defRPr/>
+            </a:lvl8pPr>
+            <a:lvl9pPr lvl="8">
+              <a:spcBef>
+                <a:spcPts val="0"/>
+              </a:spcBef>
+              <a:spcAft>
+                <a:spcPts val="0"/>
+              </a:spcAft>
+              <a:buSzPts val="2800"/>
+              <a:buNone/>
+              <a:defRPr/>
+            </a:lvl9pPr>
+          </a:lstStyle>
+          <a:p/>
+        </p:txBody>
+      </p:sp>
+      <p:sp>
+        <p:nvSpPr>
+          <p:cNvPr id="66" name="Google Shape;66;p11"/>
+          <p:cNvSpPr txBox="1"/>
+          <p:nvPr>
+            <p:ph idx="1" type="body"/>
+          </p:nvPr>
+        </p:nvSpPr>
+        <p:spPr>
+          <a:xfrm>
+            <a:off x="274320" y="914400"/>
+            <a:ext cx="8595300" cy="4114800"/>
+          </a:xfrm>
+          <a:prstGeom prst="rect">
+            <a:avLst/>
+          </a:prstGeom>
+        </p:spPr>
+        <p:txBody>
+          <a:bodyPr anchorCtr="0" anchor="t" bIns="0" lIns="0" spcFirstLastPara="1" rIns="0" wrap="square" tIns="0">
+            <a:noAutofit/>
+          </a:bodyPr>
+          <a:lstStyle>
+            <a:lvl1pPr indent="-342900" lvl="0" marL="457200">
+              <a:spcBef>
+                <a:spcPts val="0"/>
+              </a:spcBef>
+              <a:spcAft>
+                <a:spcPts val="0"/>
+              </a:spcAft>
+              <a:buSzPts val="1800"/>
+              <a:buChar char="●"/>
+              <a:defRPr/>
+            </a:lvl1pPr>
+            <a:lvl2pPr indent="-317500" lvl="1" marL="914400">
+              <a:spcBef>
+                <a:spcPts val="0"/>
+              </a:spcBef>
+              <a:spcAft>
+                <a:spcPts val="0"/>
+              </a:spcAft>
+              <a:buSzPts val="1400"/>
+              <a:buChar char="○"/>
+              <a:defRPr/>
+            </a:lvl2pPr>
+            <a:lvl3pPr indent="-317500" lvl="2" marL="1371600">
+              <a:spcBef>
+                <a:spcPts val="0"/>
+              </a:spcBef>
+              <a:spcAft>
+                <a:spcPts val="0"/>
+              </a:spcAft>
+              <a:buSzPts val="1400"/>
+              <a:buChar char="■"/>
+              <a:defRPr/>
+            </a:lvl3pPr>
+            <a:lvl4pPr indent="-317500" lvl="3" marL="1828800">
+              <a:spcBef>
+                <a:spcPts val="0"/>
+              </a:spcBef>
+              <a:spcAft>
+                <a:spcPts val="0"/>
+              </a:spcAft>
+              <a:buSzPts val="1400"/>
+              <a:buChar char="●"/>
+              <a:defRPr/>
+            </a:lvl4pPr>
+            <a:lvl5pPr indent="-317500" lvl="4" marL="2286000">
+              <a:spcBef>
+                <a:spcPts val="0"/>
+              </a:spcBef>
+              <a:spcAft>
+                <a:spcPts val="0"/>
+              </a:spcAft>
+              <a:buSzPts val="1400"/>
+              <a:buChar char="○"/>
+              <a:defRPr/>
+            </a:lvl5pPr>
+            <a:lvl6pPr indent="-317500" lvl="5" marL="2743200">
+              <a:spcBef>
+                <a:spcPts val="0"/>
+              </a:spcBef>
+              <a:spcAft>
+                <a:spcPts val="0"/>
+              </a:spcAft>
+              <a:buSzPts val="1400"/>
+              <a:buChar char="■"/>
+              <a:defRPr/>
+            </a:lvl6pPr>
+            <a:lvl7pPr indent="-317500" lvl="6" marL="3200400">
+              <a:spcBef>
+                <a:spcPts val="0"/>
+              </a:spcBef>
+              <a:spcAft>
+                <a:spcPts val="0"/>
+              </a:spcAft>
+              <a:buSzPts val="1400"/>
+              <a:buChar char="●"/>
+              <a:defRPr/>
+            </a:lvl7pPr>
+            <a:lvl8pPr indent="-317500" lvl="7" marL="3657600">
+              <a:spcBef>
+                <a:spcPts val="0"/>
+              </a:spcBef>
+              <a:spcAft>
+                <a:spcPts val="0"/>
+              </a:spcAft>
+              <a:buSzPts val="1400"/>
+              <a:buChar char="○"/>
+              <a:defRPr/>
+            </a:lvl8pPr>
+            <a:lvl9pPr indent="-317500" lvl="8" marL="4114800">
+              <a:spcBef>
+                <a:spcPts val="0"/>
+              </a:spcBef>
+              <a:spcAft>
+                <a:spcPts val="0"/>
+              </a:spcAft>
+              <a:buSzPts val="1400"/>
+              <a:buChar char="■"/>
+              <a:defRPr/>
+            </a:lvl9pPr>
+          </a:lstStyle>
+          <a:p/>
+        </p:txBody>
+      </p:sp>
+      <p:sp>
+        <p:nvSpPr>
+          <p:cNvPr id="67" name="Google Shape;67;p11"/>
+          <p:cNvSpPr txBox="1"/>
+          <p:nvPr>
+            <p:ph idx="12" type="sldNum"/>
+          </p:nvPr>
+        </p:nvSpPr>
+        <p:spPr>
+          <a:xfrm>
+            <a:off x="7315202" y="4416550"/>
+            <a:ext cx="1828800" cy="731400"/>
+          </a:xfrm>
+          <a:prstGeom prst="rect">
+            <a:avLst/>
+          </a:prstGeom>
+        </p:spPr>
+        <p:txBody>
+          <a:bodyPr anchorCtr="0" anchor="b" bIns="91425" lIns="91425" spcFirstLastPara="1" rIns="91425" wrap="square" tIns="91425">
+            <a:noAutofit/>
+          </a:bodyPr>
+          <a:lstStyle>
+            <a:lvl1pPr lvl="0" rtl="0">
+              <a:buNone/>
+              <a:defRPr>
+                <a:solidFill>
+                  <a:schemeClr val="dk1"/>
+                </a:solidFill>
+              </a:defRPr>
+            </a:lvl1pPr>
+            <a:lvl2pPr lvl="1" rtl="0">
+              <a:buNone/>
+              <a:defRPr>
+                <a:solidFill>
+                  <a:schemeClr val="dk1"/>
+                </a:solidFill>
+              </a:defRPr>
+            </a:lvl2pPr>
+            <a:lvl3pPr lvl="2" rtl="0">
+              <a:buNone/>
+              <a:defRPr>
+                <a:solidFill>
+                  <a:schemeClr val="dk1"/>
+                </a:solidFill>
+              </a:defRPr>
+            </a:lvl3pPr>
+            <a:lvl4pPr lvl="3" rtl="0">
+              <a:buNone/>
+              <a:defRPr>
+                <a:solidFill>
+                  <a:schemeClr val="dk1"/>
+                </a:solidFill>
+              </a:defRPr>
+            </a:lvl4pPr>
+            <a:lvl5pPr lvl="4" rtl="0">
+              <a:buNone/>
+              <a:defRPr>
+                <a:solidFill>
+                  <a:schemeClr val="dk1"/>
+                </a:solidFill>
+              </a:defRPr>
+            </a:lvl5pPr>
+            <a:lvl6pPr lvl="5" rtl="0">
+              <a:buNone/>
+              <a:defRPr>
+                <a:solidFill>
+                  <a:schemeClr val="dk1"/>
+                </a:solidFill>
+              </a:defRPr>
+            </a:lvl6pPr>
+            <a:lvl7pPr lvl="6" rtl="0">
+              <a:buNone/>
+              <a:defRPr>
+                <a:solidFill>
+                  <a:schemeClr val="dk1"/>
+                </a:solidFill>
+              </a:defRPr>
+            </a:lvl7pPr>
+            <a:lvl8pPr lvl="7" rtl="0">
+              <a:buNone/>
+              <a:defRPr>
+                <a:solidFill>
+                  <a:schemeClr val="dk1"/>
+                </a:solidFill>
+              </a:defRPr>
+            </a:lvl8pPr>
+            <a:lvl9pPr lvl="8" rtl="0">
+              <a:buNone/>
+              <a:defRPr>
+                <a:solidFill>
+                  <a:schemeClr val="dk1"/>
+                </a:solidFill>
+              </a:defRPr>
+            </a:lvl9pPr>
+          </a:lstStyle>
+          <a:p>
+            <a:pPr indent="0" lvl="0" marL="0" rtl="0" algn="r">
+              <a:spcBef>
+                <a:spcPts val="0"/>
+              </a:spcBef>
+              <a:spcAft>
+                <a:spcPts val="0"/>
+              </a:spcAft>
+              <a:buNone/>
+            </a:pPr>
+            <a:fld id="{00000000-1234-1234-1234-123412341234}" type="slidenum">
+              <a:rPr lang="en"/>
+              <a:t>‹#›</a:t>
+            </a:fld>
+            <a:endParaRPr/>
+          </a:p>
+          <a:p>
+            <a:pPr indent="0" lvl="0" marL="0" rtl="0" algn="r">
+              <a:spcBef>
+                <a:spcPts val="0"/>
+              </a:spcBef>
+              <a:spcAft>
+                <a:spcPts val="0"/>
+              </a:spcAft>
+              <a:buNone/>
+            </a:pPr>
+            <a:r>
+              <a:rPr b="0" lang="en" sz="900" u="sng">
+                <a:solidFill>
+                  <a:schemeClr val="hlink"/>
+                </a:solidFill>
+                <a:hlinkClick r:id="rId2"/>
+              </a:rPr>
+              <a:t>https://uni1.de/amos</a:t>
+            </a:r>
+            <a:r>
+              <a:rPr b="0" lang="en" sz="900">
+                <a:solidFill>
+                  <a:schemeClr val="dk2"/>
+                </a:solidFill>
+              </a:rPr>
+              <a:t> </a:t>
+            </a:r>
+            <a:endParaRPr b="0" sz="900">
+              <a:solidFill>
+                <a:schemeClr val="dk2"/>
+              </a:solidFill>
+            </a:endParaRPr>
+          </a:p>
+        </p:txBody>
+      </p:sp>
+      <p:grpSp>
+        <p:nvGrpSpPr>
+          <p:cNvPr id="68" name="Google Shape;68;p11"/>
+          <p:cNvGrpSpPr/>
+          <p:nvPr/>
+        </p:nvGrpSpPr>
+        <p:grpSpPr>
+          <a:xfrm>
+            <a:off x="0" y="685800"/>
+            <a:ext cx="9144000" cy="91500"/>
+            <a:chOff x="0" y="2386584"/>
+            <a:chExt cx="9144000" cy="91500"/>
+          </a:xfrm>
+        </p:grpSpPr>
+        <p:sp>
+          <p:nvSpPr>
+            <p:cNvPr id="69" name="Google Shape;69;p11"/>
+            <p:cNvSpPr/>
+            <p:nvPr/>
+          </p:nvSpPr>
+          <p:spPr>
+            <a:xfrm>
+              <a:off x="0" y="2386584"/>
+              <a:ext cx="914400" cy="91500"/>
+            </a:xfrm>
+            <a:prstGeom prst="rect">
+              <a:avLst/>
+            </a:prstGeom>
+            <a:solidFill>
+              <a:schemeClr val="accent2"/>
+            </a:solidFill>
+            <a:ln>
+              <a:noFill/>
+            </a:ln>
+          </p:spPr>
+          <p:txBody>
+            <a:bodyPr anchorCtr="0" anchor="ctr" bIns="91425" lIns="91425" spcFirstLastPara="1" rIns="91425" wrap="square" tIns="91425">
+              <a:noAutofit/>
+            </a:bodyPr>
+            <a:lstStyle/>
+            <a:p>
+              <a:pPr indent="0" lvl="0" marL="0" rtl="0" algn="l">
+                <a:spcBef>
+                  <a:spcPts val="0"/>
+                </a:spcBef>
+                <a:spcAft>
+                  <a:spcPts val="0"/>
+                </a:spcAft>
+                <a:buNone/>
+              </a:pPr>
+              <a:r>
+                <a:t/>
+              </a:r>
+              <a:endParaRPr/>
+            </a:p>
+          </p:txBody>
+        </p:sp>
+        <p:sp>
+          <p:nvSpPr>
+            <p:cNvPr id="70" name="Google Shape;70;p11"/>
+            <p:cNvSpPr/>
+            <p:nvPr/>
+          </p:nvSpPr>
+          <p:spPr>
+            <a:xfrm>
+              <a:off x="914400" y="2386584"/>
+              <a:ext cx="1828800" cy="91500"/>
+            </a:xfrm>
+            <a:prstGeom prst="rect">
+              <a:avLst/>
+            </a:prstGeom>
+            <a:solidFill>
+              <a:schemeClr val="accent3"/>
+            </a:solidFill>
+            <a:ln>
+              <a:noFill/>
+            </a:ln>
+          </p:spPr>
+          <p:txBody>
+            <a:bodyPr anchorCtr="0" anchor="ctr" bIns="91425" lIns="91425" spcFirstLastPara="1" rIns="91425" wrap="square" tIns="91425">
+              <a:noAutofit/>
+            </a:bodyPr>
+            <a:lstStyle/>
+            <a:p>
+              <a:pPr indent="0" lvl="0" marL="0" rtl="0" algn="l">
+                <a:spcBef>
+                  <a:spcPts val="0"/>
+                </a:spcBef>
+                <a:spcAft>
+                  <a:spcPts val="0"/>
+                </a:spcAft>
+                <a:buNone/>
+              </a:pPr>
+              <a:r>
+                <a:t/>
+              </a:r>
+              <a:endParaRPr/>
+            </a:p>
+          </p:txBody>
+        </p:sp>
+        <p:sp>
+          <p:nvSpPr>
+            <p:cNvPr id="71" name="Google Shape;71;p11"/>
+            <p:cNvSpPr/>
+            <p:nvPr/>
+          </p:nvSpPr>
+          <p:spPr>
+            <a:xfrm>
+              <a:off x="2743200" y="2386584"/>
+              <a:ext cx="6400800" cy="91500"/>
+            </a:xfrm>
+            <a:prstGeom prst="rect">
+              <a:avLst/>
+            </a:prstGeom>
+            <a:solidFill>
+              <a:schemeClr val="accent4"/>
+            </a:solidFill>
+            <a:ln>
+              <a:noFill/>
+            </a:ln>
+          </p:spPr>
+          <p:txBody>
+            <a:bodyPr anchorCtr="0" anchor="ctr" bIns="91425" lIns="91425" spcFirstLastPara="1" rIns="91425" wrap="square" tIns="91425">
+              <a:noAutofit/>
+            </a:bodyPr>
+            <a:lstStyle/>
+            <a:p>
+              <a:pPr indent="0" lvl="0" marL="0" rtl="0" algn="l">
+                <a:spcBef>
+                  <a:spcPts val="0"/>
+                </a:spcBef>
+                <a:spcAft>
+                  <a:spcPts val="0"/>
+                </a:spcAft>
+                <a:buNone/>
+              </a:pPr>
+              <a:r>
+                <a:t/>
+              </a:r>
+              <a:endParaRPr/>
+            </a:p>
+          </p:txBody>
+        </p:sp>
+      </p:grpSp>
     </p:spTree>
   </p:cSld>
   <p:clrMapOvr>
@@ -7134,12 +9611,19 @@
 </p:sldMaster>
 </file>
 
-<file path=ppt/slides/slide1.xml><?xml version="1.0" encoding="utf-8"?>
-<p:sld xmlns:a="http://schemas.openxmlformats.org/drawingml/2006/main" xmlns:r="http://schemas.openxmlformats.org/officeDocument/2006/relationships" xmlns:mc="http://schemas.openxmlformats.org/markup-compatibility/2006" xmlns:mv="urn:schemas-microsoft-com:mac:vml" xmlns:p="http://schemas.openxmlformats.org/presentationml/2006/main" xmlns:c="http://schemas.openxmlformats.org/drawingml/2006/chart" xmlns:dgm="http://schemas.openxmlformats.org/drawingml/2006/diagram" xmlns:o="urn:schemas-microsoft-com:office:office" xmlns:v="urn:schemas-microsoft-com:vml" xmlns:pvml="urn:schemas-microsoft-com:office:powerpoint" xmlns:com="http://schemas.openxmlformats.org/drawingml/2006/compatibility" xmlns:p14="http://schemas.microsoft.com/office/powerpoint/2010/main" xmlns:p15="http://schemas.microsoft.com/office/powerpoint/2012/main" xmlns:ahyp="http://schemas.microsoft.com/office/drawing/2018/hyperlinkcolor">
-  <p:cSld>
+<file path=ppt/slideMasters/slideMaster2.xml><?xml version="1.0" encoding="utf-8"?>
+<p:sldMaster xmlns:a="http://schemas.openxmlformats.org/drawingml/2006/main" xmlns:r="http://schemas.openxmlformats.org/officeDocument/2006/relationships" xmlns:mc="http://schemas.openxmlformats.org/markup-compatibility/2006" xmlns:mv="urn:schemas-microsoft-com:mac:vml" xmlns:p="http://schemas.openxmlformats.org/presentationml/2006/main" xmlns:c="http://schemas.openxmlformats.org/drawingml/2006/chart" xmlns:dgm="http://schemas.openxmlformats.org/drawingml/2006/diagram" xmlns:o="urn:schemas-microsoft-com:office:office" xmlns:v="urn:schemas-microsoft-com:vml" xmlns:pvml="urn:schemas-microsoft-com:office:powerpoint" xmlns:com="http://schemas.openxmlformats.org/drawingml/2006/compatibility" xmlns:p14="http://schemas.microsoft.com/office/powerpoint/2010/main" xmlns:p15="http://schemas.microsoft.com/office/powerpoint/2012/main" xmlns:ahyp="http://schemas.microsoft.com/office/drawing/2018/hyperlinkcolor">
+  <p:cSld name="simple-light-2">
+    <p:bg>
+      <p:bgPr>
+        <a:solidFill>
+          <a:schemeClr val="lt1"/>
+        </a:solidFill>
+      </p:bgPr>
+    </p:bg>
     <p:spTree>
       <p:nvGrpSpPr>
-        <p:cNvPr id="50" name="Shape 50"/>
+        <p:cNvPr id="47" name="Shape 47"/>
         <p:cNvGrpSpPr/>
         <p:nvPr/>
       </p:nvGrpSpPr>
@@ -7153,7 +9637,1281 @@
       </p:grpSpPr>
       <p:sp>
         <p:nvSpPr>
-          <p:cNvPr id="51" name="Google Shape;51;p8"/>
+          <p:cNvPr id="48" name="Google Shape;48;p8"/>
+          <p:cNvSpPr txBox="1"/>
+          <p:nvPr>
+            <p:ph type="title"/>
+          </p:nvPr>
+        </p:nvSpPr>
+        <p:spPr>
+          <a:xfrm>
+            <a:off x="0" y="0"/>
+            <a:ext cx="9144000" cy="685800"/>
+          </a:xfrm>
+          <a:prstGeom prst="rect">
+            <a:avLst/>
+          </a:prstGeom>
+          <a:noFill/>
+          <a:ln>
+            <a:noFill/>
+          </a:ln>
+        </p:spPr>
+        <p:txBody>
+          <a:bodyPr anchorCtr="0" anchor="ctr" bIns="0" lIns="274300" spcFirstLastPara="1" rIns="0" wrap="square" tIns="0">
+            <a:noAutofit/>
+          </a:bodyPr>
+          <a:lstStyle>
+            <a:lvl1pPr lvl="0">
+              <a:spcBef>
+                <a:spcPts val="0"/>
+              </a:spcBef>
+              <a:spcAft>
+                <a:spcPts val="0"/>
+              </a:spcAft>
+              <a:buClr>
+                <a:schemeClr val="dk1"/>
+              </a:buClr>
+              <a:buSzPts val="2400"/>
+              <a:buNone/>
+              <a:defRPr b="1" sz="2400">
+                <a:solidFill>
+                  <a:schemeClr val="dk1"/>
+                </a:solidFill>
+              </a:defRPr>
+            </a:lvl1pPr>
+            <a:lvl2pPr lvl="1">
+              <a:spcBef>
+                <a:spcPts val="0"/>
+              </a:spcBef>
+              <a:spcAft>
+                <a:spcPts val="0"/>
+              </a:spcAft>
+              <a:buClr>
+                <a:schemeClr val="dk1"/>
+              </a:buClr>
+              <a:buSzPts val="2800"/>
+              <a:buNone/>
+              <a:defRPr sz="2800">
+                <a:solidFill>
+                  <a:schemeClr val="dk1"/>
+                </a:solidFill>
+              </a:defRPr>
+            </a:lvl2pPr>
+            <a:lvl3pPr lvl="2">
+              <a:spcBef>
+                <a:spcPts val="0"/>
+              </a:spcBef>
+              <a:spcAft>
+                <a:spcPts val="0"/>
+              </a:spcAft>
+              <a:buClr>
+                <a:schemeClr val="dk1"/>
+              </a:buClr>
+              <a:buSzPts val="2800"/>
+              <a:buNone/>
+              <a:defRPr sz="2800">
+                <a:solidFill>
+                  <a:schemeClr val="dk1"/>
+                </a:solidFill>
+              </a:defRPr>
+            </a:lvl3pPr>
+            <a:lvl4pPr lvl="3">
+              <a:spcBef>
+                <a:spcPts val="0"/>
+              </a:spcBef>
+              <a:spcAft>
+                <a:spcPts val="0"/>
+              </a:spcAft>
+              <a:buClr>
+                <a:schemeClr val="dk1"/>
+              </a:buClr>
+              <a:buSzPts val="2800"/>
+              <a:buNone/>
+              <a:defRPr sz="2800">
+                <a:solidFill>
+                  <a:schemeClr val="dk1"/>
+                </a:solidFill>
+              </a:defRPr>
+            </a:lvl4pPr>
+            <a:lvl5pPr lvl="4">
+              <a:spcBef>
+                <a:spcPts val="0"/>
+              </a:spcBef>
+              <a:spcAft>
+                <a:spcPts val="0"/>
+              </a:spcAft>
+              <a:buClr>
+                <a:schemeClr val="dk1"/>
+              </a:buClr>
+              <a:buSzPts val="2800"/>
+              <a:buNone/>
+              <a:defRPr sz="2800">
+                <a:solidFill>
+                  <a:schemeClr val="dk1"/>
+                </a:solidFill>
+              </a:defRPr>
+            </a:lvl5pPr>
+            <a:lvl6pPr lvl="5">
+              <a:spcBef>
+                <a:spcPts val="0"/>
+              </a:spcBef>
+              <a:spcAft>
+                <a:spcPts val="0"/>
+              </a:spcAft>
+              <a:buClr>
+                <a:schemeClr val="dk1"/>
+              </a:buClr>
+              <a:buSzPts val="2800"/>
+              <a:buNone/>
+              <a:defRPr sz="2800">
+                <a:solidFill>
+                  <a:schemeClr val="dk1"/>
+                </a:solidFill>
+              </a:defRPr>
+            </a:lvl6pPr>
+            <a:lvl7pPr lvl="6">
+              <a:spcBef>
+                <a:spcPts val="0"/>
+              </a:spcBef>
+              <a:spcAft>
+                <a:spcPts val="0"/>
+              </a:spcAft>
+              <a:buClr>
+                <a:schemeClr val="dk1"/>
+              </a:buClr>
+              <a:buSzPts val="2800"/>
+              <a:buNone/>
+              <a:defRPr sz="2800">
+                <a:solidFill>
+                  <a:schemeClr val="dk1"/>
+                </a:solidFill>
+              </a:defRPr>
+            </a:lvl7pPr>
+            <a:lvl8pPr lvl="7">
+              <a:spcBef>
+                <a:spcPts val="0"/>
+              </a:spcBef>
+              <a:spcAft>
+                <a:spcPts val="0"/>
+              </a:spcAft>
+              <a:buClr>
+                <a:schemeClr val="dk1"/>
+              </a:buClr>
+              <a:buSzPts val="2800"/>
+              <a:buNone/>
+              <a:defRPr sz="2800">
+                <a:solidFill>
+                  <a:schemeClr val="dk1"/>
+                </a:solidFill>
+              </a:defRPr>
+            </a:lvl8pPr>
+            <a:lvl9pPr lvl="8">
+              <a:spcBef>
+                <a:spcPts val="0"/>
+              </a:spcBef>
+              <a:spcAft>
+                <a:spcPts val="0"/>
+              </a:spcAft>
+              <a:buClr>
+                <a:schemeClr val="dk1"/>
+              </a:buClr>
+              <a:buSzPts val="2800"/>
+              <a:buNone/>
+              <a:defRPr sz="2800">
+                <a:solidFill>
+                  <a:schemeClr val="dk1"/>
+                </a:solidFill>
+              </a:defRPr>
+            </a:lvl9pPr>
+          </a:lstStyle>
+          <a:p/>
+        </p:txBody>
+      </p:sp>
+      <p:sp>
+        <p:nvSpPr>
+          <p:cNvPr id="49" name="Google Shape;49;p8"/>
+          <p:cNvSpPr txBox="1"/>
+          <p:nvPr>
+            <p:ph idx="1" type="body"/>
+          </p:nvPr>
+        </p:nvSpPr>
+        <p:spPr>
+          <a:xfrm>
+            <a:off x="274320" y="914400"/>
+            <a:ext cx="8595300" cy="4114800"/>
+          </a:xfrm>
+          <a:prstGeom prst="rect">
+            <a:avLst/>
+          </a:prstGeom>
+          <a:noFill/>
+          <a:ln>
+            <a:noFill/>
+          </a:ln>
+        </p:spPr>
+        <p:txBody>
+          <a:bodyPr anchorCtr="0" anchor="t" bIns="0" lIns="0" spcFirstLastPara="1" rIns="0" wrap="square" tIns="0">
+            <a:noAutofit/>
+          </a:bodyPr>
+          <a:lstStyle>
+            <a:lvl1pPr indent="-342900" lvl="0" marL="457200">
+              <a:lnSpc>
+                <a:spcPct val="115000"/>
+              </a:lnSpc>
+              <a:spcBef>
+                <a:spcPts val="0"/>
+              </a:spcBef>
+              <a:spcAft>
+                <a:spcPts val="0"/>
+              </a:spcAft>
+              <a:buClr>
+                <a:schemeClr val="dk1"/>
+              </a:buClr>
+              <a:buSzPts val="1800"/>
+              <a:buChar char="●"/>
+              <a:defRPr sz="1800">
+                <a:solidFill>
+                  <a:schemeClr val="dk1"/>
+                </a:solidFill>
+              </a:defRPr>
+            </a:lvl1pPr>
+            <a:lvl2pPr indent="-317500" lvl="1" marL="914400">
+              <a:lnSpc>
+                <a:spcPct val="115000"/>
+              </a:lnSpc>
+              <a:spcBef>
+                <a:spcPts val="0"/>
+              </a:spcBef>
+              <a:spcAft>
+                <a:spcPts val="0"/>
+              </a:spcAft>
+              <a:buClr>
+                <a:schemeClr val="dk1"/>
+              </a:buClr>
+              <a:buSzPts val="1400"/>
+              <a:buChar char="○"/>
+              <a:defRPr>
+                <a:solidFill>
+                  <a:schemeClr val="dk1"/>
+                </a:solidFill>
+              </a:defRPr>
+            </a:lvl2pPr>
+            <a:lvl3pPr indent="-317500" lvl="2" marL="1371600">
+              <a:lnSpc>
+                <a:spcPct val="115000"/>
+              </a:lnSpc>
+              <a:spcBef>
+                <a:spcPts val="0"/>
+              </a:spcBef>
+              <a:spcAft>
+                <a:spcPts val="0"/>
+              </a:spcAft>
+              <a:buClr>
+                <a:schemeClr val="dk1"/>
+              </a:buClr>
+              <a:buSzPts val="1400"/>
+              <a:buChar char="■"/>
+              <a:defRPr>
+                <a:solidFill>
+                  <a:schemeClr val="dk1"/>
+                </a:solidFill>
+              </a:defRPr>
+            </a:lvl3pPr>
+            <a:lvl4pPr indent="-317500" lvl="3" marL="1828800">
+              <a:lnSpc>
+                <a:spcPct val="115000"/>
+              </a:lnSpc>
+              <a:spcBef>
+                <a:spcPts val="0"/>
+              </a:spcBef>
+              <a:spcAft>
+                <a:spcPts val="0"/>
+              </a:spcAft>
+              <a:buClr>
+                <a:schemeClr val="dk1"/>
+              </a:buClr>
+              <a:buSzPts val="1400"/>
+              <a:buChar char="●"/>
+              <a:defRPr>
+                <a:solidFill>
+                  <a:schemeClr val="dk1"/>
+                </a:solidFill>
+              </a:defRPr>
+            </a:lvl4pPr>
+            <a:lvl5pPr indent="-317500" lvl="4" marL="2286000">
+              <a:lnSpc>
+                <a:spcPct val="115000"/>
+              </a:lnSpc>
+              <a:spcBef>
+                <a:spcPts val="0"/>
+              </a:spcBef>
+              <a:spcAft>
+                <a:spcPts val="0"/>
+              </a:spcAft>
+              <a:buClr>
+                <a:schemeClr val="dk1"/>
+              </a:buClr>
+              <a:buSzPts val="1400"/>
+              <a:buChar char="○"/>
+              <a:defRPr>
+                <a:solidFill>
+                  <a:schemeClr val="dk1"/>
+                </a:solidFill>
+              </a:defRPr>
+            </a:lvl5pPr>
+            <a:lvl6pPr indent="-317500" lvl="5" marL="2743200">
+              <a:lnSpc>
+                <a:spcPct val="115000"/>
+              </a:lnSpc>
+              <a:spcBef>
+                <a:spcPts val="0"/>
+              </a:spcBef>
+              <a:spcAft>
+                <a:spcPts val="0"/>
+              </a:spcAft>
+              <a:buClr>
+                <a:schemeClr val="dk1"/>
+              </a:buClr>
+              <a:buSzPts val="1400"/>
+              <a:buChar char="■"/>
+              <a:defRPr>
+                <a:solidFill>
+                  <a:schemeClr val="dk1"/>
+                </a:solidFill>
+              </a:defRPr>
+            </a:lvl6pPr>
+            <a:lvl7pPr indent="-317500" lvl="6" marL="3200400">
+              <a:lnSpc>
+                <a:spcPct val="115000"/>
+              </a:lnSpc>
+              <a:spcBef>
+                <a:spcPts val="0"/>
+              </a:spcBef>
+              <a:spcAft>
+                <a:spcPts val="0"/>
+              </a:spcAft>
+              <a:buClr>
+                <a:schemeClr val="dk1"/>
+              </a:buClr>
+              <a:buSzPts val="1400"/>
+              <a:buChar char="●"/>
+              <a:defRPr>
+                <a:solidFill>
+                  <a:schemeClr val="dk1"/>
+                </a:solidFill>
+              </a:defRPr>
+            </a:lvl7pPr>
+            <a:lvl8pPr indent="-317500" lvl="7" marL="3657600">
+              <a:lnSpc>
+                <a:spcPct val="115000"/>
+              </a:lnSpc>
+              <a:spcBef>
+                <a:spcPts val="0"/>
+              </a:spcBef>
+              <a:spcAft>
+                <a:spcPts val="0"/>
+              </a:spcAft>
+              <a:buClr>
+                <a:schemeClr val="dk1"/>
+              </a:buClr>
+              <a:buSzPts val="1400"/>
+              <a:buChar char="○"/>
+              <a:defRPr>
+                <a:solidFill>
+                  <a:schemeClr val="dk1"/>
+                </a:solidFill>
+              </a:defRPr>
+            </a:lvl8pPr>
+            <a:lvl9pPr indent="-317500" lvl="8" marL="4114800">
+              <a:lnSpc>
+                <a:spcPct val="115000"/>
+              </a:lnSpc>
+              <a:spcBef>
+                <a:spcPts val="0"/>
+              </a:spcBef>
+              <a:spcAft>
+                <a:spcPts val="0"/>
+              </a:spcAft>
+              <a:buClr>
+                <a:schemeClr val="dk1"/>
+              </a:buClr>
+              <a:buSzPts val="1400"/>
+              <a:buChar char="■"/>
+              <a:defRPr>
+                <a:solidFill>
+                  <a:schemeClr val="dk1"/>
+                </a:solidFill>
+              </a:defRPr>
+            </a:lvl9pPr>
+          </a:lstStyle>
+          <a:p/>
+        </p:txBody>
+      </p:sp>
+      <p:sp>
+        <p:nvSpPr>
+          <p:cNvPr id="50" name="Google Shape;50;p8"/>
+          <p:cNvSpPr txBox="1"/>
+          <p:nvPr>
+            <p:ph idx="12" type="sldNum"/>
+          </p:nvPr>
+        </p:nvSpPr>
+        <p:spPr>
+          <a:xfrm>
+            <a:off x="7315202" y="4416550"/>
+            <a:ext cx="1828800" cy="731400"/>
+          </a:xfrm>
+          <a:prstGeom prst="rect">
+            <a:avLst/>
+          </a:prstGeom>
+          <a:noFill/>
+          <a:ln>
+            <a:noFill/>
+          </a:ln>
+        </p:spPr>
+        <p:txBody>
+          <a:bodyPr anchorCtr="0" anchor="b" bIns="91425" lIns="91425" spcFirstLastPara="1" rIns="91425" wrap="square" tIns="91425">
+            <a:noAutofit/>
+          </a:bodyPr>
+          <a:lstStyle>
+            <a:lvl1pPr lvl="0" rtl="0" algn="r">
+              <a:buNone/>
+              <a:defRPr b="1" sz="2400">
+                <a:solidFill>
+                  <a:schemeClr val="dk2"/>
+                </a:solidFill>
+              </a:defRPr>
+            </a:lvl1pPr>
+            <a:lvl2pPr lvl="1" rtl="0" algn="r">
+              <a:buNone/>
+              <a:defRPr b="1" sz="2400">
+                <a:solidFill>
+                  <a:schemeClr val="dk2"/>
+                </a:solidFill>
+              </a:defRPr>
+            </a:lvl2pPr>
+            <a:lvl3pPr lvl="2" rtl="0" algn="r">
+              <a:buNone/>
+              <a:defRPr b="1" sz="2400">
+                <a:solidFill>
+                  <a:schemeClr val="dk2"/>
+                </a:solidFill>
+              </a:defRPr>
+            </a:lvl3pPr>
+            <a:lvl4pPr lvl="3" rtl="0" algn="r">
+              <a:buNone/>
+              <a:defRPr b="1" sz="2400">
+                <a:solidFill>
+                  <a:schemeClr val="dk2"/>
+                </a:solidFill>
+              </a:defRPr>
+            </a:lvl4pPr>
+            <a:lvl5pPr lvl="4" rtl="0" algn="r">
+              <a:buNone/>
+              <a:defRPr b="1" sz="2400">
+                <a:solidFill>
+                  <a:schemeClr val="dk2"/>
+                </a:solidFill>
+              </a:defRPr>
+            </a:lvl5pPr>
+            <a:lvl6pPr lvl="5" rtl="0" algn="r">
+              <a:buNone/>
+              <a:defRPr b="1" sz="2400">
+                <a:solidFill>
+                  <a:schemeClr val="dk2"/>
+                </a:solidFill>
+              </a:defRPr>
+            </a:lvl6pPr>
+            <a:lvl7pPr lvl="6" rtl="0" algn="r">
+              <a:buNone/>
+              <a:defRPr b="1" sz="2400">
+                <a:solidFill>
+                  <a:schemeClr val="dk2"/>
+                </a:solidFill>
+              </a:defRPr>
+            </a:lvl7pPr>
+            <a:lvl8pPr lvl="7" rtl="0" algn="r">
+              <a:buNone/>
+              <a:defRPr b="1" sz="2400">
+                <a:solidFill>
+                  <a:schemeClr val="dk2"/>
+                </a:solidFill>
+              </a:defRPr>
+            </a:lvl8pPr>
+            <a:lvl9pPr lvl="8" rtl="0" algn="r">
+              <a:buNone/>
+              <a:defRPr b="1" sz="2400">
+                <a:solidFill>
+                  <a:schemeClr val="dk2"/>
+                </a:solidFill>
+              </a:defRPr>
+            </a:lvl9pPr>
+          </a:lstStyle>
+          <a:p>
+            <a:pPr indent="0" lvl="0" marL="0" rtl="0" algn="r">
+              <a:spcBef>
+                <a:spcPts val="0"/>
+              </a:spcBef>
+              <a:spcAft>
+                <a:spcPts val="0"/>
+              </a:spcAft>
+              <a:buNone/>
+            </a:pPr>
+            <a:fld id="{00000000-1234-1234-1234-123412341234}" type="slidenum">
+              <a:rPr lang="en"/>
+              <a:t>‹#›</a:t>
+            </a:fld>
+            <a:endParaRPr/>
+          </a:p>
+          <a:p>
+            <a:pPr indent="0" lvl="0" marL="0" rtl="0" algn="r">
+              <a:spcBef>
+                <a:spcPts val="0"/>
+              </a:spcBef>
+              <a:spcAft>
+                <a:spcPts val="0"/>
+              </a:spcAft>
+              <a:buNone/>
+            </a:pPr>
+            <a:r>
+              <a:rPr b="0" lang="en" sz="900" u="sng">
+                <a:solidFill>
+                  <a:schemeClr val="hlink"/>
+                </a:solidFill>
+                <a:hlinkClick r:id="rId1"/>
+              </a:rPr>
+              <a:t>https://uni1.de/amos</a:t>
+            </a:r>
+            <a:r>
+              <a:rPr b="0" lang="en" sz="900"/>
+              <a:t> </a:t>
+            </a:r>
+            <a:endParaRPr b="0" sz="900"/>
+          </a:p>
+        </p:txBody>
+      </p:sp>
+    </p:spTree>
+  </p:cSld>
+  <p:clrMap accent1="accent1" accent2="accent2" accent3="accent3" accent4="accent4" accent5="accent5" accent6="accent6" bg1="lt1" bg2="dk2" tx1="dk1" tx2="lt2" folHlink="folHlink" hlink="hlink"/>
+  <p:sldLayoutIdLst>
+    <p:sldLayoutId id="2147483654" r:id="rId2"/>
+    <p:sldLayoutId id="2147483655" r:id="rId3"/>
+    <p:sldLayoutId id="2147483656" r:id="rId4"/>
+    <p:sldLayoutId id="2147483657" r:id="rId5"/>
+    <p:sldLayoutId id="2147483658" r:id="rId6"/>
+    <p:sldLayoutId id="2147483659" r:id="rId7"/>
+  </p:sldLayoutIdLst>
+  <p:hf dt="0" ftr="0" hdr="0"/>
+  <p:txStyles>
+    <p:titleStyle>
+      <a:defPPr lvl="0" marR="0" rtl="0" algn="l">
+        <a:lnSpc>
+          <a:spcPct val="100000"/>
+        </a:lnSpc>
+        <a:spcBef>
+          <a:spcPts val="0"/>
+        </a:spcBef>
+        <a:spcAft>
+          <a:spcPts val="0"/>
+        </a:spcAft>
+      </a:defPPr>
+      <a:lvl1pPr lvl="0" marR="0" rtl="0" algn="l">
+        <a:lnSpc>
+          <a:spcPct val="100000"/>
+        </a:lnSpc>
+        <a:spcBef>
+          <a:spcPts val="0"/>
+        </a:spcBef>
+        <a:spcAft>
+          <a:spcPts val="0"/>
+        </a:spcAft>
+        <a:buClr>
+          <a:srgbClr val="000000"/>
+        </a:buClr>
+        <a:buFont typeface="Arial"/>
+        <a:defRPr b="0" i="0" sz="1400" u="none" cap="none" strike="noStrike">
+          <a:solidFill>
+            <a:srgbClr val="000000"/>
+          </a:solidFill>
+          <a:latin typeface="Arial"/>
+          <a:ea typeface="Arial"/>
+          <a:cs typeface="Arial"/>
+          <a:sym typeface="Arial"/>
+        </a:defRPr>
+      </a:lvl1pPr>
+      <a:lvl2pPr lvl="1" marR="0" rtl="0" algn="l">
+        <a:lnSpc>
+          <a:spcPct val="100000"/>
+        </a:lnSpc>
+        <a:spcBef>
+          <a:spcPts val="0"/>
+        </a:spcBef>
+        <a:spcAft>
+          <a:spcPts val="0"/>
+        </a:spcAft>
+        <a:buClr>
+          <a:srgbClr val="000000"/>
+        </a:buClr>
+        <a:buFont typeface="Arial"/>
+        <a:defRPr b="0" i="0" sz="1400" u="none" cap="none" strike="noStrike">
+          <a:solidFill>
+            <a:srgbClr val="000000"/>
+          </a:solidFill>
+          <a:latin typeface="Arial"/>
+          <a:ea typeface="Arial"/>
+          <a:cs typeface="Arial"/>
+          <a:sym typeface="Arial"/>
+        </a:defRPr>
+      </a:lvl2pPr>
+      <a:lvl3pPr lvl="2" marR="0" rtl="0" algn="l">
+        <a:lnSpc>
+          <a:spcPct val="100000"/>
+        </a:lnSpc>
+        <a:spcBef>
+          <a:spcPts val="0"/>
+        </a:spcBef>
+        <a:spcAft>
+          <a:spcPts val="0"/>
+        </a:spcAft>
+        <a:buClr>
+          <a:srgbClr val="000000"/>
+        </a:buClr>
+        <a:buFont typeface="Arial"/>
+        <a:defRPr b="0" i="0" sz="1400" u="none" cap="none" strike="noStrike">
+          <a:solidFill>
+            <a:srgbClr val="000000"/>
+          </a:solidFill>
+          <a:latin typeface="Arial"/>
+          <a:ea typeface="Arial"/>
+          <a:cs typeface="Arial"/>
+          <a:sym typeface="Arial"/>
+        </a:defRPr>
+      </a:lvl3pPr>
+      <a:lvl4pPr lvl="3" marR="0" rtl="0" algn="l">
+        <a:lnSpc>
+          <a:spcPct val="100000"/>
+        </a:lnSpc>
+        <a:spcBef>
+          <a:spcPts val="0"/>
+        </a:spcBef>
+        <a:spcAft>
+          <a:spcPts val="0"/>
+        </a:spcAft>
+        <a:buClr>
+          <a:srgbClr val="000000"/>
+        </a:buClr>
+        <a:buFont typeface="Arial"/>
+        <a:defRPr b="0" i="0" sz="1400" u="none" cap="none" strike="noStrike">
+          <a:solidFill>
+            <a:srgbClr val="000000"/>
+          </a:solidFill>
+          <a:latin typeface="Arial"/>
+          <a:ea typeface="Arial"/>
+          <a:cs typeface="Arial"/>
+          <a:sym typeface="Arial"/>
+        </a:defRPr>
+      </a:lvl4pPr>
+      <a:lvl5pPr lvl="4" marR="0" rtl="0" algn="l">
+        <a:lnSpc>
+          <a:spcPct val="100000"/>
+        </a:lnSpc>
+        <a:spcBef>
+          <a:spcPts val="0"/>
+        </a:spcBef>
+        <a:spcAft>
+          <a:spcPts val="0"/>
+        </a:spcAft>
+        <a:buClr>
+          <a:srgbClr val="000000"/>
+        </a:buClr>
+        <a:buFont typeface="Arial"/>
+        <a:defRPr b="0" i="0" sz="1400" u="none" cap="none" strike="noStrike">
+          <a:solidFill>
+            <a:srgbClr val="000000"/>
+          </a:solidFill>
+          <a:latin typeface="Arial"/>
+          <a:ea typeface="Arial"/>
+          <a:cs typeface="Arial"/>
+          <a:sym typeface="Arial"/>
+        </a:defRPr>
+      </a:lvl5pPr>
+      <a:lvl6pPr lvl="5" marR="0" rtl="0" algn="l">
+        <a:lnSpc>
+          <a:spcPct val="100000"/>
+        </a:lnSpc>
+        <a:spcBef>
+          <a:spcPts val="0"/>
+        </a:spcBef>
+        <a:spcAft>
+          <a:spcPts val="0"/>
+        </a:spcAft>
+        <a:buClr>
+          <a:srgbClr val="000000"/>
+        </a:buClr>
+        <a:buFont typeface="Arial"/>
+        <a:defRPr b="0" i="0" sz="1400" u="none" cap="none" strike="noStrike">
+          <a:solidFill>
+            <a:srgbClr val="000000"/>
+          </a:solidFill>
+          <a:latin typeface="Arial"/>
+          <a:ea typeface="Arial"/>
+          <a:cs typeface="Arial"/>
+          <a:sym typeface="Arial"/>
+        </a:defRPr>
+      </a:lvl6pPr>
+      <a:lvl7pPr lvl="6" marR="0" rtl="0" algn="l">
+        <a:lnSpc>
+          <a:spcPct val="100000"/>
+        </a:lnSpc>
+        <a:spcBef>
+          <a:spcPts val="0"/>
+        </a:spcBef>
+        <a:spcAft>
+          <a:spcPts val="0"/>
+        </a:spcAft>
+        <a:buClr>
+          <a:srgbClr val="000000"/>
+        </a:buClr>
+        <a:buFont typeface="Arial"/>
+        <a:defRPr b="0" i="0" sz="1400" u="none" cap="none" strike="noStrike">
+          <a:solidFill>
+            <a:srgbClr val="000000"/>
+          </a:solidFill>
+          <a:latin typeface="Arial"/>
+          <a:ea typeface="Arial"/>
+          <a:cs typeface="Arial"/>
+          <a:sym typeface="Arial"/>
+        </a:defRPr>
+      </a:lvl7pPr>
+      <a:lvl8pPr lvl="7" marR="0" rtl="0" algn="l">
+        <a:lnSpc>
+          <a:spcPct val="100000"/>
+        </a:lnSpc>
+        <a:spcBef>
+          <a:spcPts val="0"/>
+        </a:spcBef>
+        <a:spcAft>
+          <a:spcPts val="0"/>
+        </a:spcAft>
+        <a:buClr>
+          <a:srgbClr val="000000"/>
+        </a:buClr>
+        <a:buFont typeface="Arial"/>
+        <a:defRPr b="0" i="0" sz="1400" u="none" cap="none" strike="noStrike">
+          <a:solidFill>
+            <a:srgbClr val="000000"/>
+          </a:solidFill>
+          <a:latin typeface="Arial"/>
+          <a:ea typeface="Arial"/>
+          <a:cs typeface="Arial"/>
+          <a:sym typeface="Arial"/>
+        </a:defRPr>
+      </a:lvl8pPr>
+      <a:lvl9pPr lvl="8" marR="0" rtl="0" algn="l">
+        <a:lnSpc>
+          <a:spcPct val="100000"/>
+        </a:lnSpc>
+        <a:spcBef>
+          <a:spcPts val="0"/>
+        </a:spcBef>
+        <a:spcAft>
+          <a:spcPts val="0"/>
+        </a:spcAft>
+        <a:buClr>
+          <a:srgbClr val="000000"/>
+        </a:buClr>
+        <a:buFont typeface="Arial"/>
+        <a:defRPr b="0" i="0" sz="1400" u="none" cap="none" strike="noStrike">
+          <a:solidFill>
+            <a:srgbClr val="000000"/>
+          </a:solidFill>
+          <a:latin typeface="Arial"/>
+          <a:ea typeface="Arial"/>
+          <a:cs typeface="Arial"/>
+          <a:sym typeface="Arial"/>
+        </a:defRPr>
+      </a:lvl9pPr>
+    </p:titleStyle>
+    <p:bodyStyle>
+      <a:defPPr lvl="0" marR="0" rtl="0" algn="l">
+        <a:lnSpc>
+          <a:spcPct val="100000"/>
+        </a:lnSpc>
+        <a:spcBef>
+          <a:spcPts val="0"/>
+        </a:spcBef>
+        <a:spcAft>
+          <a:spcPts val="0"/>
+        </a:spcAft>
+      </a:defPPr>
+      <a:lvl1pPr lvl="0" marR="0" rtl="0" algn="l">
+        <a:lnSpc>
+          <a:spcPct val="100000"/>
+        </a:lnSpc>
+        <a:spcBef>
+          <a:spcPts val="0"/>
+        </a:spcBef>
+        <a:spcAft>
+          <a:spcPts val="0"/>
+        </a:spcAft>
+        <a:buClr>
+          <a:srgbClr val="000000"/>
+        </a:buClr>
+        <a:buFont typeface="Arial"/>
+        <a:defRPr b="0" i="0" sz="1400" u="none" cap="none" strike="noStrike">
+          <a:solidFill>
+            <a:srgbClr val="000000"/>
+          </a:solidFill>
+          <a:latin typeface="Arial"/>
+          <a:ea typeface="Arial"/>
+          <a:cs typeface="Arial"/>
+          <a:sym typeface="Arial"/>
+        </a:defRPr>
+      </a:lvl1pPr>
+      <a:lvl2pPr lvl="1" marR="0" rtl="0" algn="l">
+        <a:lnSpc>
+          <a:spcPct val="100000"/>
+        </a:lnSpc>
+        <a:spcBef>
+          <a:spcPts val="0"/>
+        </a:spcBef>
+        <a:spcAft>
+          <a:spcPts val="0"/>
+        </a:spcAft>
+        <a:buClr>
+          <a:srgbClr val="000000"/>
+        </a:buClr>
+        <a:buFont typeface="Arial"/>
+        <a:defRPr b="0" i="0" sz="1400" u="none" cap="none" strike="noStrike">
+          <a:solidFill>
+            <a:srgbClr val="000000"/>
+          </a:solidFill>
+          <a:latin typeface="Arial"/>
+          <a:ea typeface="Arial"/>
+          <a:cs typeface="Arial"/>
+          <a:sym typeface="Arial"/>
+        </a:defRPr>
+      </a:lvl2pPr>
+      <a:lvl3pPr lvl="2" marR="0" rtl="0" algn="l">
+        <a:lnSpc>
+          <a:spcPct val="100000"/>
+        </a:lnSpc>
+        <a:spcBef>
+          <a:spcPts val="0"/>
+        </a:spcBef>
+        <a:spcAft>
+          <a:spcPts val="0"/>
+        </a:spcAft>
+        <a:buClr>
+          <a:srgbClr val="000000"/>
+        </a:buClr>
+        <a:buFont typeface="Arial"/>
+        <a:defRPr b="0" i="0" sz="1400" u="none" cap="none" strike="noStrike">
+          <a:solidFill>
+            <a:srgbClr val="000000"/>
+          </a:solidFill>
+          <a:latin typeface="Arial"/>
+          <a:ea typeface="Arial"/>
+          <a:cs typeface="Arial"/>
+          <a:sym typeface="Arial"/>
+        </a:defRPr>
+      </a:lvl3pPr>
+      <a:lvl4pPr lvl="3" marR="0" rtl="0" algn="l">
+        <a:lnSpc>
+          <a:spcPct val="100000"/>
+        </a:lnSpc>
+        <a:spcBef>
+          <a:spcPts val="0"/>
+        </a:spcBef>
+        <a:spcAft>
+          <a:spcPts val="0"/>
+        </a:spcAft>
+        <a:buClr>
+          <a:srgbClr val="000000"/>
+        </a:buClr>
+        <a:buFont typeface="Arial"/>
+        <a:defRPr b="0" i="0" sz="1400" u="none" cap="none" strike="noStrike">
+          <a:solidFill>
+            <a:srgbClr val="000000"/>
+          </a:solidFill>
+          <a:latin typeface="Arial"/>
+          <a:ea typeface="Arial"/>
+          <a:cs typeface="Arial"/>
+          <a:sym typeface="Arial"/>
+        </a:defRPr>
+      </a:lvl4pPr>
+      <a:lvl5pPr lvl="4" marR="0" rtl="0" algn="l">
+        <a:lnSpc>
+          <a:spcPct val="100000"/>
+        </a:lnSpc>
+        <a:spcBef>
+          <a:spcPts val="0"/>
+        </a:spcBef>
+        <a:spcAft>
+          <a:spcPts val="0"/>
+        </a:spcAft>
+        <a:buClr>
+          <a:srgbClr val="000000"/>
+        </a:buClr>
+        <a:buFont typeface="Arial"/>
+        <a:defRPr b="0" i="0" sz="1400" u="none" cap="none" strike="noStrike">
+          <a:solidFill>
+            <a:srgbClr val="000000"/>
+          </a:solidFill>
+          <a:latin typeface="Arial"/>
+          <a:ea typeface="Arial"/>
+          <a:cs typeface="Arial"/>
+          <a:sym typeface="Arial"/>
+        </a:defRPr>
+      </a:lvl5pPr>
+      <a:lvl6pPr lvl="5" marR="0" rtl="0" algn="l">
+        <a:lnSpc>
+          <a:spcPct val="100000"/>
+        </a:lnSpc>
+        <a:spcBef>
+          <a:spcPts val="0"/>
+        </a:spcBef>
+        <a:spcAft>
+          <a:spcPts val="0"/>
+        </a:spcAft>
+        <a:buClr>
+          <a:srgbClr val="000000"/>
+        </a:buClr>
+        <a:buFont typeface="Arial"/>
+        <a:defRPr b="0" i="0" sz="1400" u="none" cap="none" strike="noStrike">
+          <a:solidFill>
+            <a:srgbClr val="000000"/>
+          </a:solidFill>
+          <a:latin typeface="Arial"/>
+          <a:ea typeface="Arial"/>
+          <a:cs typeface="Arial"/>
+          <a:sym typeface="Arial"/>
+        </a:defRPr>
+      </a:lvl6pPr>
+      <a:lvl7pPr lvl="6" marR="0" rtl="0" algn="l">
+        <a:lnSpc>
+          <a:spcPct val="100000"/>
+        </a:lnSpc>
+        <a:spcBef>
+          <a:spcPts val="0"/>
+        </a:spcBef>
+        <a:spcAft>
+          <a:spcPts val="0"/>
+        </a:spcAft>
+        <a:buClr>
+          <a:srgbClr val="000000"/>
+        </a:buClr>
+        <a:buFont typeface="Arial"/>
+        <a:defRPr b="0" i="0" sz="1400" u="none" cap="none" strike="noStrike">
+          <a:solidFill>
+            <a:srgbClr val="000000"/>
+          </a:solidFill>
+          <a:latin typeface="Arial"/>
+          <a:ea typeface="Arial"/>
+          <a:cs typeface="Arial"/>
+          <a:sym typeface="Arial"/>
+        </a:defRPr>
+      </a:lvl7pPr>
+      <a:lvl8pPr lvl="7" marR="0" rtl="0" algn="l">
+        <a:lnSpc>
+          <a:spcPct val="100000"/>
+        </a:lnSpc>
+        <a:spcBef>
+          <a:spcPts val="0"/>
+        </a:spcBef>
+        <a:spcAft>
+          <a:spcPts val="0"/>
+        </a:spcAft>
+        <a:buClr>
+          <a:srgbClr val="000000"/>
+        </a:buClr>
+        <a:buFont typeface="Arial"/>
+        <a:defRPr b="0" i="0" sz="1400" u="none" cap="none" strike="noStrike">
+          <a:solidFill>
+            <a:srgbClr val="000000"/>
+          </a:solidFill>
+          <a:latin typeface="Arial"/>
+          <a:ea typeface="Arial"/>
+          <a:cs typeface="Arial"/>
+          <a:sym typeface="Arial"/>
+        </a:defRPr>
+      </a:lvl8pPr>
+      <a:lvl9pPr lvl="8" marR="0" rtl="0" algn="l">
+        <a:lnSpc>
+          <a:spcPct val="100000"/>
+        </a:lnSpc>
+        <a:spcBef>
+          <a:spcPts val="0"/>
+        </a:spcBef>
+        <a:spcAft>
+          <a:spcPts val="0"/>
+        </a:spcAft>
+        <a:buClr>
+          <a:srgbClr val="000000"/>
+        </a:buClr>
+        <a:buFont typeface="Arial"/>
+        <a:defRPr b="0" i="0" sz="1400" u="none" cap="none" strike="noStrike">
+          <a:solidFill>
+            <a:srgbClr val="000000"/>
+          </a:solidFill>
+          <a:latin typeface="Arial"/>
+          <a:ea typeface="Arial"/>
+          <a:cs typeface="Arial"/>
+          <a:sym typeface="Arial"/>
+        </a:defRPr>
+      </a:lvl9pPr>
+    </p:bodyStyle>
+    <p:otherStyle>
+      <a:defPPr lvl="0" marR="0" rtl="0" algn="l">
+        <a:lnSpc>
+          <a:spcPct val="100000"/>
+        </a:lnSpc>
+        <a:spcBef>
+          <a:spcPts val="0"/>
+        </a:spcBef>
+        <a:spcAft>
+          <a:spcPts val="0"/>
+        </a:spcAft>
+      </a:defPPr>
+      <a:lvl1pPr lvl="0" marR="0" rtl="0" algn="l">
+        <a:lnSpc>
+          <a:spcPct val="100000"/>
+        </a:lnSpc>
+        <a:spcBef>
+          <a:spcPts val="0"/>
+        </a:spcBef>
+        <a:spcAft>
+          <a:spcPts val="0"/>
+        </a:spcAft>
+        <a:buClr>
+          <a:srgbClr val="000000"/>
+        </a:buClr>
+        <a:buFont typeface="Arial"/>
+        <a:defRPr b="0" i="0" sz="1400" u="none" cap="none" strike="noStrike">
+          <a:solidFill>
+            <a:srgbClr val="000000"/>
+          </a:solidFill>
+          <a:latin typeface="Arial"/>
+          <a:ea typeface="Arial"/>
+          <a:cs typeface="Arial"/>
+          <a:sym typeface="Arial"/>
+        </a:defRPr>
+      </a:lvl1pPr>
+      <a:lvl2pPr lvl="1" marR="0" rtl="0" algn="l">
+        <a:lnSpc>
+          <a:spcPct val="100000"/>
+        </a:lnSpc>
+        <a:spcBef>
+          <a:spcPts val="0"/>
+        </a:spcBef>
+        <a:spcAft>
+          <a:spcPts val="0"/>
+        </a:spcAft>
+        <a:buClr>
+          <a:srgbClr val="000000"/>
+        </a:buClr>
+        <a:buFont typeface="Arial"/>
+        <a:defRPr b="0" i="0" sz="1400" u="none" cap="none" strike="noStrike">
+          <a:solidFill>
+            <a:srgbClr val="000000"/>
+          </a:solidFill>
+          <a:latin typeface="Arial"/>
+          <a:ea typeface="Arial"/>
+          <a:cs typeface="Arial"/>
+          <a:sym typeface="Arial"/>
+        </a:defRPr>
+      </a:lvl2pPr>
+      <a:lvl3pPr lvl="2" marR="0" rtl="0" algn="l">
+        <a:lnSpc>
+          <a:spcPct val="100000"/>
+        </a:lnSpc>
+        <a:spcBef>
+          <a:spcPts val="0"/>
+        </a:spcBef>
+        <a:spcAft>
+          <a:spcPts val="0"/>
+        </a:spcAft>
+        <a:buClr>
+          <a:srgbClr val="000000"/>
+        </a:buClr>
+        <a:buFont typeface="Arial"/>
+        <a:defRPr b="0" i="0" sz="1400" u="none" cap="none" strike="noStrike">
+          <a:solidFill>
+            <a:srgbClr val="000000"/>
+          </a:solidFill>
+          <a:latin typeface="Arial"/>
+          <a:ea typeface="Arial"/>
+          <a:cs typeface="Arial"/>
+          <a:sym typeface="Arial"/>
+        </a:defRPr>
+      </a:lvl3pPr>
+      <a:lvl4pPr lvl="3" marR="0" rtl="0" algn="l">
+        <a:lnSpc>
+          <a:spcPct val="100000"/>
+        </a:lnSpc>
+        <a:spcBef>
+          <a:spcPts val="0"/>
+        </a:spcBef>
+        <a:spcAft>
+          <a:spcPts val="0"/>
+        </a:spcAft>
+        <a:buClr>
+          <a:srgbClr val="000000"/>
+        </a:buClr>
+        <a:buFont typeface="Arial"/>
+        <a:defRPr b="0" i="0" sz="1400" u="none" cap="none" strike="noStrike">
+          <a:solidFill>
+            <a:srgbClr val="000000"/>
+          </a:solidFill>
+          <a:latin typeface="Arial"/>
+          <a:ea typeface="Arial"/>
+          <a:cs typeface="Arial"/>
+          <a:sym typeface="Arial"/>
+        </a:defRPr>
+      </a:lvl4pPr>
+      <a:lvl5pPr lvl="4" marR="0" rtl="0" algn="l">
+        <a:lnSpc>
+          <a:spcPct val="100000"/>
+        </a:lnSpc>
+        <a:spcBef>
+          <a:spcPts val="0"/>
+        </a:spcBef>
+        <a:spcAft>
+          <a:spcPts val="0"/>
+        </a:spcAft>
+        <a:buClr>
+          <a:srgbClr val="000000"/>
+        </a:buClr>
+        <a:buFont typeface="Arial"/>
+        <a:defRPr b="0" i="0" sz="1400" u="none" cap="none" strike="noStrike">
+          <a:solidFill>
+            <a:srgbClr val="000000"/>
+          </a:solidFill>
+          <a:latin typeface="Arial"/>
+          <a:ea typeface="Arial"/>
+          <a:cs typeface="Arial"/>
+          <a:sym typeface="Arial"/>
+        </a:defRPr>
+      </a:lvl5pPr>
+      <a:lvl6pPr lvl="5" marR="0" rtl="0" algn="l">
+        <a:lnSpc>
+          <a:spcPct val="100000"/>
+        </a:lnSpc>
+        <a:spcBef>
+          <a:spcPts val="0"/>
+        </a:spcBef>
+        <a:spcAft>
+          <a:spcPts val="0"/>
+        </a:spcAft>
+        <a:buClr>
+          <a:srgbClr val="000000"/>
+        </a:buClr>
+        <a:buFont typeface="Arial"/>
+        <a:defRPr b="0" i="0" sz="1400" u="none" cap="none" strike="noStrike">
+          <a:solidFill>
+            <a:srgbClr val="000000"/>
+          </a:solidFill>
+          <a:latin typeface="Arial"/>
+          <a:ea typeface="Arial"/>
+          <a:cs typeface="Arial"/>
+          <a:sym typeface="Arial"/>
+        </a:defRPr>
+      </a:lvl6pPr>
+      <a:lvl7pPr lvl="6" marR="0" rtl="0" algn="l">
+        <a:lnSpc>
+          <a:spcPct val="100000"/>
+        </a:lnSpc>
+        <a:spcBef>
+          <a:spcPts val="0"/>
+        </a:spcBef>
+        <a:spcAft>
+          <a:spcPts val="0"/>
+        </a:spcAft>
+        <a:buClr>
+          <a:srgbClr val="000000"/>
+        </a:buClr>
+        <a:buFont typeface="Arial"/>
+        <a:defRPr b="0" i="0" sz="1400" u="none" cap="none" strike="noStrike">
+          <a:solidFill>
+            <a:srgbClr val="000000"/>
+          </a:solidFill>
+          <a:latin typeface="Arial"/>
+          <a:ea typeface="Arial"/>
+          <a:cs typeface="Arial"/>
+          <a:sym typeface="Arial"/>
+        </a:defRPr>
+      </a:lvl7pPr>
+      <a:lvl8pPr lvl="7" marR="0" rtl="0" algn="l">
+        <a:lnSpc>
+          <a:spcPct val="100000"/>
+        </a:lnSpc>
+        <a:spcBef>
+          <a:spcPts val="0"/>
+        </a:spcBef>
+        <a:spcAft>
+          <a:spcPts val="0"/>
+        </a:spcAft>
+        <a:buClr>
+          <a:srgbClr val="000000"/>
+        </a:buClr>
+        <a:buFont typeface="Arial"/>
+        <a:defRPr b="0" i="0" sz="1400" u="none" cap="none" strike="noStrike">
+          <a:solidFill>
+            <a:srgbClr val="000000"/>
+          </a:solidFill>
+          <a:latin typeface="Arial"/>
+          <a:ea typeface="Arial"/>
+          <a:cs typeface="Arial"/>
+          <a:sym typeface="Arial"/>
+        </a:defRPr>
+      </a:lvl8pPr>
+      <a:lvl9pPr lvl="8" marR="0" rtl="0" algn="l">
+        <a:lnSpc>
+          <a:spcPct val="100000"/>
+        </a:lnSpc>
+        <a:spcBef>
+          <a:spcPts val="0"/>
+        </a:spcBef>
+        <a:spcAft>
+          <a:spcPts val="0"/>
+        </a:spcAft>
+        <a:buClr>
+          <a:srgbClr val="000000"/>
+        </a:buClr>
+        <a:buFont typeface="Arial"/>
+        <a:defRPr b="0" i="0" sz="1400" u="none" cap="none" strike="noStrike">
+          <a:solidFill>
+            <a:srgbClr val="000000"/>
+          </a:solidFill>
+          <a:latin typeface="Arial"/>
+          <a:ea typeface="Arial"/>
+          <a:cs typeface="Arial"/>
+          <a:sym typeface="Arial"/>
+        </a:defRPr>
+      </a:lvl9pPr>
+    </p:otherStyle>
+  </p:txStyles>
+</p:sldMaster>
+</file>
+
+<file path=ppt/slides/slide1.xml><?xml version="1.0" encoding="utf-8"?>
+<p:sld xmlns:a="http://schemas.openxmlformats.org/drawingml/2006/main" xmlns:r="http://schemas.openxmlformats.org/officeDocument/2006/relationships" xmlns:mc="http://schemas.openxmlformats.org/markup-compatibility/2006" xmlns:mv="urn:schemas-microsoft-com:mac:vml" xmlns:p="http://schemas.openxmlformats.org/presentationml/2006/main" xmlns:c="http://schemas.openxmlformats.org/drawingml/2006/chart" xmlns:dgm="http://schemas.openxmlformats.org/drawingml/2006/diagram" xmlns:o="urn:schemas-microsoft-com:office:office" xmlns:v="urn:schemas-microsoft-com:vml" xmlns:pvml="urn:schemas-microsoft-com:office:powerpoint" xmlns:com="http://schemas.openxmlformats.org/drawingml/2006/compatibility" xmlns:p14="http://schemas.microsoft.com/office/powerpoint/2010/main" xmlns:p15="http://schemas.microsoft.com/office/powerpoint/2012/main" xmlns:ahyp="http://schemas.microsoft.com/office/drawing/2018/hyperlinkcolor">
+  <p:cSld>
+    <p:spTree>
+      <p:nvGrpSpPr>
+        <p:cNvPr id="92" name="Shape 92"/>
+        <p:cNvGrpSpPr/>
+        <p:nvPr/>
+      </p:nvGrpSpPr>
+      <p:grpSpPr>
+        <a:xfrm>
+          <a:off x="0" y="0"/>
+          <a:ext cx="0" cy="0"/>
+          <a:chOff x="0" y="0"/>
+          <a:chExt cx="0" cy="0"/>
+        </a:xfrm>
+      </p:grpSpPr>
+      <p:sp>
+        <p:nvSpPr>
+          <p:cNvPr id="93" name="Google Shape;93;p15"/>
           <p:cNvSpPr txBox="1"/>
           <p:nvPr>
             <p:ph type="ctrTitle"/>
@@ -7193,7 +10951,7 @@
       </p:sp>
       <p:sp>
         <p:nvSpPr>
-          <p:cNvPr id="52" name="Google Shape;52;p8"/>
+          <p:cNvPr id="94" name="Google Shape;94;p15"/>
           <p:cNvSpPr txBox="1"/>
           <p:nvPr>
             <p:ph idx="1" type="subTitle"/>
@@ -7300,7 +11058,7 @@
   <p:cSld>
     <p:spTree>
       <p:nvGrpSpPr>
-        <p:cNvPr id="110" name="Shape 110"/>
+        <p:cNvPr id="152" name="Shape 152"/>
         <p:cNvGrpSpPr/>
         <p:nvPr/>
       </p:nvGrpSpPr>
@@ -7314,7 +11072,7 @@
       </p:grpSpPr>
       <p:sp>
         <p:nvSpPr>
-          <p:cNvPr id="111" name="Google Shape;111;p17"/>
+          <p:cNvPr id="153" name="Google Shape;153;p24"/>
           <p:cNvSpPr txBox="1"/>
           <p:nvPr>
             <p:ph type="title"/>
@@ -7354,7 +11112,7 @@
       </p:sp>
       <p:sp>
         <p:nvSpPr>
-          <p:cNvPr id="112" name="Google Shape;112;p17"/>
+          <p:cNvPr id="154" name="Google Shape;154;p24"/>
           <p:cNvSpPr txBox="1"/>
           <p:nvPr>
             <p:ph idx="1" type="body"/>
@@ -7441,7 +11199,7 @@
       </p:sp>
       <p:sp>
         <p:nvSpPr>
-          <p:cNvPr id="113" name="Google Shape;113;p17"/>
+          <p:cNvPr id="155" name="Google Shape;155;p24"/>
           <p:cNvSpPr txBox="1"/>
           <p:nvPr>
             <p:ph idx="12" type="sldNum"/>
@@ -7525,7 +11283,7 @@
   <p:cSld>
     <p:spTree>
       <p:nvGrpSpPr>
-        <p:cNvPr id="117" name="Shape 117"/>
+        <p:cNvPr id="159" name="Shape 159"/>
         <p:cNvGrpSpPr/>
         <p:nvPr/>
       </p:nvGrpSpPr>
@@ -7539,7 +11297,7 @@
       </p:grpSpPr>
       <p:sp>
         <p:nvSpPr>
-          <p:cNvPr id="118" name="Google Shape;118;p18"/>
+          <p:cNvPr id="160" name="Google Shape;160;p25"/>
           <p:cNvSpPr txBox="1"/>
           <p:nvPr>
             <p:ph type="title"/>
@@ -7579,7 +11337,7 @@
       </p:sp>
       <p:sp>
         <p:nvSpPr>
-          <p:cNvPr id="119" name="Google Shape;119;p18"/>
+          <p:cNvPr id="161" name="Google Shape;161;p25"/>
           <p:cNvSpPr txBox="1"/>
           <p:nvPr>
             <p:ph idx="12" type="sldNum"/>
@@ -7652,7 +11410,7 @@
       </p:sp>
       <p:graphicFrame>
         <p:nvGraphicFramePr>
-          <p:cNvPr id="120" name="Google Shape;120;p18"/>
+          <p:cNvPr id="162" name="Google Shape;162;p25"/>
           <p:cNvGraphicFramePr/>
           <p:nvPr/>
         </p:nvGraphicFramePr>
@@ -7665,7 +11423,7 @@
             <a:tbl>
               <a:tblPr>
                 <a:noFill/>
-                <a:tableStyleId>{938044B6-21D4-4825-B8CD-BC9CF5129A88}</a:tableStyleId>
+                <a:tableStyleId>{1E88BBD0-FCD0-48EA-B842-327650F5B613}</a:tableStyleId>
               </a:tblPr>
               <a:tblGrid>
                 <a:gridCol w="1315250"/>
@@ -8464,7 +12222,7 @@
   <p:cSld>
     <p:spTree>
       <p:nvGrpSpPr>
-        <p:cNvPr id="124" name="Shape 124"/>
+        <p:cNvPr id="166" name="Shape 166"/>
         <p:cNvGrpSpPr/>
         <p:nvPr/>
       </p:nvGrpSpPr>
@@ -8478,7 +12236,7 @@
       </p:grpSpPr>
       <p:sp>
         <p:nvSpPr>
-          <p:cNvPr id="125" name="Google Shape;125;p19"/>
+          <p:cNvPr id="167" name="Google Shape;167;p26"/>
           <p:cNvSpPr txBox="1"/>
           <p:nvPr>
             <p:ph type="title"/>
@@ -8518,7 +12276,7 @@
       </p:sp>
       <p:sp>
         <p:nvSpPr>
-          <p:cNvPr id="126" name="Google Shape;126;p19"/>
+          <p:cNvPr id="168" name="Google Shape;168;p26"/>
           <p:cNvSpPr txBox="1"/>
           <p:nvPr>
             <p:ph idx="12" type="sldNum"/>
@@ -8592,7 +12350,7 @@
       </p:sp>
       <p:sp>
         <p:nvSpPr>
-          <p:cNvPr id="127" name="Google Shape;127;p19"/>
+          <p:cNvPr id="169" name="Google Shape;169;p26"/>
           <p:cNvSpPr txBox="1"/>
           <p:nvPr>
             <p:ph idx="1" type="body"/>
@@ -8846,7 +12604,7 @@
       </p:sp>
       <p:sp>
         <p:nvSpPr>
-          <p:cNvPr id="128" name="Google Shape;128;p19"/>
+          <p:cNvPr id="170" name="Google Shape;170;p26"/>
           <p:cNvSpPr txBox="1"/>
           <p:nvPr>
             <p:ph idx="2" type="body"/>
@@ -8946,7 +12704,7 @@
   <p:cSld>
     <p:spTree>
       <p:nvGrpSpPr>
-        <p:cNvPr id="132" name="Shape 132"/>
+        <p:cNvPr id="174" name="Shape 174"/>
         <p:cNvGrpSpPr/>
         <p:nvPr/>
       </p:nvGrpSpPr>
@@ -8960,7 +12718,7 @@
       </p:grpSpPr>
       <p:sp>
         <p:nvSpPr>
-          <p:cNvPr id="133" name="Google Shape;133;p20"/>
+          <p:cNvPr id="175" name="Google Shape;175;p27"/>
           <p:cNvSpPr txBox="1"/>
           <p:nvPr>
             <p:ph type="title"/>
@@ -9000,7 +12758,7 @@
       </p:sp>
       <p:sp>
         <p:nvSpPr>
-          <p:cNvPr id="134" name="Google Shape;134;p20"/>
+          <p:cNvPr id="176" name="Google Shape;176;p27"/>
           <p:cNvSpPr txBox="1"/>
           <p:nvPr>
             <p:ph idx="1" type="body"/>
@@ -9171,7 +12929,7 @@
       </p:sp>
       <p:sp>
         <p:nvSpPr>
-          <p:cNvPr id="135" name="Google Shape;135;p20"/>
+          <p:cNvPr id="177" name="Google Shape;177;p27"/>
           <p:cNvSpPr txBox="1"/>
           <p:nvPr>
             <p:ph idx="12" type="sldNum"/>
@@ -9255,7 +13013,7 @@
   <p:cSld>
     <p:spTree>
       <p:nvGrpSpPr>
-        <p:cNvPr id="139" name="Shape 139"/>
+        <p:cNvPr id="181" name="Shape 181"/>
         <p:cNvGrpSpPr/>
         <p:nvPr/>
       </p:nvGrpSpPr>
@@ -9269,7 +13027,7 @@
       </p:grpSpPr>
       <p:sp>
         <p:nvSpPr>
-          <p:cNvPr id="140" name="Google Shape;140;p21"/>
+          <p:cNvPr id="182" name="Google Shape;182;p28"/>
           <p:cNvSpPr txBox="1"/>
           <p:nvPr>
             <p:ph type="title"/>
@@ -9309,7 +13067,7 @@
       </p:sp>
       <p:sp>
         <p:nvSpPr>
-          <p:cNvPr id="141" name="Google Shape;141;p21"/>
+          <p:cNvPr id="183" name="Google Shape;183;p28"/>
           <p:cNvSpPr txBox="1"/>
           <p:nvPr>
             <p:ph idx="1" type="body"/>
@@ -9410,7 +13168,7 @@
       </p:sp>
       <p:sp>
         <p:nvSpPr>
-          <p:cNvPr id="142" name="Google Shape;142;p21"/>
+          <p:cNvPr id="184" name="Google Shape;184;p28"/>
           <p:cNvSpPr txBox="1"/>
           <p:nvPr>
             <p:ph idx="12" type="sldNum"/>
@@ -9494,7 +13252,7 @@
   <p:cSld>
     <p:spTree>
       <p:nvGrpSpPr>
-        <p:cNvPr id="146" name="Shape 146"/>
+        <p:cNvPr id="188" name="Shape 188"/>
         <p:cNvGrpSpPr/>
         <p:nvPr/>
       </p:nvGrpSpPr>
@@ -9508,7 +13266,7 @@
       </p:grpSpPr>
       <p:sp>
         <p:nvSpPr>
-          <p:cNvPr id="147" name="Google Shape;147;p22"/>
+          <p:cNvPr id="189" name="Google Shape;189;p29"/>
           <p:cNvSpPr txBox="1"/>
           <p:nvPr>
             <p:ph type="title"/>
@@ -9548,7 +13306,7 @@
       </p:sp>
       <p:sp>
         <p:nvSpPr>
-          <p:cNvPr id="148" name="Google Shape;148;p22"/>
+          <p:cNvPr id="190" name="Google Shape;190;p29"/>
           <p:cNvSpPr txBox="1"/>
           <p:nvPr>
             <p:ph idx="1" type="body"/>
@@ -9597,14 +13355,31 @@
             </a:pPr>
             <a:r>
               <a:rPr lang="en"/>
-              <a:t>One explains what is going on (talks to people)</a:t>
+              <a:t>Narrator</a:t>
             </a:r>
             <a:endParaRPr/>
           </a:p>
           <a:p>
+            <a:pPr indent="-317500" lvl="1" marL="914400" rtl="0" algn="l">
+              <a:spcBef>
+                <a:spcPts val="0"/>
+              </a:spcBef>
+              <a:spcAft>
+                <a:spcPts val="0"/>
+              </a:spcAft>
+              <a:buSzPts val="1400"/>
+              <a:buChar char="○"/>
+            </a:pPr>
+            <a:r>
+              <a:rPr lang="en"/>
+              <a:t>Explains what is going on (talks to people)</a:t>
+            </a:r>
+            <a:endParaRPr/>
+          </a:p>
+          <a:p>
             <a:pPr indent="-342900" lvl="0" marL="457200" rtl="0" algn="l">
               <a:spcBef>
-                <a:spcPts val="0"/>
+                <a:spcPts val="1000"/>
               </a:spcBef>
               <a:spcAft>
                 <a:spcPts val="0"/>
@@ -9614,7 +13389,24 @@
             </a:pPr>
             <a:r>
               <a:rPr lang="en"/>
-              <a:t>One demos the software in line with story</a:t>
+              <a:t>Demonstrator</a:t>
+            </a:r>
+            <a:endParaRPr/>
+          </a:p>
+          <a:p>
+            <a:pPr indent="-317500" lvl="1" marL="914400" rtl="0" algn="l">
+              <a:spcBef>
+                <a:spcPts val="0"/>
+              </a:spcBef>
+              <a:spcAft>
+                <a:spcPts val="0"/>
+              </a:spcAft>
+              <a:buSzPts val="1400"/>
+              <a:buChar char="○"/>
+            </a:pPr>
+            <a:r>
+              <a:rPr lang="en"/>
+              <a:t>Shows the software in line with story</a:t>
             </a:r>
             <a:endParaRPr/>
           </a:p>
@@ -9622,7 +13414,7 @@
       </p:sp>
       <p:sp>
         <p:nvSpPr>
-          <p:cNvPr id="149" name="Google Shape;149;p22"/>
+          <p:cNvPr id="191" name="Google Shape;191;p29"/>
           <p:cNvSpPr txBox="1"/>
           <p:nvPr>
             <p:ph idx="12" type="sldNum"/>
@@ -9706,7 +13498,7 @@
   <p:cSld>
     <p:spTree>
       <p:nvGrpSpPr>
-        <p:cNvPr id="153" name="Shape 153"/>
+        <p:cNvPr id="195" name="Shape 195"/>
         <p:cNvGrpSpPr/>
         <p:nvPr/>
       </p:nvGrpSpPr>
@@ -9720,7 +13512,7 @@
       </p:grpSpPr>
       <p:sp>
         <p:nvSpPr>
-          <p:cNvPr id="154" name="Google Shape;154;p23"/>
+          <p:cNvPr id="196" name="Google Shape;196;p30"/>
           <p:cNvSpPr txBox="1"/>
           <p:nvPr>
             <p:ph type="title"/>
@@ -9771,7 +13563,7 @@
   <p:cSld>
     <p:spTree>
       <p:nvGrpSpPr>
-        <p:cNvPr id="158" name="Shape 158"/>
+        <p:cNvPr id="200" name="Shape 200"/>
         <p:cNvGrpSpPr/>
         <p:nvPr/>
       </p:nvGrpSpPr>
@@ -9785,7 +13577,7 @@
       </p:grpSpPr>
       <p:sp>
         <p:nvSpPr>
-          <p:cNvPr id="159" name="Google Shape;159;p24"/>
+          <p:cNvPr id="201" name="Google Shape;201;p31"/>
           <p:cNvSpPr txBox="1"/>
           <p:nvPr>
             <p:ph type="title"/>
@@ -9829,7 +13621,7 @@
       </p:sp>
       <p:sp>
         <p:nvSpPr>
-          <p:cNvPr id="160" name="Google Shape;160;p24"/>
+          <p:cNvPr id="202" name="Google Shape;202;p31"/>
           <p:cNvSpPr txBox="1"/>
           <p:nvPr>
             <p:ph idx="1" type="body"/>
@@ -9869,7 +13661,7 @@
       </p:sp>
       <p:sp>
         <p:nvSpPr>
-          <p:cNvPr id="161" name="Google Shape;161;p24"/>
+          <p:cNvPr id="203" name="Google Shape;203;p31"/>
           <p:cNvSpPr txBox="1"/>
           <p:nvPr>
             <p:ph idx="12" type="sldNum"/>
@@ -9953,7 +13745,7 @@
   <p:cSld>
     <p:spTree>
       <p:nvGrpSpPr>
-        <p:cNvPr id="165" name="Shape 165"/>
+        <p:cNvPr id="207" name="Shape 207"/>
         <p:cNvGrpSpPr/>
         <p:nvPr/>
       </p:nvGrpSpPr>
@@ -9967,7 +13759,7 @@
       </p:grpSpPr>
       <p:sp>
         <p:nvSpPr>
-          <p:cNvPr id="166" name="Google Shape;166;p25"/>
+          <p:cNvPr id="208" name="Google Shape;208;p32"/>
           <p:cNvSpPr txBox="1"/>
           <p:nvPr>
             <p:ph type="title"/>
@@ -10007,7 +13799,7 @@
       </p:sp>
       <p:sp>
         <p:nvSpPr>
-          <p:cNvPr id="167" name="Google Shape;167;p25"/>
+          <p:cNvPr id="209" name="Google Shape;209;p32"/>
           <p:cNvSpPr txBox="1"/>
           <p:nvPr>
             <p:ph idx="1" type="body"/>
@@ -10047,7 +13839,7 @@
       </p:sp>
       <p:sp>
         <p:nvSpPr>
-          <p:cNvPr id="168" name="Google Shape;168;p25"/>
+          <p:cNvPr id="210" name="Google Shape;210;p32"/>
           <p:cNvSpPr txBox="1"/>
           <p:nvPr>
             <p:ph idx="12" type="sldNum"/>
@@ -10131,7 +13923,7 @@
   <p:cSld>
     <p:spTree>
       <p:nvGrpSpPr>
-        <p:cNvPr id="172" name="Shape 172"/>
+        <p:cNvPr id="214" name="Shape 214"/>
         <p:cNvGrpSpPr/>
         <p:nvPr/>
       </p:nvGrpSpPr>
@@ -10145,7 +13937,7 @@
       </p:grpSpPr>
       <p:sp>
         <p:nvSpPr>
-          <p:cNvPr id="173" name="Google Shape;173;p26"/>
+          <p:cNvPr id="215" name="Google Shape;215;p33"/>
           <p:cNvSpPr txBox="1"/>
           <p:nvPr>
             <p:ph type="title"/>
@@ -10185,7 +13977,7 @@
       </p:sp>
       <p:sp>
         <p:nvSpPr>
-          <p:cNvPr id="174" name="Google Shape;174;p26"/>
+          <p:cNvPr id="216" name="Google Shape;216;p33"/>
           <p:cNvSpPr txBox="1"/>
           <p:nvPr>
             <p:ph idx="1" type="body"/>
@@ -10225,7 +14017,7 @@
       </p:sp>
       <p:sp>
         <p:nvSpPr>
-          <p:cNvPr id="175" name="Google Shape;175;p26"/>
+          <p:cNvPr id="217" name="Google Shape;217;p33"/>
           <p:cNvSpPr txBox="1"/>
           <p:nvPr>
             <p:ph idx="12" type="sldNum"/>
@@ -10309,7 +14101,7 @@
   <p:cSld>
     <p:spTree>
       <p:nvGrpSpPr>
-        <p:cNvPr id="56" name="Shape 56"/>
+        <p:cNvPr id="98" name="Shape 98"/>
         <p:cNvGrpSpPr/>
         <p:nvPr/>
       </p:nvGrpSpPr>
@@ -10323,7 +14115,7 @@
       </p:grpSpPr>
       <p:sp>
         <p:nvSpPr>
-          <p:cNvPr id="57" name="Google Shape;57;p9"/>
+          <p:cNvPr id="99" name="Google Shape;99;p16"/>
           <p:cNvSpPr txBox="1"/>
           <p:nvPr>
             <p:ph type="title"/>
@@ -10363,7 +14155,7 @@
       </p:sp>
       <p:sp>
         <p:nvSpPr>
-          <p:cNvPr id="58" name="Google Shape;58;p9"/>
+          <p:cNvPr id="100" name="Google Shape;100;p16"/>
           <p:cNvSpPr txBox="1"/>
           <p:nvPr>
             <p:ph idx="1" type="body"/>
@@ -10589,7 +14381,7 @@
       </p:sp>
       <p:sp>
         <p:nvSpPr>
-          <p:cNvPr id="59" name="Google Shape;59;p9"/>
+          <p:cNvPr id="101" name="Google Shape;101;p16"/>
           <p:cNvSpPr txBox="1"/>
           <p:nvPr>
             <p:ph idx="12" type="sldNum"/>
@@ -10673,7 +14465,7 @@
   <p:cSld>
     <p:spTree>
       <p:nvGrpSpPr>
-        <p:cNvPr id="179" name="Shape 179"/>
+        <p:cNvPr id="221" name="Shape 221"/>
         <p:cNvGrpSpPr/>
         <p:nvPr/>
       </p:nvGrpSpPr>
@@ -10687,7 +14479,7 @@
       </p:grpSpPr>
       <p:sp>
         <p:nvSpPr>
-          <p:cNvPr id="180" name="Google Shape;180;p27"/>
+          <p:cNvPr id="222" name="Google Shape;222;p34"/>
           <p:cNvSpPr txBox="1"/>
           <p:nvPr>
             <p:ph type="title"/>
@@ -10738,7 +14530,7 @@
   <p:cSld>
     <p:spTree>
       <p:nvGrpSpPr>
-        <p:cNvPr id="184" name="Shape 184"/>
+        <p:cNvPr id="226" name="Shape 226"/>
         <p:cNvGrpSpPr/>
         <p:nvPr/>
       </p:nvGrpSpPr>
@@ -10752,7 +14544,7 @@
       </p:grpSpPr>
       <p:sp>
         <p:nvSpPr>
-          <p:cNvPr id="185" name="Google Shape;185;p28"/>
+          <p:cNvPr id="227" name="Google Shape;227;p35"/>
           <p:cNvSpPr txBox="1"/>
           <p:nvPr>
             <p:ph type="title"/>
@@ -10792,7 +14584,7 @@
       </p:sp>
       <p:sp>
         <p:nvSpPr>
-          <p:cNvPr id="186" name="Google Shape;186;p28"/>
+          <p:cNvPr id="228" name="Google Shape;228;p35"/>
           <p:cNvSpPr txBox="1"/>
           <p:nvPr>
             <p:ph idx="1" type="body"/>
@@ -10849,7 +14641,7 @@
       </p:sp>
       <p:sp>
         <p:nvSpPr>
-          <p:cNvPr id="187" name="Google Shape;187;p28"/>
+          <p:cNvPr id="229" name="Google Shape;229;p35"/>
           <p:cNvSpPr txBox="1"/>
           <p:nvPr>
             <p:ph idx="12" type="sldNum"/>
@@ -10933,7 +14725,7 @@
   <p:cSld>
     <p:spTree>
       <p:nvGrpSpPr>
-        <p:cNvPr id="191" name="Shape 191"/>
+        <p:cNvPr id="233" name="Shape 233"/>
         <p:cNvGrpSpPr/>
         <p:nvPr/>
       </p:nvGrpSpPr>
@@ -10947,7 +14739,7 @@
       </p:grpSpPr>
       <p:sp>
         <p:nvSpPr>
-          <p:cNvPr id="192" name="Google Shape;192;p29"/>
+          <p:cNvPr id="234" name="Google Shape;234;p36"/>
           <p:cNvSpPr txBox="1"/>
           <p:nvPr>
             <p:ph type="title"/>
@@ -10987,7 +14779,7 @@
       </p:sp>
       <p:sp>
         <p:nvSpPr>
-          <p:cNvPr id="193" name="Google Shape;193;p29"/>
+          <p:cNvPr id="235" name="Google Shape;235;p36"/>
           <p:cNvSpPr txBox="1"/>
           <p:nvPr>
             <p:ph idx="1" type="body"/>
@@ -11027,7 +14819,7 @@
       </p:sp>
       <p:sp>
         <p:nvSpPr>
-          <p:cNvPr id="194" name="Google Shape;194;p29"/>
+          <p:cNvPr id="236" name="Google Shape;236;p36"/>
           <p:cNvSpPr txBox="1"/>
           <p:nvPr>
             <p:ph idx="12" type="sldNum"/>
@@ -11111,7 +14903,7 @@
   <p:cSld>
     <p:spTree>
       <p:nvGrpSpPr>
-        <p:cNvPr id="198" name="Shape 198"/>
+        <p:cNvPr id="240" name="Shape 240"/>
         <p:cNvGrpSpPr/>
         <p:nvPr/>
       </p:nvGrpSpPr>
@@ -11125,7 +14917,7 @@
       </p:grpSpPr>
       <p:sp>
         <p:nvSpPr>
-          <p:cNvPr id="199" name="Google Shape;199;p30"/>
+          <p:cNvPr id="241" name="Google Shape;241;p37"/>
           <p:cNvSpPr txBox="1"/>
           <p:nvPr>
             <p:ph type="title"/>
@@ -11165,7 +14957,7 @@
       </p:sp>
       <p:sp>
         <p:nvSpPr>
-          <p:cNvPr id="200" name="Google Shape;200;p30"/>
+          <p:cNvPr id="242" name="Google Shape;242;p37"/>
           <p:cNvSpPr txBox="1"/>
           <p:nvPr>
             <p:ph idx="1" type="body"/>
@@ -11376,7 +15168,7 @@
       </p:sp>
       <p:sp>
         <p:nvSpPr>
-          <p:cNvPr id="201" name="Google Shape;201;p30"/>
+          <p:cNvPr id="243" name="Google Shape;243;p37"/>
           <p:cNvSpPr txBox="1"/>
           <p:nvPr>
             <p:ph idx="12" type="sldNum"/>
@@ -11460,7 +15252,7 @@
   <p:cSld>
     <p:spTree>
       <p:nvGrpSpPr>
-        <p:cNvPr id="205" name="Shape 205"/>
+        <p:cNvPr id="247" name="Shape 247"/>
         <p:cNvGrpSpPr/>
         <p:nvPr/>
       </p:nvGrpSpPr>
@@ -11474,7 +15266,7 @@
       </p:grpSpPr>
       <p:sp>
         <p:nvSpPr>
-          <p:cNvPr id="206" name="Google Shape;206;p31"/>
+          <p:cNvPr id="248" name="Google Shape;248;p38"/>
           <p:cNvSpPr txBox="1"/>
           <p:nvPr>
             <p:ph type="ctrTitle"/>
@@ -11514,7 +15306,7 @@
       </p:sp>
       <p:sp>
         <p:nvSpPr>
-          <p:cNvPr id="207" name="Google Shape;207;p31"/>
+          <p:cNvPr id="249" name="Google Shape;249;p38"/>
           <p:cNvSpPr txBox="1"/>
           <p:nvPr>
             <p:ph idx="1" type="subTitle"/>
@@ -11644,7 +15436,7 @@
   <p:cSld>
     <p:spTree>
       <p:nvGrpSpPr>
-        <p:cNvPr id="211" name="Shape 211"/>
+        <p:cNvPr id="253" name="Shape 253"/>
         <p:cNvGrpSpPr/>
         <p:nvPr/>
       </p:nvGrpSpPr>
@@ -11658,7 +15450,7 @@
       </p:grpSpPr>
       <p:sp>
         <p:nvSpPr>
-          <p:cNvPr id="212" name="Google Shape;212;p32"/>
+          <p:cNvPr id="254" name="Google Shape;254;p39"/>
           <p:cNvSpPr txBox="1"/>
           <p:nvPr>
             <p:ph type="title"/>
@@ -11698,7 +15490,7 @@
       </p:sp>
       <p:sp>
         <p:nvSpPr>
-          <p:cNvPr id="213" name="Google Shape;213;p32"/>
+          <p:cNvPr id="255" name="Google Shape;255;p39"/>
           <p:cNvSpPr txBox="1"/>
           <p:nvPr>
             <p:ph idx="12" type="sldNum"/>
@@ -11771,7 +15563,7 @@
       </p:sp>
       <p:sp>
         <p:nvSpPr>
-          <p:cNvPr id="214" name="Google Shape;214;p32"/>
+          <p:cNvPr id="256" name="Google Shape;256;p39"/>
           <p:cNvSpPr txBox="1"/>
           <p:nvPr>
             <p:ph idx="1" type="body"/>
@@ -11866,7 +15658,7 @@
             </a:pPr>
             <a:r>
               <a:rPr lang="en"/>
-              <a:t>© Copyright 2009-2025 Dirk Riehle, some rights reserved</a:t>
+              <a:t>© Copyright 2009-2026 Dirk Riehle, some rights reserved</a:t>
             </a:r>
             <a:endParaRPr/>
           </a:p>
@@ -11900,7 +15692,7 @@
   <p:cSld>
     <p:spTree>
       <p:nvGrpSpPr>
-        <p:cNvPr id="218" name="Shape 218"/>
+        <p:cNvPr id="260" name="Shape 260"/>
         <p:cNvGrpSpPr/>
         <p:nvPr/>
       </p:nvGrpSpPr>
@@ -11914,7 +15706,7 @@
       </p:grpSpPr>
       <p:sp>
         <p:nvSpPr>
-          <p:cNvPr id="219" name="Google Shape;219;p33"/>
+          <p:cNvPr id="261" name="Google Shape;261;p40"/>
           <p:cNvSpPr txBox="1"/>
           <p:nvPr>
             <p:ph type="title"/>
@@ -11954,7 +15746,7 @@
       </p:sp>
       <p:sp>
         <p:nvSpPr>
-          <p:cNvPr id="220" name="Google Shape;220;p33"/>
+          <p:cNvPr id="262" name="Google Shape;262;p40"/>
           <p:cNvSpPr txBox="1"/>
           <p:nvPr>
             <p:ph idx="12" type="sldNum"/>
@@ -12027,7 +15819,7 @@
       </p:sp>
       <p:pic>
         <p:nvPicPr>
-          <p:cNvPr id="221" name="Google Shape;221;p33"/>
+          <p:cNvPr id="263" name="Google Shape;263;p40"/>
           <p:cNvPicPr preferRelativeResize="0"/>
           <p:nvPr/>
         </p:nvPicPr>
@@ -12061,7 +15853,7 @@
       </p:pic>
       <p:pic>
         <p:nvPicPr>
-          <p:cNvPr id="222" name="Google Shape;222;p33"/>
+          <p:cNvPr id="264" name="Google Shape;264;p40"/>
           <p:cNvPicPr preferRelativeResize="0"/>
           <p:nvPr/>
         </p:nvPicPr>
@@ -12106,7 +15898,7 @@
   <p:cSld>
     <p:spTree>
       <p:nvGrpSpPr>
-        <p:cNvPr id="226" name="Shape 226"/>
+        <p:cNvPr id="268" name="Shape 268"/>
         <p:cNvGrpSpPr/>
         <p:nvPr/>
       </p:nvGrpSpPr>
@@ -12120,7 +15912,7 @@
       </p:grpSpPr>
       <p:sp>
         <p:nvSpPr>
-          <p:cNvPr id="227" name="Google Shape;227;p34"/>
+          <p:cNvPr id="269" name="Google Shape;269;p41"/>
           <p:cNvSpPr txBox="1"/>
           <p:nvPr>
             <p:ph type="title"/>
@@ -12160,7 +15952,7 @@
       </p:sp>
       <p:sp>
         <p:nvSpPr>
-          <p:cNvPr id="228" name="Google Shape;228;p34"/>
+          <p:cNvPr id="270" name="Google Shape;270;p41"/>
           <p:cNvSpPr txBox="1"/>
           <p:nvPr>
             <p:ph idx="12" type="sldNum"/>
@@ -12233,7 +16025,7 @@
       </p:sp>
       <p:pic>
         <p:nvPicPr>
-          <p:cNvPr id="229" name="Google Shape;229;p34"/>
+          <p:cNvPr id="271" name="Google Shape;271;p41"/>
           <p:cNvPicPr preferRelativeResize="0"/>
           <p:nvPr/>
         </p:nvPicPr>
@@ -12267,7 +16059,7 @@
       </p:pic>
       <p:pic>
         <p:nvPicPr>
-          <p:cNvPr id="230" name="Google Shape;230;p34"/>
+          <p:cNvPr id="272" name="Google Shape;272;p41"/>
           <p:cNvPicPr preferRelativeResize="0"/>
           <p:nvPr/>
         </p:nvPicPr>
@@ -12312,7 +16104,7 @@
   <p:cSld>
     <p:spTree>
       <p:nvGrpSpPr>
-        <p:cNvPr id="63" name="Shape 63"/>
+        <p:cNvPr id="105" name="Shape 105"/>
         <p:cNvGrpSpPr/>
         <p:nvPr/>
       </p:nvGrpSpPr>
@@ -12326,7 +16118,7 @@
       </p:grpSpPr>
       <p:sp>
         <p:nvSpPr>
-          <p:cNvPr id="64" name="Google Shape;64;p10"/>
+          <p:cNvPr id="106" name="Google Shape;106;p17"/>
           <p:cNvSpPr txBox="1"/>
           <p:nvPr>
             <p:ph type="title"/>
@@ -12366,7 +16158,7 @@
       </p:sp>
       <p:sp>
         <p:nvSpPr>
-          <p:cNvPr id="65" name="Google Shape;65;p10"/>
+          <p:cNvPr id="107" name="Google Shape;107;p17"/>
           <p:cNvSpPr txBox="1"/>
           <p:nvPr>
             <p:ph idx="1" type="body"/>
@@ -12478,7 +16270,7 @@
       </p:sp>
       <p:sp>
         <p:nvSpPr>
-          <p:cNvPr id="66" name="Google Shape;66;p10"/>
+          <p:cNvPr id="108" name="Google Shape;108;p17"/>
           <p:cNvSpPr txBox="1"/>
           <p:nvPr>
             <p:ph idx="12" type="sldNum"/>
@@ -12562,7 +16354,7 @@
   <p:cSld>
     <p:spTree>
       <p:nvGrpSpPr>
-        <p:cNvPr id="70" name="Shape 70"/>
+        <p:cNvPr id="112" name="Shape 112"/>
         <p:cNvGrpSpPr/>
         <p:nvPr/>
       </p:nvGrpSpPr>
@@ -12576,7 +16368,7 @@
       </p:grpSpPr>
       <p:sp>
         <p:nvSpPr>
-          <p:cNvPr id="71" name="Google Shape;71;p11"/>
+          <p:cNvPr id="113" name="Google Shape;113;p18"/>
           <p:cNvSpPr txBox="1"/>
           <p:nvPr>
             <p:ph type="title"/>
@@ -12627,7 +16419,7 @@
   <p:cSld>
     <p:spTree>
       <p:nvGrpSpPr>
-        <p:cNvPr id="75" name="Shape 75"/>
+        <p:cNvPr id="117" name="Shape 117"/>
         <p:cNvGrpSpPr/>
         <p:nvPr/>
       </p:nvGrpSpPr>
@@ -12641,7 +16433,7 @@
       </p:grpSpPr>
       <p:sp>
         <p:nvSpPr>
-          <p:cNvPr id="76" name="Google Shape;76;p12"/>
+          <p:cNvPr id="118" name="Google Shape;118;p19"/>
           <p:cNvSpPr txBox="1"/>
           <p:nvPr>
             <p:ph type="title"/>
@@ -12681,7 +16473,7 @@
       </p:sp>
       <p:sp>
         <p:nvSpPr>
-          <p:cNvPr id="77" name="Google Shape;77;p12"/>
+          <p:cNvPr id="119" name="Google Shape;119;p19"/>
           <p:cNvSpPr txBox="1"/>
           <p:nvPr>
             <p:ph idx="12" type="sldNum"/>
@@ -12754,7 +16546,7 @@
       </p:sp>
       <p:sp>
         <p:nvSpPr>
-          <p:cNvPr id="78" name="Google Shape;78;p12"/>
+          <p:cNvPr id="120" name="Google Shape;120;p19"/>
           <p:cNvSpPr txBox="1"/>
           <p:nvPr>
             <p:ph idx="1" type="body"/>
@@ -12871,7 +16663,7 @@
   <p:cSld>
     <p:spTree>
       <p:nvGrpSpPr>
-        <p:cNvPr id="82" name="Shape 82"/>
+        <p:cNvPr id="124" name="Shape 124"/>
         <p:cNvGrpSpPr/>
         <p:nvPr/>
       </p:nvGrpSpPr>
@@ -12885,7 +16677,7 @@
       </p:grpSpPr>
       <p:sp>
         <p:nvSpPr>
-          <p:cNvPr id="83" name="Google Shape;83;p13"/>
+          <p:cNvPr id="125" name="Google Shape;125;p20"/>
           <p:cNvSpPr txBox="1"/>
           <p:nvPr>
             <p:ph type="title"/>
@@ -12925,7 +16717,7 @@
       </p:sp>
       <p:sp>
         <p:nvSpPr>
-          <p:cNvPr id="84" name="Google Shape;84;p13"/>
+          <p:cNvPr id="126" name="Google Shape;126;p20"/>
           <p:cNvSpPr txBox="1"/>
           <p:nvPr>
             <p:ph idx="12" type="sldNum"/>
@@ -12998,7 +16790,7 @@
       </p:sp>
       <p:sp>
         <p:nvSpPr>
-          <p:cNvPr id="85" name="Google Shape;85;p13"/>
+          <p:cNvPr id="127" name="Google Shape;127;p20"/>
           <p:cNvSpPr txBox="1"/>
           <p:nvPr>
             <p:ph idx="1" type="body"/>
@@ -13200,7 +16992,7 @@
   <p:cSld>
     <p:spTree>
       <p:nvGrpSpPr>
-        <p:cNvPr id="89" name="Shape 89"/>
+        <p:cNvPr id="131" name="Shape 131"/>
         <p:cNvGrpSpPr/>
         <p:nvPr/>
       </p:nvGrpSpPr>
@@ -13214,7 +17006,7 @@
       </p:grpSpPr>
       <p:sp>
         <p:nvSpPr>
-          <p:cNvPr id="90" name="Google Shape;90;p14"/>
+          <p:cNvPr id="132" name="Google Shape;132;p21"/>
           <p:cNvSpPr txBox="1"/>
           <p:nvPr>
             <p:ph type="title"/>
@@ -13254,7 +17046,7 @@
       </p:sp>
       <p:sp>
         <p:nvSpPr>
-          <p:cNvPr id="91" name="Google Shape;91;p14"/>
+          <p:cNvPr id="133" name="Google Shape;133;p21"/>
           <p:cNvSpPr txBox="1"/>
           <p:nvPr>
             <p:ph idx="12" type="sldNum"/>
@@ -13327,7 +17119,7 @@
       </p:sp>
       <p:graphicFrame>
         <p:nvGraphicFramePr>
-          <p:cNvPr id="92" name="Google Shape;92;p14"/>
+          <p:cNvPr id="134" name="Google Shape;134;p21"/>
           <p:cNvGraphicFramePr/>
           <p:nvPr/>
         </p:nvGraphicFramePr>
@@ -13340,7 +17132,7 @@
             <a:tbl>
               <a:tblPr>
                 <a:noFill/>
-                <a:tableStyleId>{A2AED6DF-5462-4E47-BE27-EFA0A0A61F82}</a:tableStyleId>
+                <a:tableStyleId>{A2E082F3-DF06-4339-A54E-E921D8CA4927}</a:tableStyleId>
               </a:tblPr>
               <a:tblGrid>
                 <a:gridCol w="1432550"/>
@@ -15629,7 +19421,7 @@
   <p:cSld>
     <p:spTree>
       <p:nvGrpSpPr>
-        <p:cNvPr id="96" name="Shape 96"/>
+        <p:cNvPr id="138" name="Shape 138"/>
         <p:cNvGrpSpPr/>
         <p:nvPr/>
       </p:nvGrpSpPr>
@@ -15643,7 +19435,7 @@
       </p:grpSpPr>
       <p:sp>
         <p:nvSpPr>
-          <p:cNvPr id="97" name="Google Shape;97;p15"/>
+          <p:cNvPr id="139" name="Google Shape;139;p22"/>
           <p:cNvSpPr txBox="1"/>
           <p:nvPr>
             <p:ph type="title"/>
@@ -15683,7 +19475,7 @@
       </p:sp>
       <p:sp>
         <p:nvSpPr>
-          <p:cNvPr id="98" name="Google Shape;98;p15"/>
+          <p:cNvPr id="140" name="Google Shape;140;p22"/>
           <p:cNvSpPr txBox="1"/>
           <p:nvPr>
             <p:ph idx="12" type="sldNum"/>
@@ -15756,7 +19548,7 @@
       </p:sp>
       <p:sp>
         <p:nvSpPr>
-          <p:cNvPr id="99" name="Google Shape;99;p15"/>
+          <p:cNvPr id="141" name="Google Shape;141;p22"/>
           <p:cNvSpPr txBox="1"/>
           <p:nvPr>
             <p:ph idx="1" type="body"/>
@@ -15819,7 +19611,7 @@
   <p:cSld>
     <p:spTree>
       <p:nvGrpSpPr>
-        <p:cNvPr id="103" name="Shape 103"/>
+        <p:cNvPr id="145" name="Shape 145"/>
         <p:cNvGrpSpPr/>
         <p:nvPr/>
       </p:nvGrpSpPr>
@@ -15833,7 +19625,7 @@
       </p:grpSpPr>
       <p:sp>
         <p:nvSpPr>
-          <p:cNvPr id="104" name="Google Shape;104;p16"/>
+          <p:cNvPr id="146" name="Google Shape;146;p23"/>
           <p:cNvSpPr txBox="1"/>
           <p:nvPr>
             <p:ph idx="1" type="body"/>
@@ -16036,7 +19828,7 @@
       </p:sp>
       <p:sp>
         <p:nvSpPr>
-          <p:cNvPr id="105" name="Google Shape;105;p16"/>
+          <p:cNvPr id="147" name="Google Shape;147;p23"/>
           <p:cNvSpPr txBox="1"/>
           <p:nvPr>
             <p:ph type="title"/>
@@ -16076,7 +19868,7 @@
       </p:sp>
       <p:sp>
         <p:nvSpPr>
-          <p:cNvPr id="106" name="Google Shape;106;p16"/>
+          <p:cNvPr id="148" name="Google Shape;148;p23"/>
           <p:cNvSpPr txBox="1"/>
           <p:nvPr>
             <p:ph idx="12" type="sldNum"/>
@@ -16435,6 +20227,285 @@
 </file>
 
 <file path=ppt/theme/theme2.xml><?xml version="1.0" encoding="utf-8"?>
+<a:theme xmlns:a="http://schemas.openxmlformats.org/drawingml/2006/main" xmlns:r="http://schemas.openxmlformats.org/officeDocument/2006/relationships" name="AMOS Slides Template">
+  <a:themeElements>
+    <a:clrScheme name="Simple Light">
+      <a:dk1>
+        <a:srgbClr val="000000"/>
+      </a:dk1>
+      <a:lt1>
+        <a:srgbClr val="FFFFFF"/>
+      </a:lt1>
+      <a:dk2>
+        <a:srgbClr val="404040"/>
+      </a:dk2>
+      <a:lt2>
+        <a:srgbClr val="808080"/>
+      </a:lt2>
+      <a:accent1>
+        <a:srgbClr val="D0D0D0"/>
+      </a:accent1>
+      <a:accent2>
+        <a:srgbClr val="4169E1"/>
+      </a:accent2>
+      <a:accent3>
+        <a:srgbClr val="4CAF50"/>
+      </a:accent3>
+      <a:accent4>
+        <a:srgbClr val="FEB612"/>
+      </a:accent4>
+      <a:accent5>
+        <a:srgbClr val="F36838"/>
+      </a:accent5>
+      <a:accent6>
+        <a:srgbClr val="8E44AD"/>
+      </a:accent6>
+      <a:hlink>
+        <a:srgbClr val="1E90FF"/>
+      </a:hlink>
+      <a:folHlink>
+        <a:srgbClr val="0097A7"/>
+      </a:folHlink>
+    </a:clrScheme>
+    <a:fontScheme name="Office">
+      <a:majorFont>
+        <a:latin typeface="Arial"/>
+        <a:ea typeface=""/>
+        <a:cs typeface=""/>
+        <a:font script="Jpan" typeface="ＭＳ Ｐゴシック"/>
+        <a:font script="Hang" typeface="맑은 고딕"/>
+        <a:font script="Hans" typeface="宋体"/>
+        <a:font script="Hant" typeface="新細明體"/>
+        <a:font script="Arab" typeface="Times New Roman"/>
+        <a:font script="Hebr" typeface="Times New Roman"/>
+        <a:font script="Thai" typeface="Angsana New"/>
+        <a:font script="Ethi" typeface="Nyala"/>
+        <a:font script="Beng" typeface="Vrinda"/>
+        <a:font script="Gujr" typeface="Shruti"/>
+        <a:font script="Khmr" typeface="MoolBoran"/>
+        <a:font script="Knda" typeface="Tunga"/>
+        <a:font script="Guru" typeface="Raavi"/>
+        <a:font script="Cans" typeface="Euphemia"/>
+        <a:font script="Cher" typeface="Plantagenet Cherokee"/>
+        <a:font script="Yiii" typeface="Microsoft Yi Baiti"/>
+        <a:font script="Tibt" typeface="Microsoft Himalaya"/>
+        <a:font script="Thaa" typeface="MV Boli"/>
+        <a:font script="Deva" typeface="Mangal"/>
+        <a:font script="Telu" typeface="Gautami"/>
+        <a:font script="Taml" typeface="Latha"/>
+        <a:font script="Syrc" typeface="Estrangelo Edessa"/>
+        <a:font script="Orya" typeface="Kalinga"/>
+        <a:font script="Mlym" typeface="Kartika"/>
+        <a:font script="Laoo" typeface="DokChampa"/>
+        <a:font script="Sinh" typeface="Iskoola Pota"/>
+        <a:font script="Mong" typeface="Mongolian Baiti"/>
+        <a:font script="Viet" typeface="Times New Roman"/>
+        <a:font script="Uigh" typeface="Microsoft Uighur"/>
+        <a:font script="Geor" typeface="Sylfaen"/>
+      </a:majorFont>
+      <a:minorFont>
+        <a:latin typeface="Arial"/>
+        <a:ea typeface=""/>
+        <a:cs typeface=""/>
+        <a:font script="Jpan" typeface="ＭＳ Ｐゴシック"/>
+        <a:font script="Hang" typeface="맑은 고딕"/>
+        <a:font script="Hans" typeface="宋体"/>
+        <a:font script="Hant" typeface="新細明體"/>
+        <a:font script="Arab" typeface="Arial"/>
+        <a:font script="Hebr" typeface="Arial"/>
+        <a:font script="Thai" typeface="Cordia New"/>
+        <a:font script="Ethi" typeface="Nyala"/>
+        <a:font script="Beng" typeface="Vrinda"/>
+        <a:font script="Gujr" typeface="Shruti"/>
+        <a:font script="Khmr" typeface="DaunPenh"/>
+        <a:font script="Knda" typeface="Tunga"/>
+        <a:font script="Guru" typeface="Raavi"/>
+        <a:font script="Cans" typeface="Euphemia"/>
+        <a:font script="Cher" typeface="Plantagenet Cherokee"/>
+        <a:font script="Yiii" typeface="Microsoft Yi Baiti"/>
+        <a:font script="Tibt" typeface="Microsoft Himalaya"/>
+        <a:font script="Thaa" typeface="MV Boli"/>
+        <a:font script="Deva" typeface="Mangal"/>
+        <a:font script="Telu" typeface="Gautami"/>
+        <a:font script="Taml" typeface="Latha"/>
+        <a:font script="Syrc" typeface="Estrangelo Edessa"/>
+        <a:font script="Orya" typeface="Kalinga"/>
+        <a:font script="Mlym" typeface="Kartika"/>
+        <a:font script="Laoo" typeface="DokChampa"/>
+        <a:font script="Sinh" typeface="Iskoola Pota"/>
+        <a:font script="Mong" typeface="Mongolian Baiti"/>
+        <a:font script="Viet" typeface="Arial"/>
+        <a:font script="Uigh" typeface="Microsoft Uighur"/>
+        <a:font script="Geor" typeface="Sylfaen"/>
+      </a:minorFont>
+    </a:fontScheme>
+    <a:fmtScheme name="Office">
+      <a:fillStyleLst>
+        <a:solidFill>
+          <a:schemeClr val="phClr"/>
+        </a:solidFill>
+        <a:gradFill rotWithShape="1">
+          <a:gsLst>
+            <a:gs pos="0">
+              <a:schemeClr val="phClr">
+                <a:tint val="50000"/>
+                <a:satMod val="300000"/>
+              </a:schemeClr>
+            </a:gs>
+            <a:gs pos="35000">
+              <a:schemeClr val="phClr">
+                <a:tint val="37000"/>
+                <a:satMod val="300000"/>
+              </a:schemeClr>
+            </a:gs>
+            <a:gs pos="100000">
+              <a:schemeClr val="phClr">
+                <a:tint val="15000"/>
+                <a:satMod val="350000"/>
+              </a:schemeClr>
+            </a:gs>
+          </a:gsLst>
+          <a:lin ang="16200000" scaled="1"/>
+        </a:gradFill>
+        <a:gradFill rotWithShape="1">
+          <a:gsLst>
+            <a:gs pos="0">
+              <a:schemeClr val="phClr">
+                <a:tint val="100000"/>
+                <a:shade val="100000"/>
+                <a:satMod val="130000"/>
+              </a:schemeClr>
+            </a:gs>
+            <a:gs pos="100000">
+              <a:schemeClr val="phClr">
+                <a:tint val="50000"/>
+                <a:shade val="100000"/>
+                <a:satMod val="350000"/>
+              </a:schemeClr>
+            </a:gs>
+          </a:gsLst>
+          <a:lin ang="16200000" scaled="0"/>
+        </a:gradFill>
+      </a:fillStyleLst>
+      <a:lnStyleLst>
+        <a:ln w="9525" cap="flat" cmpd="sng" algn="ctr">
+          <a:solidFill>
+            <a:schemeClr val="phClr">
+              <a:shade val="95000"/>
+              <a:satMod val="105000"/>
+            </a:schemeClr>
+          </a:solidFill>
+          <a:prstDash val="solid"/>
+        </a:ln>
+        <a:ln w="25400" cap="flat" cmpd="sng" algn="ctr">
+          <a:solidFill>
+            <a:schemeClr val="phClr"/>
+          </a:solidFill>
+          <a:prstDash val="solid"/>
+        </a:ln>
+        <a:ln w="38100" cap="flat" cmpd="sng" algn="ctr">
+          <a:solidFill>
+            <a:schemeClr val="phClr"/>
+          </a:solidFill>
+          <a:prstDash val="solid"/>
+        </a:ln>
+      </a:lnStyleLst>
+      <a:effectStyleLst>
+        <a:effectStyle>
+          <a:effectLst>
+            <a:outerShdw blurRad="40000" dist="20000" dir="5400000" rotWithShape="0">
+              <a:srgbClr val="000000">
+                <a:alpha val="38000"/>
+              </a:srgbClr>
+            </a:outerShdw>
+          </a:effectLst>
+        </a:effectStyle>
+        <a:effectStyle>
+          <a:effectLst>
+            <a:outerShdw blurRad="40000" dist="23000" dir="5400000" rotWithShape="0">
+              <a:srgbClr val="000000">
+                <a:alpha val="35000"/>
+              </a:srgbClr>
+            </a:outerShdw>
+          </a:effectLst>
+        </a:effectStyle>
+        <a:effectStyle>
+          <a:effectLst>
+            <a:outerShdw blurRad="40000" dist="23000" dir="5400000" rotWithShape="0">
+              <a:srgbClr val="000000">
+                <a:alpha val="35000"/>
+              </a:srgbClr>
+            </a:outerShdw>
+          </a:effectLst>
+          <a:scene3d>
+            <a:camera prst="orthographicFront">
+              <a:rot lat="0" lon="0" rev="0"/>
+            </a:camera>
+            <a:lightRig rig="threePt" dir="t">
+              <a:rot lat="0" lon="0" rev="1200000"/>
+            </a:lightRig>
+          </a:scene3d>
+          <a:sp3d>
+            <a:bevelT w="63500" h="25400"/>
+          </a:sp3d>
+        </a:effectStyle>
+      </a:effectStyleLst>
+      <a:bgFillStyleLst>
+        <a:solidFill>
+          <a:schemeClr val="phClr"/>
+        </a:solidFill>
+        <a:gradFill rotWithShape="1">
+          <a:gsLst>
+            <a:gs pos="0">
+              <a:schemeClr val="phClr">
+                <a:tint val="40000"/>
+                <a:satMod val="350000"/>
+              </a:schemeClr>
+            </a:gs>
+            <a:gs pos="40000">
+              <a:schemeClr val="phClr">
+                <a:tint val="45000"/>
+                <a:shade val="99000"/>
+                <a:satMod val="350000"/>
+              </a:schemeClr>
+            </a:gs>
+            <a:gs pos="100000">
+              <a:schemeClr val="phClr">
+                <a:shade val="20000"/>
+                <a:satMod val="255000"/>
+              </a:schemeClr>
+            </a:gs>
+          </a:gsLst>
+          <a:path path="circle">
+            <a:fillToRect l="50000" t="-80000" r="50000" b="180000"/>
+          </a:path>
+        </a:gradFill>
+        <a:gradFill rotWithShape="1">
+          <a:gsLst>
+            <a:gs pos="0">
+              <a:schemeClr val="phClr">
+                <a:tint val="80000"/>
+                <a:satMod val="300000"/>
+              </a:schemeClr>
+            </a:gs>
+            <a:gs pos="100000">
+              <a:schemeClr val="phClr">
+                <a:shade val="30000"/>
+                <a:satMod val="200000"/>
+              </a:schemeClr>
+            </a:gs>
+          </a:gsLst>
+          <a:path path="circle">
+            <a:fillToRect l="50000" t="50000" r="50000" b="50000"/>
+          </a:path>
+        </a:gradFill>
+      </a:bgFillStyleLst>
+    </a:fmtScheme>
+  </a:themeElements>
+</a:theme>
+</file>
+
+<file path=ppt/theme/theme3.xml><?xml version="1.0" encoding="utf-8"?>
 <a:theme xmlns:a="http://schemas.openxmlformats.org/drawingml/2006/main" xmlns:r="http://schemas.openxmlformats.org/officeDocument/2006/relationships">
   <a:themeElements>
     <a:clrScheme name="Default">
